--- a/slides/CSC336-Lecture-18-Request-Handling-and-Routing.pptx
+++ b/slides/CSC336-Lecture-18-Request-Handling-and-Routing.pptx
@@ -3815,79 +3815,44 @@
       </p:sp>
       <p:sp>
         <p:nvSpPr>
-          <p:cNvPr id="6" name="Text 4"/>
-          <p:cNvSpPr txBox="1"/>
-          <p:nvPr/>
-        </p:nvSpPr>
-        <p:spPr>
-          <a:xfrm>
-            <a:off x="640080" y="6446520"/>
-            <a:ext cx="8686800" cy="292608"/>
-          </a:xfrm>
-          <a:prstGeom prst="rect">
-            <a:avLst/>
-          </a:prstGeom>
-          <a:noFill/>
-          <a:ln/>
-        </p:spPr>
-        <p:txBody>
-          <a:bodyPr wrap="square" lIns="0" tIns="0" rIns="0" bIns="0" rtlCol="0" anchor="ctr"/>
-          <a:lstStyle/>
-          <a:p>
-            <a:pPr algn="l" indent="0" marL="0">
-              <a:buNone/>
-            </a:pPr>
-            <a:r>
-              <a:rPr lang="en-US" sz="900" dirty="0">
-                <a:solidFill>
-                  <a:srgbClr val="9AA3D8"/>
-                </a:solidFill>
-                <a:latin typeface="Calibri" pitchFamily="34" charset="0"/>
-                <a:ea typeface="Calibri" pitchFamily="34" charset="-122"/>
-                <a:cs typeface="Calibri" pitchFamily="34" charset="-120"/>
-              </a:rPr>
-              <a:t>Usman Akram  •  COMSATS University Islamabad</a:t>
-            </a:r>
-            <a:endParaRPr lang="en-US" sz="900" dirty="0"/>
-          </a:p>
-        </p:txBody>
-      </p:sp>
-      <p:sp>
-        <p:nvSpPr>
-          <p:cNvPr id="7" name="Text 5"/>
-          <p:cNvSpPr txBox="1"/>
-          <p:nvPr/>
-        </p:nvSpPr>
-        <p:spPr>
-          <a:xfrm>
-            <a:off x="11155680" y="6446520"/>
-            <a:ext cx="457200" cy="292608"/>
-          </a:xfrm>
-          <a:prstGeom prst="rect">
-            <a:avLst/>
-          </a:prstGeom>
-          <a:noFill/>
-          <a:ln/>
-        </p:spPr>
-        <p:txBody>
-          <a:bodyPr wrap="square" lIns="0" tIns="0" rIns="0" bIns="0" rtlCol="0" anchor="ctr"/>
-          <a:lstStyle/>
-          <a:p>
-            <a:pPr algn="r" indent="0" marL="0">
-              <a:buNone/>
-            </a:pPr>
-            <a:r>
-              <a:rPr lang="en-US" sz="900" dirty="0">
-                <a:solidFill>
-                  <a:srgbClr val="9AA3D8"/>
-                </a:solidFill>
-                <a:latin typeface="Calibri" pitchFamily="34" charset="0"/>
-                <a:ea typeface="Calibri" pitchFamily="34" charset="-122"/>
-                <a:cs typeface="Calibri" pitchFamily="34" charset="-120"/>
-              </a:rPr>
-              <a:t>1</a:t>
-            </a:r>
-            <a:endParaRPr lang="en-US" sz="900" dirty="0"/>
+          <p:cNvPr id="8" name="cuinotes-footer-mark"/>
+          <p:cNvSpPr txBox="1"/>
+          <p:nvPr/>
+        </p:nvSpPr>
+        <p:spPr>
+          <a:xfrm>
+            <a:off x="9951720" y="6455664"/>
+            <a:ext cx="2011680" cy="292608"/>
+          </a:xfrm>
+          <a:prstGeom prst="rect">
+            <a:avLst/>
+          </a:prstGeom>
+          <a:noFill/>
+        </p:spPr>
+        <p:txBody>
+          <a:bodyPr wrap="none" lIns="0" rIns="0" tIns="0" bIns="0">
+            <a:spAutoFit/>
+          </a:bodyPr>
+          <a:lstStyle/>
+          <a:p>
+            <a:pPr algn="r"/>
+            <a:r>
+              <a:rPr sz="1000">
+                <a:solidFill>
+                  <a:srgbClr val="8A939B"/>
+                </a:solidFill>
+                <a:hlinkClick r:id="rId3"/>
+              </a:rPr>
+              <a:t>cuinotes.com</a:t>
+            </a:r>
+            <a:r>
+              <a:rPr sz="1000">
+                <a:solidFill>
+                  <a:srgbClr val="8A939B"/>
+                </a:solidFill>
+              </a:rPr>
+              <a:t>  ·  1</a:t>
+            </a:r>
           </a:p>
         </p:txBody>
       </p:sp>
@@ -4020,6 +3985,10 @@
           </a:solidFill>
           <a:ln/>
         </p:spPr>
+        <p:txBody>
+          <a:bodyPr/>
+          <a:p/>
+        </p:txBody>
       </p:sp>
       <p:sp>
         <p:nvSpPr>
@@ -4118,6 +4087,10 @@
           </a:solidFill>
           <a:ln/>
         </p:spPr>
+        <p:txBody>
+          <a:bodyPr/>
+          <a:p/>
+        </p:txBody>
       </p:sp>
       <p:sp>
         <p:nvSpPr>
@@ -4216,6 +4189,10 @@
           </a:solidFill>
           <a:ln/>
         </p:spPr>
+        <p:txBody>
+          <a:bodyPr/>
+          <a:p/>
+        </p:txBody>
       </p:sp>
       <p:sp>
         <p:nvSpPr>
@@ -4297,79 +4274,44 @@
       </p:sp>
       <p:sp>
         <p:nvSpPr>
-          <p:cNvPr id="13" name="Text 11"/>
-          <p:cNvSpPr txBox="1"/>
-          <p:nvPr/>
-        </p:nvSpPr>
-        <p:spPr>
-          <a:xfrm>
-            <a:off x="640080" y="6446520"/>
-            <a:ext cx="8686800" cy="292608"/>
-          </a:xfrm>
-          <a:prstGeom prst="rect">
-            <a:avLst/>
-          </a:prstGeom>
-          <a:noFill/>
-          <a:ln/>
-        </p:spPr>
-        <p:txBody>
-          <a:bodyPr wrap="square" lIns="0" tIns="0" rIns="0" bIns="0" rtlCol="0" anchor="ctr"/>
-          <a:lstStyle/>
-          <a:p>
-            <a:pPr algn="l" indent="0" marL="0">
-              <a:buNone/>
-            </a:pPr>
-            <a:r>
-              <a:rPr lang="en-US" sz="900" dirty="0">
-                <a:solidFill>
-                  <a:srgbClr val="5D5D72"/>
-                </a:solidFill>
-                <a:latin typeface="Calibri" pitchFamily="34" charset="0"/>
-                <a:ea typeface="Calibri" pitchFamily="34" charset="-122"/>
-                <a:cs typeface="Calibri" pitchFamily="34" charset="-120"/>
-              </a:rPr>
-              <a:t>Usman Akram  •  COMSATS University Islamabad</a:t>
-            </a:r>
-            <a:endParaRPr lang="en-US" sz="900" dirty="0"/>
-          </a:p>
-        </p:txBody>
-      </p:sp>
-      <p:sp>
-        <p:nvSpPr>
-          <p:cNvPr id="14" name="Text 12"/>
-          <p:cNvSpPr txBox="1"/>
-          <p:nvPr/>
-        </p:nvSpPr>
-        <p:spPr>
-          <a:xfrm>
-            <a:off x="11155680" y="6446520"/>
-            <a:ext cx="457200" cy="292608"/>
-          </a:xfrm>
-          <a:prstGeom prst="rect">
-            <a:avLst/>
-          </a:prstGeom>
-          <a:noFill/>
-          <a:ln/>
-        </p:spPr>
-        <p:txBody>
-          <a:bodyPr wrap="square" lIns="0" tIns="0" rIns="0" bIns="0" rtlCol="0" anchor="ctr"/>
-          <a:lstStyle/>
-          <a:p>
-            <a:pPr algn="r" indent="0" marL="0">
-              <a:buNone/>
-            </a:pPr>
-            <a:r>
-              <a:rPr lang="en-US" sz="900" dirty="0">
-                <a:solidFill>
-                  <a:srgbClr val="5D5D72"/>
-                </a:solidFill>
-                <a:latin typeface="Calibri" pitchFamily="34" charset="0"/>
-                <a:ea typeface="Calibri" pitchFamily="34" charset="-122"/>
-                <a:cs typeface="Calibri" pitchFamily="34" charset="-120"/>
-              </a:rPr>
-              <a:t>10</a:t>
-            </a:r>
-            <a:endParaRPr lang="en-US" sz="900" dirty="0"/>
+          <p:cNvPr id="15" name="cuinotes-footer-mark"/>
+          <p:cNvSpPr txBox="1"/>
+          <p:nvPr/>
+        </p:nvSpPr>
+        <p:spPr>
+          <a:xfrm>
+            <a:off x="9951720" y="6455664"/>
+            <a:ext cx="2011680" cy="292608"/>
+          </a:xfrm>
+          <a:prstGeom prst="rect">
+            <a:avLst/>
+          </a:prstGeom>
+          <a:noFill/>
+        </p:spPr>
+        <p:txBody>
+          <a:bodyPr wrap="none" lIns="0" rIns="0" tIns="0" bIns="0">
+            <a:spAutoFit/>
+          </a:bodyPr>
+          <a:lstStyle/>
+          <a:p>
+            <a:pPr algn="r"/>
+            <a:r>
+              <a:rPr sz="1000">
+                <a:solidFill>
+                  <a:srgbClr val="8A939B"/>
+                </a:solidFill>
+                <a:hlinkClick r:id="rId3"/>
+              </a:rPr>
+              <a:t>cuinotes.com</a:t>
+            </a:r>
+            <a:r>
+              <a:rPr sz="1000">
+                <a:solidFill>
+                  <a:srgbClr val="8A939B"/>
+                </a:solidFill>
+              </a:rPr>
+              <a:t>  ·  10</a:t>
+            </a:r>
           </a:p>
         </p:txBody>
       </p:sp>
@@ -4504,6 +4446,10 @@
           </a:solidFill>
           <a:ln/>
         </p:spPr>
+        <p:txBody>
+          <a:bodyPr/>
+          <a:p/>
+        </p:txBody>
       </p:sp>
       <p:sp>
         <p:nvSpPr>
@@ -4760,6 +4706,10 @@
             </a:outerShdw>
           </a:effectLst>
         </p:spPr>
+        <p:txBody>
+          <a:bodyPr/>
+          <a:p/>
+        </p:txBody>
       </p:sp>
       <p:pic>
         <p:nvPicPr>
@@ -4787,79 +4737,44 @@
       </p:pic>
       <p:sp>
         <p:nvSpPr>
-          <p:cNvPr id="8" name="Text 5"/>
-          <p:cNvSpPr txBox="1"/>
-          <p:nvPr/>
-        </p:nvSpPr>
-        <p:spPr>
-          <a:xfrm>
-            <a:off x="640080" y="6446520"/>
-            <a:ext cx="8686800" cy="292608"/>
-          </a:xfrm>
-          <a:prstGeom prst="rect">
-            <a:avLst/>
-          </a:prstGeom>
-          <a:noFill/>
-          <a:ln/>
-        </p:spPr>
-        <p:txBody>
-          <a:bodyPr wrap="square" lIns="0" tIns="0" rIns="0" bIns="0" rtlCol="0" anchor="ctr"/>
-          <a:lstStyle/>
-          <a:p>
-            <a:pPr algn="l" indent="0" marL="0">
-              <a:buNone/>
-            </a:pPr>
-            <a:r>
-              <a:rPr lang="en-US" sz="900" dirty="0">
-                <a:solidFill>
-                  <a:srgbClr val="5D5D72"/>
-                </a:solidFill>
-                <a:latin typeface="Calibri" pitchFamily="34" charset="0"/>
-                <a:ea typeface="Calibri" pitchFamily="34" charset="-122"/>
-                <a:cs typeface="Calibri" pitchFamily="34" charset="-120"/>
-              </a:rPr>
-              <a:t>Usman Akram  •  COMSATS University Islamabad</a:t>
-            </a:r>
-            <a:endParaRPr lang="en-US" sz="900" dirty="0"/>
-          </a:p>
-        </p:txBody>
-      </p:sp>
-      <p:sp>
-        <p:nvSpPr>
-          <p:cNvPr id="9" name="Text 6"/>
-          <p:cNvSpPr txBox="1"/>
-          <p:nvPr/>
-        </p:nvSpPr>
-        <p:spPr>
-          <a:xfrm>
-            <a:off x="11155680" y="6446520"/>
-            <a:ext cx="457200" cy="292608"/>
-          </a:xfrm>
-          <a:prstGeom prst="rect">
-            <a:avLst/>
-          </a:prstGeom>
-          <a:noFill/>
-          <a:ln/>
-        </p:spPr>
-        <p:txBody>
-          <a:bodyPr wrap="square" lIns="0" tIns="0" rIns="0" bIns="0" rtlCol="0" anchor="ctr"/>
-          <a:lstStyle/>
-          <a:p>
-            <a:pPr algn="r" indent="0" marL="0">
-              <a:buNone/>
-            </a:pPr>
-            <a:r>
-              <a:rPr lang="en-US" sz="900" dirty="0">
-                <a:solidFill>
-                  <a:srgbClr val="5D5D72"/>
-                </a:solidFill>
-                <a:latin typeface="Calibri" pitchFamily="34" charset="0"/>
-                <a:ea typeface="Calibri" pitchFamily="34" charset="-122"/>
-                <a:cs typeface="Calibri" pitchFamily="34" charset="-120"/>
-              </a:rPr>
-              <a:t>11</a:t>
-            </a:r>
-            <a:endParaRPr lang="en-US" sz="900" dirty="0"/>
+          <p:cNvPr id="10" name="cuinotes-footer-mark"/>
+          <p:cNvSpPr txBox="1"/>
+          <p:nvPr/>
+        </p:nvSpPr>
+        <p:spPr>
+          <a:xfrm>
+            <a:off x="9951720" y="6455664"/>
+            <a:ext cx="2011680" cy="292608"/>
+          </a:xfrm>
+          <a:prstGeom prst="rect">
+            <a:avLst/>
+          </a:prstGeom>
+          <a:noFill/>
+        </p:spPr>
+        <p:txBody>
+          <a:bodyPr wrap="none" lIns="0" rIns="0" tIns="0" bIns="0">
+            <a:spAutoFit/>
+          </a:bodyPr>
+          <a:lstStyle/>
+          <a:p>
+            <a:pPr algn="r"/>
+            <a:r>
+              <a:rPr sz="1000">
+                <a:solidFill>
+                  <a:srgbClr val="8A939B"/>
+                </a:solidFill>
+                <a:hlinkClick r:id="rId4"/>
+              </a:rPr>
+              <a:t>cuinotes.com</a:t>
+            </a:r>
+            <a:r>
+              <a:rPr sz="1000">
+                <a:solidFill>
+                  <a:srgbClr val="8A939B"/>
+                </a:solidFill>
+              </a:rPr>
+              <a:t>  ·  11</a:t>
+            </a:r>
           </a:p>
         </p:txBody>
       </p:sp>
@@ -4994,6 +4909,10 @@
           </a:solidFill>
           <a:ln/>
         </p:spPr>
+        <p:txBody>
+          <a:bodyPr/>
+          <a:p/>
+        </p:txBody>
       </p:sp>
       <p:sp>
         <p:nvSpPr>
@@ -5119,79 +5038,44 @@
       </p:sp>
       <p:sp>
         <p:nvSpPr>
-          <p:cNvPr id="6" name="Text 4"/>
-          <p:cNvSpPr txBox="1"/>
-          <p:nvPr/>
-        </p:nvSpPr>
-        <p:spPr>
-          <a:xfrm>
-            <a:off x="640080" y="6446520"/>
-            <a:ext cx="8686800" cy="292608"/>
-          </a:xfrm>
-          <a:prstGeom prst="rect">
-            <a:avLst/>
-          </a:prstGeom>
-          <a:noFill/>
-          <a:ln/>
-        </p:spPr>
-        <p:txBody>
-          <a:bodyPr wrap="square" lIns="0" tIns="0" rIns="0" bIns="0" rtlCol="0" anchor="ctr"/>
-          <a:lstStyle/>
-          <a:p>
-            <a:pPr algn="l" indent="0" marL="0">
-              <a:buNone/>
-            </a:pPr>
-            <a:r>
-              <a:rPr lang="en-US" sz="900" dirty="0">
-                <a:solidFill>
-                  <a:srgbClr val="5D5D72"/>
-                </a:solidFill>
-                <a:latin typeface="Calibri" pitchFamily="34" charset="0"/>
-                <a:ea typeface="Calibri" pitchFamily="34" charset="-122"/>
-                <a:cs typeface="Calibri" pitchFamily="34" charset="-120"/>
-              </a:rPr>
-              <a:t>Usman Akram  •  COMSATS University Islamabad</a:t>
-            </a:r>
-            <a:endParaRPr lang="en-US" sz="900" dirty="0"/>
-          </a:p>
-        </p:txBody>
-      </p:sp>
-      <p:sp>
-        <p:nvSpPr>
-          <p:cNvPr id="7" name="Text 5"/>
-          <p:cNvSpPr txBox="1"/>
-          <p:nvPr/>
-        </p:nvSpPr>
-        <p:spPr>
-          <a:xfrm>
-            <a:off x="11155680" y="6446520"/>
-            <a:ext cx="457200" cy="292608"/>
-          </a:xfrm>
-          <a:prstGeom prst="rect">
-            <a:avLst/>
-          </a:prstGeom>
-          <a:noFill/>
-          <a:ln/>
-        </p:spPr>
-        <p:txBody>
-          <a:bodyPr wrap="square" lIns="0" tIns="0" rIns="0" bIns="0" rtlCol="0" anchor="ctr"/>
-          <a:lstStyle/>
-          <a:p>
-            <a:pPr algn="r" indent="0" marL="0">
-              <a:buNone/>
-            </a:pPr>
-            <a:r>
-              <a:rPr lang="en-US" sz="900" dirty="0">
-                <a:solidFill>
-                  <a:srgbClr val="5D5D72"/>
-                </a:solidFill>
-                <a:latin typeface="Calibri" pitchFamily="34" charset="0"/>
-                <a:ea typeface="Calibri" pitchFamily="34" charset="-122"/>
-                <a:cs typeface="Calibri" pitchFamily="34" charset="-120"/>
-              </a:rPr>
-              <a:t>12</a:t>
-            </a:r>
-            <a:endParaRPr lang="en-US" sz="900" dirty="0"/>
+          <p:cNvPr id="8" name="cuinotes-footer-mark"/>
+          <p:cNvSpPr txBox="1"/>
+          <p:nvPr/>
+        </p:nvSpPr>
+        <p:spPr>
+          <a:xfrm>
+            <a:off x="9951720" y="6455664"/>
+            <a:ext cx="2011680" cy="292608"/>
+          </a:xfrm>
+          <a:prstGeom prst="rect">
+            <a:avLst/>
+          </a:prstGeom>
+          <a:noFill/>
+        </p:spPr>
+        <p:txBody>
+          <a:bodyPr wrap="none" lIns="0" rIns="0" tIns="0" bIns="0">
+            <a:spAutoFit/>
+          </a:bodyPr>
+          <a:lstStyle/>
+          <a:p>
+            <a:pPr algn="r"/>
+            <a:r>
+              <a:rPr sz="1000">
+                <a:solidFill>
+                  <a:srgbClr val="8A939B"/>
+                </a:solidFill>
+                <a:hlinkClick r:id="rId3"/>
+              </a:rPr>
+              <a:t>cuinotes.com</a:t>
+            </a:r>
+            <a:r>
+              <a:rPr sz="1000">
+                <a:solidFill>
+                  <a:srgbClr val="8A939B"/>
+                </a:solidFill>
+              </a:rPr>
+              <a:t>  ·  12</a:t>
+            </a:r>
           </a:p>
         </p:txBody>
       </p:sp>
@@ -5326,6 +5210,10 @@
           </a:solidFill>
           <a:ln/>
         </p:spPr>
+        <p:txBody>
+          <a:bodyPr/>
+          <a:p/>
+        </p:txBody>
       </p:sp>
       <p:sp>
         <p:nvSpPr>
@@ -5491,79 +5379,44 @@
       </p:sp>
       <p:sp>
         <p:nvSpPr>
-          <p:cNvPr id="6" name="Text 4"/>
-          <p:cNvSpPr txBox="1"/>
-          <p:nvPr/>
-        </p:nvSpPr>
-        <p:spPr>
-          <a:xfrm>
-            <a:off x="640080" y="6446520"/>
-            <a:ext cx="8686800" cy="292608"/>
-          </a:xfrm>
-          <a:prstGeom prst="rect">
-            <a:avLst/>
-          </a:prstGeom>
-          <a:noFill/>
-          <a:ln/>
-        </p:spPr>
-        <p:txBody>
-          <a:bodyPr wrap="square" lIns="0" tIns="0" rIns="0" bIns="0" rtlCol="0" anchor="ctr"/>
-          <a:lstStyle/>
-          <a:p>
-            <a:pPr algn="l" indent="0" marL="0">
-              <a:buNone/>
-            </a:pPr>
-            <a:r>
-              <a:rPr lang="en-US" sz="900" dirty="0">
-                <a:solidFill>
-                  <a:srgbClr val="5D5D72"/>
-                </a:solidFill>
-                <a:latin typeface="Calibri" pitchFamily="34" charset="0"/>
-                <a:ea typeface="Calibri" pitchFamily="34" charset="-122"/>
-                <a:cs typeface="Calibri" pitchFamily="34" charset="-120"/>
-              </a:rPr>
-              <a:t>Usman Akram  •  COMSATS University Islamabad</a:t>
-            </a:r>
-            <a:endParaRPr lang="en-US" sz="900" dirty="0"/>
-          </a:p>
-        </p:txBody>
-      </p:sp>
-      <p:sp>
-        <p:nvSpPr>
-          <p:cNvPr id="7" name="Text 5"/>
-          <p:cNvSpPr txBox="1"/>
-          <p:nvPr/>
-        </p:nvSpPr>
-        <p:spPr>
-          <a:xfrm>
-            <a:off x="11155680" y="6446520"/>
-            <a:ext cx="457200" cy="292608"/>
-          </a:xfrm>
-          <a:prstGeom prst="rect">
-            <a:avLst/>
-          </a:prstGeom>
-          <a:noFill/>
-          <a:ln/>
-        </p:spPr>
-        <p:txBody>
-          <a:bodyPr wrap="square" lIns="0" tIns="0" rIns="0" bIns="0" rtlCol="0" anchor="ctr"/>
-          <a:lstStyle/>
-          <a:p>
-            <a:pPr algn="r" indent="0" marL="0">
-              <a:buNone/>
-            </a:pPr>
-            <a:r>
-              <a:rPr lang="en-US" sz="900" dirty="0">
-                <a:solidFill>
-                  <a:srgbClr val="5D5D72"/>
-                </a:solidFill>
-                <a:latin typeface="Calibri" pitchFamily="34" charset="0"/>
-                <a:ea typeface="Calibri" pitchFamily="34" charset="-122"/>
-                <a:cs typeface="Calibri" pitchFamily="34" charset="-120"/>
-              </a:rPr>
-              <a:t>13</a:t>
-            </a:r>
-            <a:endParaRPr lang="en-US" sz="900" dirty="0"/>
+          <p:cNvPr id="8" name="cuinotes-footer-mark"/>
+          <p:cNvSpPr txBox="1"/>
+          <p:nvPr/>
+        </p:nvSpPr>
+        <p:spPr>
+          <a:xfrm>
+            <a:off x="9951720" y="6455664"/>
+            <a:ext cx="2011680" cy="292608"/>
+          </a:xfrm>
+          <a:prstGeom prst="rect">
+            <a:avLst/>
+          </a:prstGeom>
+          <a:noFill/>
+        </p:spPr>
+        <p:txBody>
+          <a:bodyPr wrap="none" lIns="0" rIns="0" tIns="0" bIns="0">
+            <a:spAutoFit/>
+          </a:bodyPr>
+          <a:lstStyle/>
+          <a:p>
+            <a:pPr algn="r"/>
+            <a:r>
+              <a:rPr sz="1000">
+                <a:solidFill>
+                  <a:srgbClr val="8A939B"/>
+                </a:solidFill>
+                <a:hlinkClick r:id="rId3"/>
+              </a:rPr>
+              <a:t>cuinotes.com</a:t>
+            </a:r>
+            <a:r>
+              <a:rPr sz="1000">
+                <a:solidFill>
+                  <a:srgbClr val="8A939B"/>
+                </a:solidFill>
+              </a:rPr>
+              <a:t>  ·  13</a:t>
+            </a:r>
           </a:p>
         </p:txBody>
       </p:sp>
@@ -5703,6 +5556,10 @@
             <a:prstDash val="solid"/>
           </a:ln>
         </p:spPr>
+        <p:txBody>
+          <a:bodyPr/>
+          <a:p/>
+        </p:txBody>
       </p:sp>
       <p:sp>
         <p:nvSpPr>
@@ -5784,79 +5641,44 @@
       </p:sp>
       <p:sp>
         <p:nvSpPr>
-          <p:cNvPr id="7" name="Text 5"/>
-          <p:cNvSpPr txBox="1"/>
-          <p:nvPr/>
-        </p:nvSpPr>
-        <p:spPr>
-          <a:xfrm>
-            <a:off x="640080" y="6446520"/>
-            <a:ext cx="8686800" cy="292608"/>
-          </a:xfrm>
-          <a:prstGeom prst="rect">
-            <a:avLst/>
-          </a:prstGeom>
-          <a:noFill/>
-          <a:ln/>
-        </p:spPr>
-        <p:txBody>
-          <a:bodyPr wrap="square" lIns="0" tIns="0" rIns="0" bIns="0" rtlCol="0" anchor="ctr"/>
-          <a:lstStyle/>
-          <a:p>
-            <a:pPr algn="l" indent="0" marL="0">
-              <a:buNone/>
-            </a:pPr>
-            <a:r>
-              <a:rPr lang="en-US" sz="900" dirty="0">
-                <a:solidFill>
-                  <a:srgbClr val="5D5D72"/>
-                </a:solidFill>
-                <a:latin typeface="Calibri" pitchFamily="34" charset="0"/>
-                <a:ea typeface="Calibri" pitchFamily="34" charset="-122"/>
-                <a:cs typeface="Calibri" pitchFamily="34" charset="-120"/>
-              </a:rPr>
-              <a:t>Usman Akram  •  COMSATS University Islamabad</a:t>
-            </a:r>
-            <a:endParaRPr lang="en-US" sz="900" dirty="0"/>
-          </a:p>
-        </p:txBody>
-      </p:sp>
-      <p:sp>
-        <p:nvSpPr>
-          <p:cNvPr id="8" name="Text 6"/>
-          <p:cNvSpPr txBox="1"/>
-          <p:nvPr/>
-        </p:nvSpPr>
-        <p:spPr>
-          <a:xfrm>
-            <a:off x="11155680" y="6446520"/>
-            <a:ext cx="457200" cy="292608"/>
-          </a:xfrm>
-          <a:prstGeom prst="rect">
-            <a:avLst/>
-          </a:prstGeom>
-          <a:noFill/>
-          <a:ln/>
-        </p:spPr>
-        <p:txBody>
-          <a:bodyPr wrap="square" lIns="0" tIns="0" rIns="0" bIns="0" rtlCol="0" anchor="ctr"/>
-          <a:lstStyle/>
-          <a:p>
-            <a:pPr algn="r" indent="0" marL="0">
-              <a:buNone/>
-            </a:pPr>
-            <a:r>
-              <a:rPr lang="en-US" sz="900" dirty="0">
-                <a:solidFill>
-                  <a:srgbClr val="5D5D72"/>
-                </a:solidFill>
-                <a:latin typeface="Calibri" pitchFamily="34" charset="0"/>
-                <a:ea typeface="Calibri" pitchFamily="34" charset="-122"/>
-                <a:cs typeface="Calibri" pitchFamily="34" charset="-120"/>
-              </a:rPr>
-              <a:t>14</a:t>
-            </a:r>
-            <a:endParaRPr lang="en-US" sz="900" dirty="0"/>
+          <p:cNvPr id="9" name="cuinotes-footer-mark"/>
+          <p:cNvSpPr txBox="1"/>
+          <p:nvPr/>
+        </p:nvSpPr>
+        <p:spPr>
+          <a:xfrm>
+            <a:off x="9951720" y="6455664"/>
+            <a:ext cx="2011680" cy="292608"/>
+          </a:xfrm>
+          <a:prstGeom prst="rect">
+            <a:avLst/>
+          </a:prstGeom>
+          <a:noFill/>
+        </p:spPr>
+        <p:txBody>
+          <a:bodyPr wrap="none" lIns="0" rIns="0" tIns="0" bIns="0">
+            <a:spAutoFit/>
+          </a:bodyPr>
+          <a:lstStyle/>
+          <a:p>
+            <a:pPr algn="r"/>
+            <a:r>
+              <a:rPr sz="1000">
+                <a:solidFill>
+                  <a:srgbClr val="8A939B"/>
+                </a:solidFill>
+                <a:hlinkClick r:id="rId3"/>
+              </a:rPr>
+              <a:t>cuinotes.com</a:t>
+            </a:r>
+            <a:r>
+              <a:rPr sz="1000">
+                <a:solidFill>
+                  <a:srgbClr val="8A939B"/>
+                </a:solidFill>
+              </a:rPr>
+              <a:t>  ·  14</a:t>
+            </a:r>
           </a:p>
         </p:txBody>
       </p:sp>
@@ -7022,79 +6844,44 @@
       </p:graphicFrame>
       <p:sp>
         <p:nvSpPr>
-          <p:cNvPr id="5" name="Text 2"/>
-          <p:cNvSpPr txBox="1"/>
-          <p:nvPr/>
-        </p:nvSpPr>
-        <p:spPr>
-          <a:xfrm>
-            <a:off x="640080" y="6446520"/>
-            <a:ext cx="8686800" cy="292608"/>
-          </a:xfrm>
-          <a:prstGeom prst="rect">
-            <a:avLst/>
-          </a:prstGeom>
-          <a:noFill/>
-          <a:ln/>
-        </p:spPr>
-        <p:txBody>
-          <a:bodyPr wrap="square" lIns="0" tIns="0" rIns="0" bIns="0" rtlCol="0" anchor="ctr"/>
-          <a:lstStyle/>
-          <a:p>
-            <a:pPr algn="l" indent="0" marL="0">
-              <a:buNone/>
-            </a:pPr>
-            <a:r>
-              <a:rPr lang="en-US" sz="900" dirty="0">
-                <a:solidFill>
-                  <a:srgbClr val="5D5D72"/>
-                </a:solidFill>
-                <a:latin typeface="Calibri" pitchFamily="34" charset="0"/>
-                <a:ea typeface="Calibri" pitchFamily="34" charset="-122"/>
-                <a:cs typeface="Calibri" pitchFamily="34" charset="-120"/>
-              </a:rPr>
-              <a:t>Usman Akram  •  COMSATS University Islamabad</a:t>
-            </a:r>
-            <a:endParaRPr lang="en-US" sz="900" dirty="0"/>
-          </a:p>
-        </p:txBody>
-      </p:sp>
-      <p:sp>
-        <p:nvSpPr>
-          <p:cNvPr id="6" name="Text 3"/>
-          <p:cNvSpPr txBox="1"/>
-          <p:nvPr/>
-        </p:nvSpPr>
-        <p:spPr>
-          <a:xfrm>
-            <a:off x="11155680" y="6446520"/>
-            <a:ext cx="457200" cy="292608"/>
-          </a:xfrm>
-          <a:prstGeom prst="rect">
-            <a:avLst/>
-          </a:prstGeom>
-          <a:noFill/>
-          <a:ln/>
-        </p:spPr>
-        <p:txBody>
-          <a:bodyPr wrap="square" lIns="0" tIns="0" rIns="0" bIns="0" rtlCol="0" anchor="ctr"/>
-          <a:lstStyle/>
-          <a:p>
-            <a:pPr algn="r" indent="0" marL="0">
-              <a:buNone/>
-            </a:pPr>
-            <a:r>
-              <a:rPr lang="en-US" sz="900" dirty="0">
-                <a:solidFill>
-                  <a:srgbClr val="5D5D72"/>
-                </a:solidFill>
-                <a:latin typeface="Calibri" pitchFamily="34" charset="0"/>
-                <a:ea typeface="Calibri" pitchFamily="34" charset="-122"/>
-                <a:cs typeface="Calibri" pitchFamily="34" charset="-120"/>
-              </a:rPr>
-              <a:t>15</a:t>
-            </a:r>
-            <a:endParaRPr lang="en-US" sz="900" dirty="0"/>
+          <p:cNvPr id="17" name="cuinotes-footer-mark"/>
+          <p:cNvSpPr txBox="1"/>
+          <p:nvPr/>
+        </p:nvSpPr>
+        <p:spPr>
+          <a:xfrm>
+            <a:off x="9951720" y="6455664"/>
+            <a:ext cx="2011680" cy="292608"/>
+          </a:xfrm>
+          <a:prstGeom prst="rect">
+            <a:avLst/>
+          </a:prstGeom>
+          <a:noFill/>
+        </p:spPr>
+        <p:txBody>
+          <a:bodyPr wrap="none" lIns="0" rIns="0" tIns="0" bIns="0">
+            <a:spAutoFit/>
+          </a:bodyPr>
+          <a:lstStyle/>
+          <a:p>
+            <a:pPr algn="r"/>
+            <a:r>
+              <a:rPr sz="1000">
+                <a:solidFill>
+                  <a:srgbClr val="8A939B"/>
+                </a:solidFill>
+                <a:hlinkClick r:id="rId3"/>
+              </a:rPr>
+              <a:t>cuinotes.com</a:t>
+            </a:r>
+            <a:r>
+              <a:rPr sz="1000">
+                <a:solidFill>
+                  <a:srgbClr val="8A939B"/>
+                </a:solidFill>
+              </a:rPr>
+              <a:t>  ·  15</a:t>
+            </a:r>
           </a:p>
         </p:txBody>
       </p:sp>
@@ -7227,6 +7014,10 @@
           </a:solidFill>
           <a:ln/>
         </p:spPr>
+        <p:txBody>
+          <a:bodyPr/>
+          <a:p/>
+        </p:txBody>
       </p:sp>
       <p:sp>
         <p:nvSpPr>
@@ -7325,6 +7116,10 @@
           </a:solidFill>
           <a:ln/>
         </p:spPr>
+        <p:txBody>
+          <a:bodyPr/>
+          <a:p/>
+        </p:txBody>
       </p:sp>
       <p:sp>
         <p:nvSpPr>
@@ -7423,6 +7218,10 @@
           </a:solidFill>
           <a:ln/>
         </p:spPr>
+        <p:txBody>
+          <a:bodyPr/>
+          <a:p/>
+        </p:txBody>
       </p:sp>
       <p:sp>
         <p:nvSpPr>
@@ -7504,79 +7303,44 @@
       </p:sp>
       <p:sp>
         <p:nvSpPr>
-          <p:cNvPr id="13" name="Text 11"/>
-          <p:cNvSpPr txBox="1"/>
-          <p:nvPr/>
-        </p:nvSpPr>
-        <p:spPr>
-          <a:xfrm>
-            <a:off x="640080" y="6446520"/>
-            <a:ext cx="8686800" cy="292608"/>
-          </a:xfrm>
-          <a:prstGeom prst="rect">
-            <a:avLst/>
-          </a:prstGeom>
-          <a:noFill/>
-          <a:ln/>
-        </p:spPr>
-        <p:txBody>
-          <a:bodyPr wrap="square" lIns="0" tIns="0" rIns="0" bIns="0" rtlCol="0" anchor="ctr"/>
-          <a:lstStyle/>
-          <a:p>
-            <a:pPr algn="l" indent="0" marL="0">
-              <a:buNone/>
-            </a:pPr>
-            <a:r>
-              <a:rPr lang="en-US" sz="900" dirty="0">
-                <a:solidFill>
-                  <a:srgbClr val="5D5D72"/>
-                </a:solidFill>
-                <a:latin typeface="Calibri" pitchFamily="34" charset="0"/>
-                <a:ea typeface="Calibri" pitchFamily="34" charset="-122"/>
-                <a:cs typeface="Calibri" pitchFamily="34" charset="-120"/>
-              </a:rPr>
-              <a:t>Usman Akram  •  COMSATS University Islamabad</a:t>
-            </a:r>
-            <a:endParaRPr lang="en-US" sz="900" dirty="0"/>
-          </a:p>
-        </p:txBody>
-      </p:sp>
-      <p:sp>
-        <p:nvSpPr>
-          <p:cNvPr id="14" name="Text 12"/>
-          <p:cNvSpPr txBox="1"/>
-          <p:nvPr/>
-        </p:nvSpPr>
-        <p:spPr>
-          <a:xfrm>
-            <a:off x="11155680" y="6446520"/>
-            <a:ext cx="457200" cy="292608"/>
-          </a:xfrm>
-          <a:prstGeom prst="rect">
-            <a:avLst/>
-          </a:prstGeom>
-          <a:noFill/>
-          <a:ln/>
-        </p:spPr>
-        <p:txBody>
-          <a:bodyPr wrap="square" lIns="0" tIns="0" rIns="0" bIns="0" rtlCol="0" anchor="ctr"/>
-          <a:lstStyle/>
-          <a:p>
-            <a:pPr algn="r" indent="0" marL="0">
-              <a:buNone/>
-            </a:pPr>
-            <a:r>
-              <a:rPr lang="en-US" sz="900" dirty="0">
-                <a:solidFill>
-                  <a:srgbClr val="5D5D72"/>
-                </a:solidFill>
-                <a:latin typeface="Calibri" pitchFamily="34" charset="0"/>
-                <a:ea typeface="Calibri" pitchFamily="34" charset="-122"/>
-                <a:cs typeface="Calibri" pitchFamily="34" charset="-120"/>
-              </a:rPr>
-              <a:t>16</a:t>
-            </a:r>
-            <a:endParaRPr lang="en-US" sz="900" dirty="0"/>
+          <p:cNvPr id="15" name="cuinotes-footer-mark"/>
+          <p:cNvSpPr txBox="1"/>
+          <p:nvPr/>
+        </p:nvSpPr>
+        <p:spPr>
+          <a:xfrm>
+            <a:off x="9951720" y="6455664"/>
+            <a:ext cx="2011680" cy="292608"/>
+          </a:xfrm>
+          <a:prstGeom prst="rect">
+            <a:avLst/>
+          </a:prstGeom>
+          <a:noFill/>
+        </p:spPr>
+        <p:txBody>
+          <a:bodyPr wrap="none" lIns="0" rIns="0" tIns="0" bIns="0">
+            <a:spAutoFit/>
+          </a:bodyPr>
+          <a:lstStyle/>
+          <a:p>
+            <a:pPr algn="r"/>
+            <a:r>
+              <a:rPr sz="1000">
+                <a:solidFill>
+                  <a:srgbClr val="8A939B"/>
+                </a:solidFill>
+                <a:hlinkClick r:id="rId3"/>
+              </a:rPr>
+              <a:t>cuinotes.com</a:t>
+            </a:r>
+            <a:r>
+              <a:rPr sz="1000">
+                <a:solidFill>
+                  <a:srgbClr val="8A939B"/>
+                </a:solidFill>
+              </a:rPr>
+              <a:t>  ·  16</a:t>
+            </a:r>
           </a:p>
         </p:txBody>
       </p:sp>
@@ -7711,6 +7475,10 @@
           </a:solidFill>
           <a:ln/>
         </p:spPr>
+        <p:txBody>
+          <a:bodyPr/>
+          <a:p/>
+        </p:txBody>
       </p:sp>
       <p:sp>
         <p:nvSpPr>
@@ -7933,79 +7701,44 @@
       </p:sp>
       <p:sp>
         <p:nvSpPr>
-          <p:cNvPr id="7" name="Text 5"/>
-          <p:cNvSpPr txBox="1"/>
-          <p:nvPr/>
-        </p:nvSpPr>
-        <p:spPr>
-          <a:xfrm>
-            <a:off x="640080" y="6446520"/>
-            <a:ext cx="8686800" cy="292608"/>
-          </a:xfrm>
-          <a:prstGeom prst="rect">
-            <a:avLst/>
-          </a:prstGeom>
-          <a:noFill/>
-          <a:ln/>
-        </p:spPr>
-        <p:txBody>
-          <a:bodyPr wrap="square" lIns="0" tIns="0" rIns="0" bIns="0" rtlCol="0" anchor="ctr"/>
-          <a:lstStyle/>
-          <a:p>
-            <a:pPr algn="l" indent="0" marL="0">
-              <a:buNone/>
-            </a:pPr>
-            <a:r>
-              <a:rPr lang="en-US" sz="900" dirty="0">
-                <a:solidFill>
-                  <a:srgbClr val="5D5D72"/>
-                </a:solidFill>
-                <a:latin typeface="Calibri" pitchFamily="34" charset="0"/>
-                <a:ea typeface="Calibri" pitchFamily="34" charset="-122"/>
-                <a:cs typeface="Calibri" pitchFamily="34" charset="-120"/>
-              </a:rPr>
-              <a:t>Usman Akram  •  COMSATS University Islamabad</a:t>
-            </a:r>
-            <a:endParaRPr lang="en-US" sz="900" dirty="0"/>
-          </a:p>
-        </p:txBody>
-      </p:sp>
-      <p:sp>
-        <p:nvSpPr>
-          <p:cNvPr id="8" name="Text 6"/>
-          <p:cNvSpPr txBox="1"/>
-          <p:nvPr/>
-        </p:nvSpPr>
-        <p:spPr>
-          <a:xfrm>
-            <a:off x="11155680" y="6446520"/>
-            <a:ext cx="457200" cy="292608"/>
-          </a:xfrm>
-          <a:prstGeom prst="rect">
-            <a:avLst/>
-          </a:prstGeom>
-          <a:noFill/>
-          <a:ln/>
-        </p:spPr>
-        <p:txBody>
-          <a:bodyPr wrap="square" lIns="0" tIns="0" rIns="0" bIns="0" rtlCol="0" anchor="ctr"/>
-          <a:lstStyle/>
-          <a:p>
-            <a:pPr algn="r" indent="0" marL="0">
-              <a:buNone/>
-            </a:pPr>
-            <a:r>
-              <a:rPr lang="en-US" sz="900" dirty="0">
-                <a:solidFill>
-                  <a:srgbClr val="5D5D72"/>
-                </a:solidFill>
-                <a:latin typeface="Calibri" pitchFamily="34" charset="0"/>
-                <a:ea typeface="Calibri" pitchFamily="34" charset="-122"/>
-                <a:cs typeface="Calibri" pitchFamily="34" charset="-120"/>
-              </a:rPr>
-              <a:t>17</a:t>
-            </a:r>
-            <a:endParaRPr lang="en-US" sz="900" dirty="0"/>
+          <p:cNvPr id="9" name="cuinotes-footer-mark"/>
+          <p:cNvSpPr txBox="1"/>
+          <p:nvPr/>
+        </p:nvSpPr>
+        <p:spPr>
+          <a:xfrm>
+            <a:off x="9951720" y="6455664"/>
+            <a:ext cx="2011680" cy="292608"/>
+          </a:xfrm>
+          <a:prstGeom prst="rect">
+            <a:avLst/>
+          </a:prstGeom>
+          <a:noFill/>
+        </p:spPr>
+        <p:txBody>
+          <a:bodyPr wrap="none" lIns="0" rIns="0" tIns="0" bIns="0">
+            <a:spAutoFit/>
+          </a:bodyPr>
+          <a:lstStyle/>
+          <a:p>
+            <a:pPr algn="r"/>
+            <a:r>
+              <a:rPr sz="1000">
+                <a:solidFill>
+                  <a:srgbClr val="8A939B"/>
+                </a:solidFill>
+                <a:hlinkClick r:id="rId3"/>
+              </a:rPr>
+              <a:t>cuinotes.com</a:t>
+            </a:r>
+            <a:r>
+              <a:rPr sz="1000">
+                <a:solidFill>
+                  <a:srgbClr val="8A939B"/>
+                </a:solidFill>
+              </a:rPr>
+              <a:t>  ·  17</a:t>
+            </a:r>
           </a:p>
         </p:txBody>
       </p:sp>
@@ -8140,6 +7873,10 @@
           </a:solidFill>
           <a:ln/>
         </p:spPr>
+        <p:txBody>
+          <a:bodyPr/>
+          <a:p/>
+        </p:txBody>
       </p:sp>
       <p:sp>
         <p:nvSpPr>
@@ -8220,6 +7957,10 @@
             <a:tailEnd type="triangle"/>
           </a:ln>
         </p:spPr>
+        <p:txBody>
+          <a:bodyPr/>
+          <a:p/>
+        </p:txBody>
       </p:sp>
       <p:sp>
         <p:nvSpPr>
@@ -8242,6 +7983,10 @@
           </a:solidFill>
           <a:ln/>
         </p:spPr>
+        <p:txBody>
+          <a:bodyPr/>
+          <a:p/>
+        </p:txBody>
       </p:sp>
       <p:sp>
         <p:nvSpPr>
@@ -8339,6 +8084,10 @@
             <a:tailEnd type="triangle"/>
           </a:ln>
         </p:spPr>
+        <p:txBody>
+          <a:bodyPr/>
+          <a:p/>
+        </p:txBody>
       </p:sp>
       <p:sp>
         <p:nvSpPr>
@@ -8361,6 +8110,10 @@
           </a:solidFill>
           <a:ln/>
         </p:spPr>
+        <p:txBody>
+          <a:bodyPr/>
+          <a:p/>
+        </p:txBody>
       </p:sp>
       <p:sp>
         <p:nvSpPr>
@@ -8441,6 +8194,10 @@
             <a:tailEnd type="triangle"/>
           </a:ln>
         </p:spPr>
+        <p:txBody>
+          <a:bodyPr/>
+          <a:p/>
+        </p:txBody>
       </p:sp>
       <p:sp>
         <p:nvSpPr>
@@ -8463,6 +8220,10 @@
           </a:solidFill>
           <a:ln/>
         </p:spPr>
+        <p:txBody>
+          <a:bodyPr/>
+          <a:p/>
+        </p:txBody>
       </p:sp>
       <p:sp>
         <p:nvSpPr>
@@ -8561,79 +8322,44 @@
       </p:sp>
       <p:sp>
         <p:nvSpPr>
-          <p:cNvPr id="16" name="Text 14"/>
-          <p:cNvSpPr txBox="1"/>
-          <p:nvPr/>
-        </p:nvSpPr>
-        <p:spPr>
-          <a:xfrm>
-            <a:off x="640080" y="6446520"/>
-            <a:ext cx="8686800" cy="292608"/>
-          </a:xfrm>
-          <a:prstGeom prst="rect">
-            <a:avLst/>
-          </a:prstGeom>
-          <a:noFill/>
-          <a:ln/>
-        </p:spPr>
-        <p:txBody>
-          <a:bodyPr wrap="square" lIns="0" tIns="0" rIns="0" bIns="0" rtlCol="0" anchor="ctr"/>
-          <a:lstStyle/>
-          <a:p>
-            <a:pPr algn="l" indent="0" marL="0">
-              <a:buNone/>
-            </a:pPr>
-            <a:r>
-              <a:rPr lang="en-US" sz="900" dirty="0">
-                <a:solidFill>
-                  <a:srgbClr val="5D5D72"/>
-                </a:solidFill>
-                <a:latin typeface="Calibri" pitchFamily="34" charset="0"/>
-                <a:ea typeface="Calibri" pitchFamily="34" charset="-122"/>
-                <a:cs typeface="Calibri" pitchFamily="34" charset="-120"/>
-              </a:rPr>
-              <a:t>Usman Akram  •  COMSATS University Islamabad</a:t>
-            </a:r>
-            <a:endParaRPr lang="en-US" sz="900" dirty="0"/>
-          </a:p>
-        </p:txBody>
-      </p:sp>
-      <p:sp>
-        <p:nvSpPr>
-          <p:cNvPr id="17" name="Text 15"/>
-          <p:cNvSpPr txBox="1"/>
-          <p:nvPr/>
-        </p:nvSpPr>
-        <p:spPr>
-          <a:xfrm>
-            <a:off x="11155680" y="6446520"/>
-            <a:ext cx="457200" cy="292608"/>
-          </a:xfrm>
-          <a:prstGeom prst="rect">
-            <a:avLst/>
-          </a:prstGeom>
-          <a:noFill/>
-          <a:ln/>
-        </p:spPr>
-        <p:txBody>
-          <a:bodyPr wrap="square" lIns="0" tIns="0" rIns="0" bIns="0" rtlCol="0" anchor="ctr"/>
-          <a:lstStyle/>
-          <a:p>
-            <a:pPr algn="r" indent="0" marL="0">
-              <a:buNone/>
-            </a:pPr>
-            <a:r>
-              <a:rPr lang="en-US" sz="900" dirty="0">
-                <a:solidFill>
-                  <a:srgbClr val="5D5D72"/>
-                </a:solidFill>
-                <a:latin typeface="Calibri" pitchFamily="34" charset="0"/>
-                <a:ea typeface="Calibri" pitchFamily="34" charset="-122"/>
-                <a:cs typeface="Calibri" pitchFamily="34" charset="-120"/>
-              </a:rPr>
-              <a:t>18</a:t>
-            </a:r>
-            <a:endParaRPr lang="en-US" sz="900" dirty="0"/>
+          <p:cNvPr id="18" name="cuinotes-footer-mark"/>
+          <p:cNvSpPr txBox="1"/>
+          <p:nvPr/>
+        </p:nvSpPr>
+        <p:spPr>
+          <a:xfrm>
+            <a:off x="9951720" y="6455664"/>
+            <a:ext cx="2011680" cy="292608"/>
+          </a:xfrm>
+          <a:prstGeom prst="rect">
+            <a:avLst/>
+          </a:prstGeom>
+          <a:noFill/>
+        </p:spPr>
+        <p:txBody>
+          <a:bodyPr wrap="none" lIns="0" rIns="0" tIns="0" bIns="0">
+            <a:spAutoFit/>
+          </a:bodyPr>
+          <a:lstStyle/>
+          <a:p>
+            <a:pPr algn="r"/>
+            <a:r>
+              <a:rPr sz="1000">
+                <a:solidFill>
+                  <a:srgbClr val="8A939B"/>
+                </a:solidFill>
+                <a:hlinkClick r:id="rId3"/>
+              </a:rPr>
+              <a:t>cuinotes.com</a:t>
+            </a:r>
+            <a:r>
+              <a:rPr sz="1000">
+                <a:solidFill>
+                  <a:srgbClr val="8A939B"/>
+                </a:solidFill>
+              </a:rPr>
+              <a:t>  ·  18</a:t>
+            </a:r>
           </a:p>
         </p:txBody>
       </p:sp>
@@ -8773,6 +8499,10 @@
             <a:prstDash val="solid"/>
           </a:ln>
         </p:spPr>
+        <p:txBody>
+          <a:bodyPr/>
+          <a:p/>
+        </p:txBody>
       </p:sp>
       <p:sp>
         <p:nvSpPr>
@@ -8854,79 +8584,44 @@
       </p:sp>
       <p:sp>
         <p:nvSpPr>
-          <p:cNvPr id="7" name="Text 5"/>
-          <p:cNvSpPr txBox="1"/>
-          <p:nvPr/>
-        </p:nvSpPr>
-        <p:spPr>
-          <a:xfrm>
-            <a:off x="640080" y="6446520"/>
-            <a:ext cx="8686800" cy="292608"/>
-          </a:xfrm>
-          <a:prstGeom prst="rect">
-            <a:avLst/>
-          </a:prstGeom>
-          <a:noFill/>
-          <a:ln/>
-        </p:spPr>
-        <p:txBody>
-          <a:bodyPr wrap="square" lIns="0" tIns="0" rIns="0" bIns="0" rtlCol="0" anchor="ctr"/>
-          <a:lstStyle/>
-          <a:p>
-            <a:pPr algn="l" indent="0" marL="0">
-              <a:buNone/>
-            </a:pPr>
-            <a:r>
-              <a:rPr lang="en-US" sz="900" dirty="0">
-                <a:solidFill>
-                  <a:srgbClr val="5D5D72"/>
-                </a:solidFill>
-                <a:latin typeface="Calibri" pitchFamily="34" charset="0"/>
-                <a:ea typeface="Calibri" pitchFamily="34" charset="-122"/>
-                <a:cs typeface="Calibri" pitchFamily="34" charset="-120"/>
-              </a:rPr>
-              <a:t>Usman Akram  •  COMSATS University Islamabad</a:t>
-            </a:r>
-            <a:endParaRPr lang="en-US" sz="900" dirty="0"/>
-          </a:p>
-        </p:txBody>
-      </p:sp>
-      <p:sp>
-        <p:nvSpPr>
-          <p:cNvPr id="8" name="Text 6"/>
-          <p:cNvSpPr txBox="1"/>
-          <p:nvPr/>
-        </p:nvSpPr>
-        <p:spPr>
-          <a:xfrm>
-            <a:off x="11155680" y="6446520"/>
-            <a:ext cx="457200" cy="292608"/>
-          </a:xfrm>
-          <a:prstGeom prst="rect">
-            <a:avLst/>
-          </a:prstGeom>
-          <a:noFill/>
-          <a:ln/>
-        </p:spPr>
-        <p:txBody>
-          <a:bodyPr wrap="square" lIns="0" tIns="0" rIns="0" bIns="0" rtlCol="0" anchor="ctr"/>
-          <a:lstStyle/>
-          <a:p>
-            <a:pPr algn="r" indent="0" marL="0">
-              <a:buNone/>
-            </a:pPr>
-            <a:r>
-              <a:rPr lang="en-US" sz="900" dirty="0">
-                <a:solidFill>
-                  <a:srgbClr val="5D5D72"/>
-                </a:solidFill>
-                <a:latin typeface="Calibri" pitchFamily="34" charset="0"/>
-                <a:ea typeface="Calibri" pitchFamily="34" charset="-122"/>
-                <a:cs typeface="Calibri" pitchFamily="34" charset="-120"/>
-              </a:rPr>
-              <a:t>19</a:t>
-            </a:r>
-            <a:endParaRPr lang="en-US" sz="900" dirty="0"/>
+          <p:cNvPr id="9" name="cuinotes-footer-mark"/>
+          <p:cNvSpPr txBox="1"/>
+          <p:nvPr/>
+        </p:nvSpPr>
+        <p:spPr>
+          <a:xfrm>
+            <a:off x="9951720" y="6455664"/>
+            <a:ext cx="2011680" cy="292608"/>
+          </a:xfrm>
+          <a:prstGeom prst="rect">
+            <a:avLst/>
+          </a:prstGeom>
+          <a:noFill/>
+        </p:spPr>
+        <p:txBody>
+          <a:bodyPr wrap="none" lIns="0" rIns="0" tIns="0" bIns="0">
+            <a:spAutoFit/>
+          </a:bodyPr>
+          <a:lstStyle/>
+          <a:p>
+            <a:pPr algn="r"/>
+            <a:r>
+              <a:rPr sz="1000">
+                <a:solidFill>
+                  <a:srgbClr val="8A939B"/>
+                </a:solidFill>
+                <a:hlinkClick r:id="rId3"/>
+              </a:rPr>
+              <a:t>cuinotes.com</a:t>
+            </a:r>
+            <a:r>
+              <a:rPr sz="1000">
+                <a:solidFill>
+                  <a:srgbClr val="8A939B"/>
+                </a:solidFill>
+              </a:rPr>
+              <a:t>  ·  19</a:t>
+            </a:r>
           </a:p>
         </p:txBody>
       </p:sp>
@@ -9059,6 +8754,10 @@
           </a:solidFill>
           <a:ln/>
         </p:spPr>
+        <p:txBody>
+          <a:bodyPr/>
+          <a:p/>
+        </p:txBody>
       </p:sp>
       <p:sp>
         <p:nvSpPr>
@@ -9157,6 +8856,10 @@
           </a:solidFill>
           <a:ln/>
         </p:spPr>
+        <p:txBody>
+          <a:bodyPr/>
+          <a:p/>
+        </p:txBody>
       </p:sp>
       <p:sp>
         <p:nvSpPr>
@@ -9255,6 +8958,10 @@
           </a:solidFill>
           <a:ln/>
         </p:spPr>
+        <p:txBody>
+          <a:bodyPr/>
+          <a:p/>
+        </p:txBody>
       </p:sp>
       <p:sp>
         <p:nvSpPr>
@@ -9353,6 +9060,10 @@
           </a:solidFill>
           <a:ln/>
         </p:spPr>
+        <p:txBody>
+          <a:bodyPr/>
+          <a:p/>
+        </p:txBody>
       </p:sp>
       <p:sp>
         <p:nvSpPr>
@@ -9451,6 +9162,10 @@
           </a:solidFill>
           <a:ln/>
         </p:spPr>
+        <p:txBody>
+          <a:bodyPr/>
+          <a:p/>
+        </p:txBody>
       </p:sp>
       <p:sp>
         <p:nvSpPr>
@@ -9549,6 +9264,10 @@
           </a:solidFill>
           <a:ln/>
         </p:spPr>
+        <p:txBody>
+          <a:bodyPr/>
+          <a:p/>
+        </p:txBody>
       </p:sp>
       <p:sp>
         <p:nvSpPr>
@@ -9630,79 +9349,44 @@
       </p:sp>
       <p:sp>
         <p:nvSpPr>
-          <p:cNvPr id="22" name="Text 20"/>
-          <p:cNvSpPr txBox="1"/>
-          <p:nvPr/>
-        </p:nvSpPr>
-        <p:spPr>
-          <a:xfrm>
-            <a:off x="640080" y="6446520"/>
-            <a:ext cx="8686800" cy="292608"/>
-          </a:xfrm>
-          <a:prstGeom prst="rect">
-            <a:avLst/>
-          </a:prstGeom>
-          <a:noFill/>
-          <a:ln/>
-        </p:spPr>
-        <p:txBody>
-          <a:bodyPr wrap="square" lIns="0" tIns="0" rIns="0" bIns="0" rtlCol="0" anchor="ctr"/>
-          <a:lstStyle/>
-          <a:p>
-            <a:pPr algn="l" indent="0" marL="0">
-              <a:buNone/>
-            </a:pPr>
-            <a:r>
-              <a:rPr lang="en-US" sz="900" dirty="0">
-                <a:solidFill>
-                  <a:srgbClr val="5D5D72"/>
-                </a:solidFill>
-                <a:latin typeface="Calibri" pitchFamily="34" charset="0"/>
-                <a:ea typeface="Calibri" pitchFamily="34" charset="-122"/>
-                <a:cs typeface="Calibri" pitchFamily="34" charset="-120"/>
-              </a:rPr>
-              <a:t>Usman Akram  •  COMSATS University Islamabad</a:t>
-            </a:r>
-            <a:endParaRPr lang="en-US" sz="900" dirty="0"/>
-          </a:p>
-        </p:txBody>
-      </p:sp>
-      <p:sp>
-        <p:nvSpPr>
-          <p:cNvPr id="23" name="Text 21"/>
-          <p:cNvSpPr txBox="1"/>
-          <p:nvPr/>
-        </p:nvSpPr>
-        <p:spPr>
-          <a:xfrm>
-            <a:off x="11155680" y="6446520"/>
-            <a:ext cx="457200" cy="292608"/>
-          </a:xfrm>
-          <a:prstGeom prst="rect">
-            <a:avLst/>
-          </a:prstGeom>
-          <a:noFill/>
-          <a:ln/>
-        </p:spPr>
-        <p:txBody>
-          <a:bodyPr wrap="square" lIns="0" tIns="0" rIns="0" bIns="0" rtlCol="0" anchor="ctr"/>
-          <a:lstStyle/>
-          <a:p>
-            <a:pPr algn="r" indent="0" marL="0">
-              <a:buNone/>
-            </a:pPr>
-            <a:r>
-              <a:rPr lang="en-US" sz="900" dirty="0">
-                <a:solidFill>
-                  <a:srgbClr val="5D5D72"/>
-                </a:solidFill>
-                <a:latin typeface="Calibri" pitchFamily="34" charset="0"/>
-                <a:ea typeface="Calibri" pitchFamily="34" charset="-122"/>
-                <a:cs typeface="Calibri" pitchFamily="34" charset="-120"/>
-              </a:rPr>
-              <a:t>2</a:t>
-            </a:r>
-            <a:endParaRPr lang="en-US" sz="900" dirty="0"/>
+          <p:cNvPr id="24" name="cuinotes-footer-mark"/>
+          <p:cNvSpPr txBox="1"/>
+          <p:nvPr/>
+        </p:nvSpPr>
+        <p:spPr>
+          <a:xfrm>
+            <a:off x="9951720" y="6455664"/>
+            <a:ext cx="2011680" cy="292608"/>
+          </a:xfrm>
+          <a:prstGeom prst="rect">
+            <a:avLst/>
+          </a:prstGeom>
+          <a:noFill/>
+        </p:spPr>
+        <p:txBody>
+          <a:bodyPr wrap="none" lIns="0" rIns="0" tIns="0" bIns="0">
+            <a:spAutoFit/>
+          </a:bodyPr>
+          <a:lstStyle/>
+          <a:p>
+            <a:pPr algn="r"/>
+            <a:r>
+              <a:rPr sz="1000">
+                <a:solidFill>
+                  <a:srgbClr val="8A939B"/>
+                </a:solidFill>
+                <a:hlinkClick r:id="rId3"/>
+              </a:rPr>
+              <a:t>cuinotes.com</a:t>
+            </a:r>
+            <a:r>
+              <a:rPr sz="1000">
+                <a:solidFill>
+                  <a:srgbClr val="8A939B"/>
+                </a:solidFill>
+              </a:rPr>
+              <a:t>  ·  2</a:t>
+            </a:r>
           </a:p>
         </p:txBody>
       </p:sp>
@@ -9835,6 +9519,10 @@
           </a:solidFill>
           <a:ln/>
         </p:spPr>
+        <p:txBody>
+          <a:bodyPr/>
+          <a:p/>
+        </p:txBody>
       </p:sp>
       <p:sp>
         <p:nvSpPr>
@@ -9933,6 +9621,10 @@
           </a:solidFill>
           <a:ln/>
         </p:spPr>
+        <p:txBody>
+          <a:bodyPr/>
+          <a:p/>
+        </p:txBody>
       </p:sp>
       <p:sp>
         <p:nvSpPr>
@@ -10031,6 +9723,10 @@
           </a:solidFill>
           <a:ln/>
         </p:spPr>
+        <p:txBody>
+          <a:bodyPr/>
+          <a:p/>
+        </p:txBody>
       </p:sp>
       <p:sp>
         <p:nvSpPr>
@@ -10112,79 +9808,44 @@
       </p:sp>
       <p:sp>
         <p:nvSpPr>
-          <p:cNvPr id="13" name="Text 11"/>
-          <p:cNvSpPr txBox="1"/>
-          <p:nvPr/>
-        </p:nvSpPr>
-        <p:spPr>
-          <a:xfrm>
-            <a:off x="640080" y="6446520"/>
-            <a:ext cx="8686800" cy="292608"/>
-          </a:xfrm>
-          <a:prstGeom prst="rect">
-            <a:avLst/>
-          </a:prstGeom>
-          <a:noFill/>
-          <a:ln/>
-        </p:spPr>
-        <p:txBody>
-          <a:bodyPr wrap="square" lIns="0" tIns="0" rIns="0" bIns="0" rtlCol="0" anchor="ctr"/>
-          <a:lstStyle/>
-          <a:p>
-            <a:pPr algn="l" indent="0" marL="0">
-              <a:buNone/>
-            </a:pPr>
-            <a:r>
-              <a:rPr lang="en-US" sz="900" dirty="0">
-                <a:solidFill>
-                  <a:srgbClr val="5D5D72"/>
-                </a:solidFill>
-                <a:latin typeface="Calibri" pitchFamily="34" charset="0"/>
-                <a:ea typeface="Calibri" pitchFamily="34" charset="-122"/>
-                <a:cs typeface="Calibri" pitchFamily="34" charset="-120"/>
-              </a:rPr>
-              <a:t>Usman Akram  •  COMSATS University Islamabad</a:t>
-            </a:r>
-            <a:endParaRPr lang="en-US" sz="900" dirty="0"/>
-          </a:p>
-        </p:txBody>
-      </p:sp>
-      <p:sp>
-        <p:nvSpPr>
-          <p:cNvPr id="14" name="Text 12"/>
-          <p:cNvSpPr txBox="1"/>
-          <p:nvPr/>
-        </p:nvSpPr>
-        <p:spPr>
-          <a:xfrm>
-            <a:off x="11155680" y="6446520"/>
-            <a:ext cx="457200" cy="292608"/>
-          </a:xfrm>
-          <a:prstGeom prst="rect">
-            <a:avLst/>
-          </a:prstGeom>
-          <a:noFill/>
-          <a:ln/>
-        </p:spPr>
-        <p:txBody>
-          <a:bodyPr wrap="square" lIns="0" tIns="0" rIns="0" bIns="0" rtlCol="0" anchor="ctr"/>
-          <a:lstStyle/>
-          <a:p>
-            <a:pPr algn="r" indent="0" marL="0">
-              <a:buNone/>
-            </a:pPr>
-            <a:r>
-              <a:rPr lang="en-US" sz="900" dirty="0">
-                <a:solidFill>
-                  <a:srgbClr val="5D5D72"/>
-                </a:solidFill>
-                <a:latin typeface="Calibri" pitchFamily="34" charset="0"/>
-                <a:ea typeface="Calibri" pitchFamily="34" charset="-122"/>
-                <a:cs typeface="Calibri" pitchFamily="34" charset="-120"/>
-              </a:rPr>
-              <a:t>20</a:t>
-            </a:r>
-            <a:endParaRPr lang="en-US" sz="900" dirty="0"/>
+          <p:cNvPr id="15" name="cuinotes-footer-mark"/>
+          <p:cNvSpPr txBox="1"/>
+          <p:nvPr/>
+        </p:nvSpPr>
+        <p:spPr>
+          <a:xfrm>
+            <a:off x="9951720" y="6455664"/>
+            <a:ext cx="2011680" cy="292608"/>
+          </a:xfrm>
+          <a:prstGeom prst="rect">
+            <a:avLst/>
+          </a:prstGeom>
+          <a:noFill/>
+        </p:spPr>
+        <p:txBody>
+          <a:bodyPr wrap="none" lIns="0" rIns="0" tIns="0" bIns="0">
+            <a:spAutoFit/>
+          </a:bodyPr>
+          <a:lstStyle/>
+          <a:p>
+            <a:pPr algn="r"/>
+            <a:r>
+              <a:rPr sz="1000">
+                <a:solidFill>
+                  <a:srgbClr val="8A939B"/>
+                </a:solidFill>
+                <a:hlinkClick r:id="rId3"/>
+              </a:rPr>
+              <a:t>cuinotes.com</a:t>
+            </a:r>
+            <a:r>
+              <a:rPr sz="1000">
+                <a:solidFill>
+                  <a:srgbClr val="8A939B"/>
+                </a:solidFill>
+              </a:rPr>
+              <a:t>  ·  20</a:t>
+            </a:r>
           </a:p>
         </p:txBody>
       </p:sp>
@@ -10319,6 +9980,10 @@
           </a:solidFill>
           <a:ln/>
         </p:spPr>
+        <p:txBody>
+          <a:bodyPr/>
+          <a:p/>
+        </p:txBody>
       </p:sp>
       <p:sp>
         <p:nvSpPr>
@@ -10513,79 +10178,44 @@
       </p:sp>
       <p:sp>
         <p:nvSpPr>
-          <p:cNvPr id="6" name="Text 4"/>
-          <p:cNvSpPr txBox="1"/>
-          <p:nvPr/>
-        </p:nvSpPr>
-        <p:spPr>
-          <a:xfrm>
-            <a:off x="640080" y="6446520"/>
-            <a:ext cx="8686800" cy="292608"/>
-          </a:xfrm>
-          <a:prstGeom prst="rect">
-            <a:avLst/>
-          </a:prstGeom>
-          <a:noFill/>
-          <a:ln/>
-        </p:spPr>
-        <p:txBody>
-          <a:bodyPr wrap="square" lIns="0" tIns="0" rIns="0" bIns="0" rtlCol="0" anchor="ctr"/>
-          <a:lstStyle/>
-          <a:p>
-            <a:pPr algn="l" indent="0" marL="0">
-              <a:buNone/>
-            </a:pPr>
-            <a:r>
-              <a:rPr lang="en-US" sz="900" dirty="0">
-                <a:solidFill>
-                  <a:srgbClr val="5D5D72"/>
-                </a:solidFill>
-                <a:latin typeface="Calibri" pitchFamily="34" charset="0"/>
-                <a:ea typeface="Calibri" pitchFamily="34" charset="-122"/>
-                <a:cs typeface="Calibri" pitchFamily="34" charset="-120"/>
-              </a:rPr>
-              <a:t>Usman Akram  •  COMSATS University Islamabad</a:t>
-            </a:r>
-            <a:endParaRPr lang="en-US" sz="900" dirty="0"/>
-          </a:p>
-        </p:txBody>
-      </p:sp>
-      <p:sp>
-        <p:nvSpPr>
-          <p:cNvPr id="7" name="Text 5"/>
-          <p:cNvSpPr txBox="1"/>
-          <p:nvPr/>
-        </p:nvSpPr>
-        <p:spPr>
-          <a:xfrm>
-            <a:off x="11155680" y="6446520"/>
-            <a:ext cx="457200" cy="292608"/>
-          </a:xfrm>
-          <a:prstGeom prst="rect">
-            <a:avLst/>
-          </a:prstGeom>
-          <a:noFill/>
-          <a:ln/>
-        </p:spPr>
-        <p:txBody>
-          <a:bodyPr wrap="square" lIns="0" tIns="0" rIns="0" bIns="0" rtlCol="0" anchor="ctr"/>
-          <a:lstStyle/>
-          <a:p>
-            <a:pPr algn="r" indent="0" marL="0">
-              <a:buNone/>
-            </a:pPr>
-            <a:r>
-              <a:rPr lang="en-US" sz="900" dirty="0">
-                <a:solidFill>
-                  <a:srgbClr val="5D5D72"/>
-                </a:solidFill>
-                <a:latin typeface="Calibri" pitchFamily="34" charset="0"/>
-                <a:ea typeface="Calibri" pitchFamily="34" charset="-122"/>
-                <a:cs typeface="Calibri" pitchFamily="34" charset="-120"/>
-              </a:rPr>
-              <a:t>21</a:t>
-            </a:r>
-            <a:endParaRPr lang="en-US" sz="900" dirty="0"/>
+          <p:cNvPr id="8" name="cuinotes-footer-mark"/>
+          <p:cNvSpPr txBox="1"/>
+          <p:nvPr/>
+        </p:nvSpPr>
+        <p:spPr>
+          <a:xfrm>
+            <a:off x="9951720" y="6455664"/>
+            <a:ext cx="2011680" cy="292608"/>
+          </a:xfrm>
+          <a:prstGeom prst="rect">
+            <a:avLst/>
+          </a:prstGeom>
+          <a:noFill/>
+        </p:spPr>
+        <p:txBody>
+          <a:bodyPr wrap="none" lIns="0" rIns="0" tIns="0" bIns="0">
+            <a:spAutoFit/>
+          </a:bodyPr>
+          <a:lstStyle/>
+          <a:p>
+            <a:pPr algn="r"/>
+            <a:r>
+              <a:rPr sz="1000">
+                <a:solidFill>
+                  <a:srgbClr val="8A939B"/>
+                </a:solidFill>
+                <a:hlinkClick r:id="rId3"/>
+              </a:rPr>
+              <a:t>cuinotes.com</a:t>
+            </a:r>
+            <a:r>
+              <a:rPr sz="1000">
+                <a:solidFill>
+                  <a:srgbClr val="8A939B"/>
+                </a:solidFill>
+              </a:rPr>
+              <a:t>  ·  21</a:t>
+            </a:r>
           </a:p>
         </p:txBody>
       </p:sp>
@@ -10718,6 +10348,10 @@
           </a:solidFill>
           <a:ln/>
         </p:spPr>
+        <p:txBody>
+          <a:bodyPr/>
+          <a:p/>
+        </p:txBody>
       </p:sp>
       <p:sp>
         <p:nvSpPr>
@@ -10816,6 +10450,10 @@
           </a:solidFill>
           <a:ln/>
         </p:spPr>
+        <p:txBody>
+          <a:bodyPr/>
+          <a:p/>
+        </p:txBody>
       </p:sp>
       <p:sp>
         <p:nvSpPr>
@@ -10914,6 +10552,10 @@
           </a:solidFill>
           <a:ln/>
         </p:spPr>
+        <p:txBody>
+          <a:bodyPr/>
+          <a:p/>
+        </p:txBody>
       </p:sp>
       <p:sp>
         <p:nvSpPr>
@@ -10995,79 +10637,44 @@
       </p:sp>
       <p:sp>
         <p:nvSpPr>
-          <p:cNvPr id="13" name="Text 11"/>
-          <p:cNvSpPr txBox="1"/>
-          <p:nvPr/>
-        </p:nvSpPr>
-        <p:spPr>
-          <a:xfrm>
-            <a:off x="640080" y="6446520"/>
-            <a:ext cx="8686800" cy="292608"/>
-          </a:xfrm>
-          <a:prstGeom prst="rect">
-            <a:avLst/>
-          </a:prstGeom>
-          <a:noFill/>
-          <a:ln/>
-        </p:spPr>
-        <p:txBody>
-          <a:bodyPr wrap="square" lIns="0" tIns="0" rIns="0" bIns="0" rtlCol="0" anchor="ctr"/>
-          <a:lstStyle/>
-          <a:p>
-            <a:pPr algn="l" indent="0" marL="0">
-              <a:buNone/>
-            </a:pPr>
-            <a:r>
-              <a:rPr lang="en-US" sz="900" dirty="0">
-                <a:solidFill>
-                  <a:srgbClr val="5D5D72"/>
-                </a:solidFill>
-                <a:latin typeface="Calibri" pitchFamily="34" charset="0"/>
-                <a:ea typeface="Calibri" pitchFamily="34" charset="-122"/>
-                <a:cs typeface="Calibri" pitchFamily="34" charset="-120"/>
-              </a:rPr>
-              <a:t>Usman Akram  •  COMSATS University Islamabad</a:t>
-            </a:r>
-            <a:endParaRPr lang="en-US" sz="900" dirty="0"/>
-          </a:p>
-        </p:txBody>
-      </p:sp>
-      <p:sp>
-        <p:nvSpPr>
-          <p:cNvPr id="14" name="Text 12"/>
-          <p:cNvSpPr txBox="1"/>
-          <p:nvPr/>
-        </p:nvSpPr>
-        <p:spPr>
-          <a:xfrm>
-            <a:off x="11155680" y="6446520"/>
-            <a:ext cx="457200" cy="292608"/>
-          </a:xfrm>
-          <a:prstGeom prst="rect">
-            <a:avLst/>
-          </a:prstGeom>
-          <a:noFill/>
-          <a:ln/>
-        </p:spPr>
-        <p:txBody>
-          <a:bodyPr wrap="square" lIns="0" tIns="0" rIns="0" bIns="0" rtlCol="0" anchor="ctr"/>
-          <a:lstStyle/>
-          <a:p>
-            <a:pPr algn="r" indent="0" marL="0">
-              <a:buNone/>
-            </a:pPr>
-            <a:r>
-              <a:rPr lang="en-US" sz="900" dirty="0">
-                <a:solidFill>
-                  <a:srgbClr val="5D5D72"/>
-                </a:solidFill>
-                <a:latin typeface="Calibri" pitchFamily="34" charset="0"/>
-                <a:ea typeface="Calibri" pitchFamily="34" charset="-122"/>
-                <a:cs typeface="Calibri" pitchFamily="34" charset="-120"/>
-              </a:rPr>
-              <a:t>22</a:t>
-            </a:r>
-            <a:endParaRPr lang="en-US" sz="900" dirty="0"/>
+          <p:cNvPr id="15" name="cuinotes-footer-mark"/>
+          <p:cNvSpPr txBox="1"/>
+          <p:nvPr/>
+        </p:nvSpPr>
+        <p:spPr>
+          <a:xfrm>
+            <a:off x="9951720" y="6455664"/>
+            <a:ext cx="2011680" cy="292608"/>
+          </a:xfrm>
+          <a:prstGeom prst="rect">
+            <a:avLst/>
+          </a:prstGeom>
+          <a:noFill/>
+        </p:spPr>
+        <p:txBody>
+          <a:bodyPr wrap="none" lIns="0" rIns="0" tIns="0" bIns="0">
+            <a:spAutoFit/>
+          </a:bodyPr>
+          <a:lstStyle/>
+          <a:p>
+            <a:pPr algn="r"/>
+            <a:r>
+              <a:rPr sz="1000">
+                <a:solidFill>
+                  <a:srgbClr val="8A939B"/>
+                </a:solidFill>
+                <a:hlinkClick r:id="rId3"/>
+              </a:rPr>
+              <a:t>cuinotes.com</a:t>
+            </a:r>
+            <a:r>
+              <a:rPr sz="1000">
+                <a:solidFill>
+                  <a:srgbClr val="8A939B"/>
+                </a:solidFill>
+              </a:rPr>
+              <a:t>  ·  22</a:t>
+            </a:r>
           </a:p>
         </p:txBody>
       </p:sp>
@@ -11202,6 +10809,10 @@
           </a:solidFill>
           <a:ln/>
         </p:spPr>
+        <p:txBody>
+          <a:bodyPr/>
+          <a:p/>
+        </p:txBody>
       </p:sp>
       <p:sp>
         <p:nvSpPr>
@@ -11385,79 +10996,44 @@
       </p:sp>
       <p:sp>
         <p:nvSpPr>
-          <p:cNvPr id="6" name="Text 4"/>
-          <p:cNvSpPr txBox="1"/>
-          <p:nvPr/>
-        </p:nvSpPr>
-        <p:spPr>
-          <a:xfrm>
-            <a:off x="640080" y="6446520"/>
-            <a:ext cx="8686800" cy="292608"/>
-          </a:xfrm>
-          <a:prstGeom prst="rect">
-            <a:avLst/>
-          </a:prstGeom>
-          <a:noFill/>
-          <a:ln/>
-        </p:spPr>
-        <p:txBody>
-          <a:bodyPr wrap="square" lIns="0" tIns="0" rIns="0" bIns="0" rtlCol="0" anchor="ctr"/>
-          <a:lstStyle/>
-          <a:p>
-            <a:pPr algn="l" indent="0" marL="0">
-              <a:buNone/>
-            </a:pPr>
-            <a:r>
-              <a:rPr lang="en-US" sz="900" dirty="0">
-                <a:solidFill>
-                  <a:srgbClr val="5D5D72"/>
-                </a:solidFill>
-                <a:latin typeface="Calibri" pitchFamily="34" charset="0"/>
-                <a:ea typeface="Calibri" pitchFamily="34" charset="-122"/>
-                <a:cs typeface="Calibri" pitchFamily="34" charset="-120"/>
-              </a:rPr>
-              <a:t>Usman Akram  •  COMSATS University Islamabad</a:t>
-            </a:r>
-            <a:endParaRPr lang="en-US" sz="900" dirty="0"/>
-          </a:p>
-        </p:txBody>
-      </p:sp>
-      <p:sp>
-        <p:nvSpPr>
-          <p:cNvPr id="7" name="Text 5"/>
-          <p:cNvSpPr txBox="1"/>
-          <p:nvPr/>
-        </p:nvSpPr>
-        <p:spPr>
-          <a:xfrm>
-            <a:off x="11155680" y="6446520"/>
-            <a:ext cx="457200" cy="292608"/>
-          </a:xfrm>
-          <a:prstGeom prst="rect">
-            <a:avLst/>
-          </a:prstGeom>
-          <a:noFill/>
-          <a:ln/>
-        </p:spPr>
-        <p:txBody>
-          <a:bodyPr wrap="square" lIns="0" tIns="0" rIns="0" bIns="0" rtlCol="0" anchor="ctr"/>
-          <a:lstStyle/>
-          <a:p>
-            <a:pPr algn="r" indent="0" marL="0">
-              <a:buNone/>
-            </a:pPr>
-            <a:r>
-              <a:rPr lang="en-US" sz="900" dirty="0">
-                <a:solidFill>
-                  <a:srgbClr val="5D5D72"/>
-                </a:solidFill>
-                <a:latin typeface="Calibri" pitchFamily="34" charset="0"/>
-                <a:ea typeface="Calibri" pitchFamily="34" charset="-122"/>
-                <a:cs typeface="Calibri" pitchFamily="34" charset="-120"/>
-              </a:rPr>
-              <a:t>23</a:t>
-            </a:r>
-            <a:endParaRPr lang="en-US" sz="900" dirty="0"/>
+          <p:cNvPr id="8" name="cuinotes-footer-mark"/>
+          <p:cNvSpPr txBox="1"/>
+          <p:nvPr/>
+        </p:nvSpPr>
+        <p:spPr>
+          <a:xfrm>
+            <a:off x="9951720" y="6455664"/>
+            <a:ext cx="2011680" cy="292608"/>
+          </a:xfrm>
+          <a:prstGeom prst="rect">
+            <a:avLst/>
+          </a:prstGeom>
+          <a:noFill/>
+        </p:spPr>
+        <p:txBody>
+          <a:bodyPr wrap="none" lIns="0" rIns="0" tIns="0" bIns="0">
+            <a:spAutoFit/>
+          </a:bodyPr>
+          <a:lstStyle/>
+          <a:p>
+            <a:pPr algn="r"/>
+            <a:r>
+              <a:rPr sz="1000">
+                <a:solidFill>
+                  <a:srgbClr val="8A939B"/>
+                </a:solidFill>
+                <a:hlinkClick r:id="rId3"/>
+              </a:rPr>
+              <a:t>cuinotes.com</a:t>
+            </a:r>
+            <a:r>
+              <a:rPr sz="1000">
+                <a:solidFill>
+                  <a:srgbClr val="8A939B"/>
+                </a:solidFill>
+              </a:rPr>
+              <a:t>  ·  23</a:t>
+            </a:r>
           </a:p>
         </p:txBody>
       </p:sp>
@@ -11592,6 +11168,10 @@
           </a:solidFill>
           <a:ln/>
         </p:spPr>
+        <p:txBody>
+          <a:bodyPr/>
+          <a:p/>
+        </p:txBody>
       </p:sp>
       <p:sp>
         <p:nvSpPr>
@@ -11815,79 +11395,44 @@
       </p:sp>
       <p:sp>
         <p:nvSpPr>
-          <p:cNvPr id="6" name="Text 4"/>
-          <p:cNvSpPr txBox="1"/>
-          <p:nvPr/>
-        </p:nvSpPr>
-        <p:spPr>
-          <a:xfrm>
-            <a:off x="640080" y="6446520"/>
-            <a:ext cx="8686800" cy="292608"/>
-          </a:xfrm>
-          <a:prstGeom prst="rect">
-            <a:avLst/>
-          </a:prstGeom>
-          <a:noFill/>
-          <a:ln/>
-        </p:spPr>
-        <p:txBody>
-          <a:bodyPr wrap="square" lIns="0" tIns="0" rIns="0" bIns="0" rtlCol="0" anchor="ctr"/>
-          <a:lstStyle/>
-          <a:p>
-            <a:pPr algn="l" indent="0" marL="0">
-              <a:buNone/>
-            </a:pPr>
-            <a:r>
-              <a:rPr lang="en-US" sz="900" dirty="0">
-                <a:solidFill>
-                  <a:srgbClr val="5D5D72"/>
-                </a:solidFill>
-                <a:latin typeface="Calibri" pitchFamily="34" charset="0"/>
-                <a:ea typeface="Calibri" pitchFamily="34" charset="-122"/>
-                <a:cs typeface="Calibri" pitchFamily="34" charset="-120"/>
-              </a:rPr>
-              <a:t>Usman Akram  •  COMSATS University Islamabad</a:t>
-            </a:r>
-            <a:endParaRPr lang="en-US" sz="900" dirty="0"/>
-          </a:p>
-        </p:txBody>
-      </p:sp>
-      <p:sp>
-        <p:nvSpPr>
-          <p:cNvPr id="7" name="Text 5"/>
-          <p:cNvSpPr txBox="1"/>
-          <p:nvPr/>
-        </p:nvSpPr>
-        <p:spPr>
-          <a:xfrm>
-            <a:off x="11155680" y="6446520"/>
-            <a:ext cx="457200" cy="292608"/>
-          </a:xfrm>
-          <a:prstGeom prst="rect">
-            <a:avLst/>
-          </a:prstGeom>
-          <a:noFill/>
-          <a:ln/>
-        </p:spPr>
-        <p:txBody>
-          <a:bodyPr wrap="square" lIns="0" tIns="0" rIns="0" bIns="0" rtlCol="0" anchor="ctr"/>
-          <a:lstStyle/>
-          <a:p>
-            <a:pPr algn="r" indent="0" marL="0">
-              <a:buNone/>
-            </a:pPr>
-            <a:r>
-              <a:rPr lang="en-US" sz="900" dirty="0">
-                <a:solidFill>
-                  <a:srgbClr val="5D5D72"/>
-                </a:solidFill>
-                <a:latin typeface="Calibri" pitchFamily="34" charset="0"/>
-                <a:ea typeface="Calibri" pitchFamily="34" charset="-122"/>
-                <a:cs typeface="Calibri" pitchFamily="34" charset="-120"/>
-              </a:rPr>
-              <a:t>24</a:t>
-            </a:r>
-            <a:endParaRPr lang="en-US" sz="900" dirty="0"/>
+          <p:cNvPr id="8" name="cuinotes-footer-mark"/>
+          <p:cNvSpPr txBox="1"/>
+          <p:nvPr/>
+        </p:nvSpPr>
+        <p:spPr>
+          <a:xfrm>
+            <a:off x="9951720" y="6455664"/>
+            <a:ext cx="2011680" cy="292608"/>
+          </a:xfrm>
+          <a:prstGeom prst="rect">
+            <a:avLst/>
+          </a:prstGeom>
+          <a:noFill/>
+        </p:spPr>
+        <p:txBody>
+          <a:bodyPr wrap="none" lIns="0" rIns="0" tIns="0" bIns="0">
+            <a:spAutoFit/>
+          </a:bodyPr>
+          <a:lstStyle/>
+          <a:p>
+            <a:pPr algn="r"/>
+            <a:r>
+              <a:rPr sz="1000">
+                <a:solidFill>
+                  <a:srgbClr val="8A939B"/>
+                </a:solidFill>
+                <a:hlinkClick r:id="rId3"/>
+              </a:rPr>
+              <a:t>cuinotes.com</a:t>
+            </a:r>
+            <a:r>
+              <a:rPr sz="1000">
+                <a:solidFill>
+                  <a:srgbClr val="8A939B"/>
+                </a:solidFill>
+              </a:rPr>
+              <a:t>  ·  24</a:t>
+            </a:r>
           </a:p>
         </p:txBody>
       </p:sp>
@@ -12022,6 +11567,10 @@
           </a:solidFill>
           <a:ln/>
         </p:spPr>
+        <p:txBody>
+          <a:bodyPr/>
+          <a:p/>
+        </p:txBody>
       </p:sp>
       <p:sp>
         <p:nvSpPr>
@@ -12224,79 +11773,44 @@
       </p:sp>
       <p:sp>
         <p:nvSpPr>
-          <p:cNvPr id="7" name="Text 5"/>
-          <p:cNvSpPr txBox="1"/>
-          <p:nvPr/>
-        </p:nvSpPr>
-        <p:spPr>
-          <a:xfrm>
-            <a:off x="640080" y="6446520"/>
-            <a:ext cx="8686800" cy="292608"/>
-          </a:xfrm>
-          <a:prstGeom prst="rect">
-            <a:avLst/>
-          </a:prstGeom>
-          <a:noFill/>
-          <a:ln/>
-        </p:spPr>
-        <p:txBody>
-          <a:bodyPr wrap="square" lIns="0" tIns="0" rIns="0" bIns="0" rtlCol="0" anchor="ctr"/>
-          <a:lstStyle/>
-          <a:p>
-            <a:pPr algn="l" indent="0" marL="0">
-              <a:buNone/>
-            </a:pPr>
-            <a:r>
-              <a:rPr lang="en-US" sz="900" dirty="0">
-                <a:solidFill>
-                  <a:srgbClr val="5D5D72"/>
-                </a:solidFill>
-                <a:latin typeface="Calibri" pitchFamily="34" charset="0"/>
-                <a:ea typeface="Calibri" pitchFamily="34" charset="-122"/>
-                <a:cs typeface="Calibri" pitchFamily="34" charset="-120"/>
-              </a:rPr>
-              <a:t>Usman Akram  •  COMSATS University Islamabad</a:t>
-            </a:r>
-            <a:endParaRPr lang="en-US" sz="900" dirty="0"/>
-          </a:p>
-        </p:txBody>
-      </p:sp>
-      <p:sp>
-        <p:nvSpPr>
-          <p:cNvPr id="8" name="Text 6"/>
-          <p:cNvSpPr txBox="1"/>
-          <p:nvPr/>
-        </p:nvSpPr>
-        <p:spPr>
-          <a:xfrm>
-            <a:off x="11155680" y="6446520"/>
-            <a:ext cx="457200" cy="292608"/>
-          </a:xfrm>
-          <a:prstGeom prst="rect">
-            <a:avLst/>
-          </a:prstGeom>
-          <a:noFill/>
-          <a:ln/>
-        </p:spPr>
-        <p:txBody>
-          <a:bodyPr wrap="square" lIns="0" tIns="0" rIns="0" bIns="0" rtlCol="0" anchor="ctr"/>
-          <a:lstStyle/>
-          <a:p>
-            <a:pPr algn="r" indent="0" marL="0">
-              <a:buNone/>
-            </a:pPr>
-            <a:r>
-              <a:rPr lang="en-US" sz="900" dirty="0">
-                <a:solidFill>
-                  <a:srgbClr val="5D5D72"/>
-                </a:solidFill>
-                <a:latin typeface="Calibri" pitchFamily="34" charset="0"/>
-                <a:ea typeface="Calibri" pitchFamily="34" charset="-122"/>
-                <a:cs typeface="Calibri" pitchFamily="34" charset="-120"/>
-              </a:rPr>
-              <a:t>25</a:t>
-            </a:r>
-            <a:endParaRPr lang="en-US" sz="900" dirty="0"/>
+          <p:cNvPr id="9" name="cuinotes-footer-mark"/>
+          <p:cNvSpPr txBox="1"/>
+          <p:nvPr/>
+        </p:nvSpPr>
+        <p:spPr>
+          <a:xfrm>
+            <a:off x="9951720" y="6455664"/>
+            <a:ext cx="2011680" cy="292608"/>
+          </a:xfrm>
+          <a:prstGeom prst="rect">
+            <a:avLst/>
+          </a:prstGeom>
+          <a:noFill/>
+        </p:spPr>
+        <p:txBody>
+          <a:bodyPr wrap="none" lIns="0" rIns="0" tIns="0" bIns="0">
+            <a:spAutoFit/>
+          </a:bodyPr>
+          <a:lstStyle/>
+          <a:p>
+            <a:pPr algn="r"/>
+            <a:r>
+              <a:rPr sz="1000">
+                <a:solidFill>
+                  <a:srgbClr val="8A939B"/>
+                </a:solidFill>
+                <a:hlinkClick r:id="rId3"/>
+              </a:rPr>
+              <a:t>cuinotes.com</a:t>
+            </a:r>
+            <a:r>
+              <a:rPr sz="1000">
+                <a:solidFill>
+                  <a:srgbClr val="8A939B"/>
+                </a:solidFill>
+              </a:rPr>
+              <a:t>  ·  25</a:t>
+            </a:r>
           </a:p>
         </p:txBody>
       </p:sp>
@@ -12429,6 +11943,10 @@
           </a:solidFill>
           <a:ln/>
         </p:spPr>
+        <p:txBody>
+          <a:bodyPr/>
+          <a:p/>
+        </p:txBody>
       </p:sp>
       <p:sp>
         <p:nvSpPr>
@@ -12527,6 +12045,10 @@
           </a:solidFill>
           <a:ln/>
         </p:spPr>
+        <p:txBody>
+          <a:bodyPr/>
+          <a:p/>
+        </p:txBody>
       </p:sp>
       <p:sp>
         <p:nvSpPr>
@@ -12608,79 +12130,44 @@
       </p:sp>
       <p:sp>
         <p:nvSpPr>
-          <p:cNvPr id="10" name="Text 8"/>
-          <p:cNvSpPr txBox="1"/>
-          <p:nvPr/>
-        </p:nvSpPr>
-        <p:spPr>
-          <a:xfrm>
-            <a:off x="640080" y="6446520"/>
-            <a:ext cx="8686800" cy="292608"/>
-          </a:xfrm>
-          <a:prstGeom prst="rect">
-            <a:avLst/>
-          </a:prstGeom>
-          <a:noFill/>
-          <a:ln/>
-        </p:spPr>
-        <p:txBody>
-          <a:bodyPr wrap="square" lIns="0" tIns="0" rIns="0" bIns="0" rtlCol="0" anchor="ctr"/>
-          <a:lstStyle/>
-          <a:p>
-            <a:pPr algn="l" indent="0" marL="0">
-              <a:buNone/>
-            </a:pPr>
-            <a:r>
-              <a:rPr lang="en-US" sz="900" dirty="0">
-                <a:solidFill>
-                  <a:srgbClr val="5D5D72"/>
-                </a:solidFill>
-                <a:latin typeface="Calibri" pitchFamily="34" charset="0"/>
-                <a:ea typeface="Calibri" pitchFamily="34" charset="-122"/>
-                <a:cs typeface="Calibri" pitchFamily="34" charset="-120"/>
-              </a:rPr>
-              <a:t>Usman Akram  •  COMSATS University Islamabad</a:t>
-            </a:r>
-            <a:endParaRPr lang="en-US" sz="900" dirty="0"/>
-          </a:p>
-        </p:txBody>
-      </p:sp>
-      <p:sp>
-        <p:nvSpPr>
-          <p:cNvPr id="11" name="Text 9"/>
-          <p:cNvSpPr txBox="1"/>
-          <p:nvPr/>
-        </p:nvSpPr>
-        <p:spPr>
-          <a:xfrm>
-            <a:off x="11155680" y="6446520"/>
-            <a:ext cx="457200" cy="292608"/>
-          </a:xfrm>
-          <a:prstGeom prst="rect">
-            <a:avLst/>
-          </a:prstGeom>
-          <a:noFill/>
-          <a:ln/>
-        </p:spPr>
-        <p:txBody>
-          <a:bodyPr wrap="square" lIns="0" tIns="0" rIns="0" bIns="0" rtlCol="0" anchor="ctr"/>
-          <a:lstStyle/>
-          <a:p>
-            <a:pPr algn="r" indent="0" marL="0">
-              <a:buNone/>
-            </a:pPr>
-            <a:r>
-              <a:rPr lang="en-US" sz="900" dirty="0">
-                <a:solidFill>
-                  <a:srgbClr val="5D5D72"/>
-                </a:solidFill>
-                <a:latin typeface="Calibri" pitchFamily="34" charset="0"/>
-                <a:ea typeface="Calibri" pitchFamily="34" charset="-122"/>
-                <a:cs typeface="Calibri" pitchFamily="34" charset="-120"/>
-              </a:rPr>
-              <a:t>26</a:t>
-            </a:r>
-            <a:endParaRPr lang="en-US" sz="900" dirty="0"/>
+          <p:cNvPr id="12" name="cuinotes-footer-mark"/>
+          <p:cNvSpPr txBox="1"/>
+          <p:nvPr/>
+        </p:nvSpPr>
+        <p:spPr>
+          <a:xfrm>
+            <a:off x="9951720" y="6455664"/>
+            <a:ext cx="2011680" cy="292608"/>
+          </a:xfrm>
+          <a:prstGeom prst="rect">
+            <a:avLst/>
+          </a:prstGeom>
+          <a:noFill/>
+        </p:spPr>
+        <p:txBody>
+          <a:bodyPr wrap="none" lIns="0" rIns="0" tIns="0" bIns="0">
+            <a:spAutoFit/>
+          </a:bodyPr>
+          <a:lstStyle/>
+          <a:p>
+            <a:pPr algn="r"/>
+            <a:r>
+              <a:rPr sz="1000">
+                <a:solidFill>
+                  <a:srgbClr val="8A939B"/>
+                </a:solidFill>
+                <a:hlinkClick r:id="rId3"/>
+              </a:rPr>
+              <a:t>cuinotes.com</a:t>
+            </a:r>
+            <a:r>
+              <a:rPr sz="1000">
+                <a:solidFill>
+                  <a:srgbClr val="8A939B"/>
+                </a:solidFill>
+              </a:rPr>
+              <a:t>  ·  26</a:t>
+            </a:r>
           </a:p>
         </p:txBody>
       </p:sp>
@@ -12815,6 +12302,10 @@
           </a:solidFill>
           <a:ln/>
         </p:spPr>
+        <p:txBody>
+          <a:bodyPr/>
+          <a:p/>
+        </p:txBody>
       </p:sp>
       <p:sp>
         <p:nvSpPr>
@@ -12929,79 +12420,44 @@
       </p:sp>
       <p:sp>
         <p:nvSpPr>
-          <p:cNvPr id="6" name="Text 4"/>
-          <p:cNvSpPr txBox="1"/>
-          <p:nvPr/>
-        </p:nvSpPr>
-        <p:spPr>
-          <a:xfrm>
-            <a:off x="640080" y="6446520"/>
-            <a:ext cx="8686800" cy="292608"/>
-          </a:xfrm>
-          <a:prstGeom prst="rect">
-            <a:avLst/>
-          </a:prstGeom>
-          <a:noFill/>
-          <a:ln/>
-        </p:spPr>
-        <p:txBody>
-          <a:bodyPr wrap="square" lIns="0" tIns="0" rIns="0" bIns="0" rtlCol="0" anchor="ctr"/>
-          <a:lstStyle/>
-          <a:p>
-            <a:pPr algn="l" indent="0" marL="0">
-              <a:buNone/>
-            </a:pPr>
-            <a:r>
-              <a:rPr lang="en-US" sz="900" dirty="0">
-                <a:solidFill>
-                  <a:srgbClr val="5D5D72"/>
-                </a:solidFill>
-                <a:latin typeface="Calibri" pitchFamily="34" charset="0"/>
-                <a:ea typeface="Calibri" pitchFamily="34" charset="-122"/>
-                <a:cs typeface="Calibri" pitchFamily="34" charset="-120"/>
-              </a:rPr>
-              <a:t>Usman Akram  •  COMSATS University Islamabad</a:t>
-            </a:r>
-            <a:endParaRPr lang="en-US" sz="900" dirty="0"/>
-          </a:p>
-        </p:txBody>
-      </p:sp>
-      <p:sp>
-        <p:nvSpPr>
-          <p:cNvPr id="7" name="Text 5"/>
-          <p:cNvSpPr txBox="1"/>
-          <p:nvPr/>
-        </p:nvSpPr>
-        <p:spPr>
-          <a:xfrm>
-            <a:off x="11155680" y="6446520"/>
-            <a:ext cx="457200" cy="292608"/>
-          </a:xfrm>
-          <a:prstGeom prst="rect">
-            <a:avLst/>
-          </a:prstGeom>
-          <a:noFill/>
-          <a:ln/>
-        </p:spPr>
-        <p:txBody>
-          <a:bodyPr wrap="square" lIns="0" tIns="0" rIns="0" bIns="0" rtlCol="0" anchor="ctr"/>
-          <a:lstStyle/>
-          <a:p>
-            <a:pPr algn="r" indent="0" marL="0">
-              <a:buNone/>
-            </a:pPr>
-            <a:r>
-              <a:rPr lang="en-US" sz="900" dirty="0">
-                <a:solidFill>
-                  <a:srgbClr val="5D5D72"/>
-                </a:solidFill>
-                <a:latin typeface="Calibri" pitchFamily="34" charset="0"/>
-                <a:ea typeface="Calibri" pitchFamily="34" charset="-122"/>
-                <a:cs typeface="Calibri" pitchFamily="34" charset="-120"/>
-              </a:rPr>
-              <a:t>27</a:t>
-            </a:r>
-            <a:endParaRPr lang="en-US" sz="900" dirty="0"/>
+          <p:cNvPr id="8" name="cuinotes-footer-mark"/>
+          <p:cNvSpPr txBox="1"/>
+          <p:nvPr/>
+        </p:nvSpPr>
+        <p:spPr>
+          <a:xfrm>
+            <a:off x="9951720" y="6455664"/>
+            <a:ext cx="2011680" cy="292608"/>
+          </a:xfrm>
+          <a:prstGeom prst="rect">
+            <a:avLst/>
+          </a:prstGeom>
+          <a:noFill/>
+        </p:spPr>
+        <p:txBody>
+          <a:bodyPr wrap="none" lIns="0" rIns="0" tIns="0" bIns="0">
+            <a:spAutoFit/>
+          </a:bodyPr>
+          <a:lstStyle/>
+          <a:p>
+            <a:pPr algn="r"/>
+            <a:r>
+              <a:rPr sz="1000">
+                <a:solidFill>
+                  <a:srgbClr val="8A939B"/>
+                </a:solidFill>
+                <a:hlinkClick r:id="rId3"/>
+              </a:rPr>
+              <a:t>cuinotes.com</a:t>
+            </a:r>
+            <a:r>
+              <a:rPr sz="1000">
+                <a:solidFill>
+                  <a:srgbClr val="8A939B"/>
+                </a:solidFill>
+              </a:rPr>
+              <a:t>  ·  27</a:t>
+            </a:r>
           </a:p>
         </p:txBody>
       </p:sp>
@@ -13134,6 +12590,10 @@
           </a:solidFill>
           <a:ln/>
         </p:spPr>
+        <p:txBody>
+          <a:bodyPr/>
+          <a:p/>
+        </p:txBody>
       </p:sp>
       <p:sp>
         <p:nvSpPr>
@@ -13232,6 +12692,10 @@
           </a:solidFill>
           <a:ln/>
         </p:spPr>
+        <p:txBody>
+          <a:bodyPr/>
+          <a:p/>
+        </p:txBody>
       </p:sp>
       <p:sp>
         <p:nvSpPr>
@@ -13330,6 +12794,10 @@
           </a:solidFill>
           <a:ln/>
         </p:spPr>
+        <p:txBody>
+          <a:bodyPr/>
+          <a:p/>
+        </p:txBody>
       </p:sp>
       <p:sp>
         <p:nvSpPr>
@@ -13411,79 +12879,44 @@
       </p:sp>
       <p:sp>
         <p:nvSpPr>
-          <p:cNvPr id="13" name="Text 11"/>
-          <p:cNvSpPr txBox="1"/>
-          <p:nvPr/>
-        </p:nvSpPr>
-        <p:spPr>
-          <a:xfrm>
-            <a:off x="640080" y="6446520"/>
-            <a:ext cx="8686800" cy="292608"/>
-          </a:xfrm>
-          <a:prstGeom prst="rect">
-            <a:avLst/>
-          </a:prstGeom>
-          <a:noFill/>
-          <a:ln/>
-        </p:spPr>
-        <p:txBody>
-          <a:bodyPr wrap="square" lIns="0" tIns="0" rIns="0" bIns="0" rtlCol="0" anchor="ctr"/>
-          <a:lstStyle/>
-          <a:p>
-            <a:pPr algn="l" indent="0" marL="0">
-              <a:buNone/>
-            </a:pPr>
-            <a:r>
-              <a:rPr lang="en-US" sz="900" dirty="0">
-                <a:solidFill>
-                  <a:srgbClr val="5D5D72"/>
-                </a:solidFill>
-                <a:latin typeface="Calibri" pitchFamily="34" charset="0"/>
-                <a:ea typeface="Calibri" pitchFamily="34" charset="-122"/>
-                <a:cs typeface="Calibri" pitchFamily="34" charset="-120"/>
-              </a:rPr>
-              <a:t>Usman Akram  •  COMSATS University Islamabad</a:t>
-            </a:r>
-            <a:endParaRPr lang="en-US" sz="900" dirty="0"/>
-          </a:p>
-        </p:txBody>
-      </p:sp>
-      <p:sp>
-        <p:nvSpPr>
-          <p:cNvPr id="14" name="Text 12"/>
-          <p:cNvSpPr txBox="1"/>
-          <p:nvPr/>
-        </p:nvSpPr>
-        <p:spPr>
-          <a:xfrm>
-            <a:off x="11155680" y="6446520"/>
-            <a:ext cx="457200" cy="292608"/>
-          </a:xfrm>
-          <a:prstGeom prst="rect">
-            <a:avLst/>
-          </a:prstGeom>
-          <a:noFill/>
-          <a:ln/>
-        </p:spPr>
-        <p:txBody>
-          <a:bodyPr wrap="square" lIns="0" tIns="0" rIns="0" bIns="0" rtlCol="0" anchor="ctr"/>
-          <a:lstStyle/>
-          <a:p>
-            <a:pPr algn="r" indent="0" marL="0">
-              <a:buNone/>
-            </a:pPr>
-            <a:r>
-              <a:rPr lang="en-US" sz="900" dirty="0">
-                <a:solidFill>
-                  <a:srgbClr val="5D5D72"/>
-                </a:solidFill>
-                <a:latin typeface="Calibri" pitchFamily="34" charset="0"/>
-                <a:ea typeface="Calibri" pitchFamily="34" charset="-122"/>
-                <a:cs typeface="Calibri" pitchFamily="34" charset="-120"/>
-              </a:rPr>
-              <a:t>28</a:t>
-            </a:r>
-            <a:endParaRPr lang="en-US" sz="900" dirty="0"/>
+          <p:cNvPr id="15" name="cuinotes-footer-mark"/>
+          <p:cNvSpPr txBox="1"/>
+          <p:nvPr/>
+        </p:nvSpPr>
+        <p:spPr>
+          <a:xfrm>
+            <a:off x="9951720" y="6455664"/>
+            <a:ext cx="2011680" cy="292608"/>
+          </a:xfrm>
+          <a:prstGeom prst="rect">
+            <a:avLst/>
+          </a:prstGeom>
+          <a:noFill/>
+        </p:spPr>
+        <p:txBody>
+          <a:bodyPr wrap="none" lIns="0" rIns="0" tIns="0" bIns="0">
+            <a:spAutoFit/>
+          </a:bodyPr>
+          <a:lstStyle/>
+          <a:p>
+            <a:pPr algn="r"/>
+            <a:r>
+              <a:rPr sz="1000">
+                <a:solidFill>
+                  <a:srgbClr val="8A939B"/>
+                </a:solidFill>
+                <a:hlinkClick r:id="rId3"/>
+              </a:rPr>
+              <a:t>cuinotes.com</a:t>
+            </a:r>
+            <a:r>
+              <a:rPr sz="1000">
+                <a:solidFill>
+                  <a:srgbClr val="8A939B"/>
+                </a:solidFill>
+              </a:rPr>
+              <a:t>  ·  28</a:t>
+            </a:r>
           </a:p>
         </p:txBody>
       </p:sp>
@@ -13618,6 +13051,10 @@
           </a:solidFill>
           <a:ln/>
         </p:spPr>
+        <p:txBody>
+          <a:bodyPr/>
+          <a:p/>
+        </p:txBody>
       </p:sp>
       <p:sp>
         <p:nvSpPr>
@@ -13892,79 +13329,44 @@
       </p:sp>
       <p:sp>
         <p:nvSpPr>
-          <p:cNvPr id="6" name="Text 4"/>
-          <p:cNvSpPr txBox="1"/>
-          <p:nvPr/>
-        </p:nvSpPr>
-        <p:spPr>
-          <a:xfrm>
-            <a:off x="640080" y="6446520"/>
-            <a:ext cx="8686800" cy="292608"/>
-          </a:xfrm>
-          <a:prstGeom prst="rect">
-            <a:avLst/>
-          </a:prstGeom>
-          <a:noFill/>
-          <a:ln/>
-        </p:spPr>
-        <p:txBody>
-          <a:bodyPr wrap="square" lIns="0" tIns="0" rIns="0" bIns="0" rtlCol="0" anchor="ctr"/>
-          <a:lstStyle/>
-          <a:p>
-            <a:pPr algn="l" indent="0" marL="0">
-              <a:buNone/>
-            </a:pPr>
-            <a:r>
-              <a:rPr lang="en-US" sz="900" dirty="0">
-                <a:solidFill>
-                  <a:srgbClr val="5D5D72"/>
-                </a:solidFill>
-                <a:latin typeface="Calibri" pitchFamily="34" charset="0"/>
-                <a:ea typeface="Calibri" pitchFamily="34" charset="-122"/>
-                <a:cs typeface="Calibri" pitchFamily="34" charset="-120"/>
-              </a:rPr>
-              <a:t>Usman Akram  •  COMSATS University Islamabad</a:t>
-            </a:r>
-            <a:endParaRPr lang="en-US" sz="900" dirty="0"/>
-          </a:p>
-        </p:txBody>
-      </p:sp>
-      <p:sp>
-        <p:nvSpPr>
-          <p:cNvPr id="7" name="Text 5"/>
-          <p:cNvSpPr txBox="1"/>
-          <p:nvPr/>
-        </p:nvSpPr>
-        <p:spPr>
-          <a:xfrm>
-            <a:off x="11155680" y="6446520"/>
-            <a:ext cx="457200" cy="292608"/>
-          </a:xfrm>
-          <a:prstGeom prst="rect">
-            <a:avLst/>
-          </a:prstGeom>
-          <a:noFill/>
-          <a:ln/>
-        </p:spPr>
-        <p:txBody>
-          <a:bodyPr wrap="square" lIns="0" tIns="0" rIns="0" bIns="0" rtlCol="0" anchor="ctr"/>
-          <a:lstStyle/>
-          <a:p>
-            <a:pPr algn="r" indent="0" marL="0">
-              <a:buNone/>
-            </a:pPr>
-            <a:r>
-              <a:rPr lang="en-US" sz="900" dirty="0">
-                <a:solidFill>
-                  <a:srgbClr val="5D5D72"/>
-                </a:solidFill>
-                <a:latin typeface="Calibri" pitchFamily="34" charset="0"/>
-                <a:ea typeface="Calibri" pitchFamily="34" charset="-122"/>
-                <a:cs typeface="Calibri" pitchFamily="34" charset="-120"/>
-              </a:rPr>
-              <a:t>29</a:t>
-            </a:r>
-            <a:endParaRPr lang="en-US" sz="900" dirty="0"/>
+          <p:cNvPr id="8" name="cuinotes-footer-mark"/>
+          <p:cNvSpPr txBox="1"/>
+          <p:nvPr/>
+        </p:nvSpPr>
+        <p:spPr>
+          <a:xfrm>
+            <a:off x="9951720" y="6455664"/>
+            <a:ext cx="2011680" cy="292608"/>
+          </a:xfrm>
+          <a:prstGeom prst="rect">
+            <a:avLst/>
+          </a:prstGeom>
+          <a:noFill/>
+        </p:spPr>
+        <p:txBody>
+          <a:bodyPr wrap="none" lIns="0" rIns="0" tIns="0" bIns="0">
+            <a:spAutoFit/>
+          </a:bodyPr>
+          <a:lstStyle/>
+          <a:p>
+            <a:pPr algn="r"/>
+            <a:r>
+              <a:rPr sz="1000">
+                <a:solidFill>
+                  <a:srgbClr val="8A939B"/>
+                </a:solidFill>
+                <a:hlinkClick r:id="rId3"/>
+              </a:rPr>
+              <a:t>cuinotes.com</a:t>
+            </a:r>
+            <a:r>
+              <a:rPr sz="1000">
+                <a:solidFill>
+                  <a:srgbClr val="8A939B"/>
+                </a:solidFill>
+              </a:rPr>
+              <a:t>  ·  29</a:t>
+            </a:r>
           </a:p>
         </p:txBody>
       </p:sp>
@@ -14099,6 +13501,10 @@
           </a:solidFill>
           <a:ln/>
         </p:spPr>
+        <p:txBody>
+          <a:bodyPr/>
+          <a:p/>
+        </p:txBody>
       </p:sp>
       <p:sp>
         <p:nvSpPr>
@@ -14272,79 +13678,44 @@
       </p:sp>
       <p:sp>
         <p:nvSpPr>
-          <p:cNvPr id="7" name="Text 5"/>
-          <p:cNvSpPr txBox="1"/>
-          <p:nvPr/>
-        </p:nvSpPr>
-        <p:spPr>
-          <a:xfrm>
-            <a:off x="640080" y="6446520"/>
-            <a:ext cx="8686800" cy="292608"/>
-          </a:xfrm>
-          <a:prstGeom prst="rect">
-            <a:avLst/>
-          </a:prstGeom>
-          <a:noFill/>
-          <a:ln/>
-        </p:spPr>
-        <p:txBody>
-          <a:bodyPr wrap="square" lIns="0" tIns="0" rIns="0" bIns="0" rtlCol="0" anchor="ctr"/>
-          <a:lstStyle/>
-          <a:p>
-            <a:pPr algn="l" indent="0" marL="0">
-              <a:buNone/>
-            </a:pPr>
-            <a:r>
-              <a:rPr lang="en-US" sz="900" dirty="0">
-                <a:solidFill>
-                  <a:srgbClr val="5D5D72"/>
-                </a:solidFill>
-                <a:latin typeface="Calibri" pitchFamily="34" charset="0"/>
-                <a:ea typeface="Calibri" pitchFamily="34" charset="-122"/>
-                <a:cs typeface="Calibri" pitchFamily="34" charset="-120"/>
-              </a:rPr>
-              <a:t>Usman Akram  •  COMSATS University Islamabad</a:t>
-            </a:r>
-            <a:endParaRPr lang="en-US" sz="900" dirty="0"/>
-          </a:p>
-        </p:txBody>
-      </p:sp>
-      <p:sp>
-        <p:nvSpPr>
-          <p:cNvPr id="8" name="Text 6"/>
-          <p:cNvSpPr txBox="1"/>
-          <p:nvPr/>
-        </p:nvSpPr>
-        <p:spPr>
-          <a:xfrm>
-            <a:off x="11155680" y="6446520"/>
-            <a:ext cx="457200" cy="292608"/>
-          </a:xfrm>
-          <a:prstGeom prst="rect">
-            <a:avLst/>
-          </a:prstGeom>
-          <a:noFill/>
-          <a:ln/>
-        </p:spPr>
-        <p:txBody>
-          <a:bodyPr wrap="square" lIns="0" tIns="0" rIns="0" bIns="0" rtlCol="0" anchor="ctr"/>
-          <a:lstStyle/>
-          <a:p>
-            <a:pPr algn="r" indent="0" marL="0">
-              <a:buNone/>
-            </a:pPr>
-            <a:r>
-              <a:rPr lang="en-US" sz="900" dirty="0">
-                <a:solidFill>
-                  <a:srgbClr val="5D5D72"/>
-                </a:solidFill>
-                <a:latin typeface="Calibri" pitchFamily="34" charset="0"/>
-                <a:ea typeface="Calibri" pitchFamily="34" charset="-122"/>
-                <a:cs typeface="Calibri" pitchFamily="34" charset="-120"/>
-              </a:rPr>
-              <a:t>3</a:t>
-            </a:r>
-            <a:endParaRPr lang="en-US" sz="900" dirty="0"/>
+          <p:cNvPr id="9" name="cuinotes-footer-mark"/>
+          <p:cNvSpPr txBox="1"/>
+          <p:nvPr/>
+        </p:nvSpPr>
+        <p:spPr>
+          <a:xfrm>
+            <a:off x="9951720" y="6455664"/>
+            <a:ext cx="2011680" cy="292608"/>
+          </a:xfrm>
+          <a:prstGeom prst="rect">
+            <a:avLst/>
+          </a:prstGeom>
+          <a:noFill/>
+        </p:spPr>
+        <p:txBody>
+          <a:bodyPr wrap="none" lIns="0" rIns="0" tIns="0" bIns="0">
+            <a:spAutoFit/>
+          </a:bodyPr>
+          <a:lstStyle/>
+          <a:p>
+            <a:pPr algn="r"/>
+            <a:r>
+              <a:rPr sz="1000">
+                <a:solidFill>
+                  <a:srgbClr val="8A939B"/>
+                </a:solidFill>
+                <a:hlinkClick r:id="rId3"/>
+              </a:rPr>
+              <a:t>cuinotes.com</a:t>
+            </a:r>
+            <a:r>
+              <a:rPr sz="1000">
+                <a:solidFill>
+                  <a:srgbClr val="8A939B"/>
+                </a:solidFill>
+              </a:rPr>
+              <a:t>  ·  3</a:t>
+            </a:r>
           </a:p>
         </p:txBody>
       </p:sp>
@@ -14481,6 +13852,10 @@
             <a:tailEnd type="triangle"/>
           </a:ln>
         </p:spPr>
+        <p:txBody>
+          <a:bodyPr/>
+          <a:p/>
+        </p:txBody>
       </p:sp>
       <p:sp>
         <p:nvSpPr>
@@ -14505,6 +13880,10 @@
             <a:tailEnd type="triangle"/>
           </a:ln>
         </p:spPr>
+        <p:txBody>
+          <a:bodyPr/>
+          <a:p/>
+        </p:txBody>
       </p:sp>
       <p:sp>
         <p:nvSpPr>
@@ -14529,6 +13908,10 @@
             <a:tailEnd type="triangle"/>
           </a:ln>
         </p:spPr>
+        <p:txBody>
+          <a:bodyPr/>
+          <a:p/>
+        </p:txBody>
       </p:sp>
       <p:sp>
         <p:nvSpPr>
@@ -14594,6 +13977,10 @@
             <a:tailEnd type="triangle"/>
           </a:ln>
         </p:spPr>
+        <p:txBody>
+          <a:bodyPr/>
+          <a:p/>
+        </p:txBody>
       </p:sp>
       <p:sp>
         <p:nvSpPr>
@@ -14659,6 +14046,10 @@
             <a:tailEnd type="triangle"/>
           </a:ln>
         </p:spPr>
+        <p:txBody>
+          <a:bodyPr/>
+          <a:p/>
+        </p:txBody>
       </p:sp>
       <p:sp>
         <p:nvSpPr>
@@ -14683,6 +14074,10 @@
             <a:tailEnd type="triangle"/>
           </a:ln>
         </p:spPr>
+        <p:txBody>
+          <a:bodyPr/>
+          <a:p/>
+        </p:txBody>
       </p:sp>
       <p:sp>
         <p:nvSpPr>
@@ -14748,6 +14143,10 @@
             <a:tailEnd type="triangle"/>
           </a:ln>
         </p:spPr>
+        <p:txBody>
+          <a:bodyPr/>
+          <a:p/>
+        </p:txBody>
       </p:sp>
       <p:sp>
         <p:nvSpPr>
@@ -14809,6 +14208,10 @@
           </a:solidFill>
           <a:ln/>
         </p:spPr>
+        <p:txBody>
+          <a:bodyPr/>
+          <a:p/>
+        </p:txBody>
       </p:sp>
       <p:sp>
         <p:nvSpPr>
@@ -14871,6 +14274,10 @@
           </a:solidFill>
           <a:ln/>
         </p:spPr>
+        <p:txBody>
+          <a:bodyPr/>
+          <a:p/>
+        </p:txBody>
       </p:sp>
       <p:sp>
         <p:nvSpPr>
@@ -14933,6 +14340,10 @@
           </a:solidFill>
           <a:ln/>
         </p:spPr>
+        <p:txBody>
+          <a:bodyPr/>
+          <a:p/>
+        </p:txBody>
       </p:sp>
       <p:sp>
         <p:nvSpPr>
@@ -15015,6 +14426,10 @@
           </a:solidFill>
           <a:ln/>
         </p:spPr>
+        <p:txBody>
+          <a:bodyPr/>
+          <a:p/>
+        </p:txBody>
       </p:sp>
       <p:sp>
         <p:nvSpPr>
@@ -15097,6 +14512,10 @@
           </a:solidFill>
           <a:ln/>
         </p:spPr>
+        <p:txBody>
+          <a:bodyPr/>
+          <a:p/>
+        </p:txBody>
       </p:sp>
       <p:sp>
         <p:nvSpPr>
@@ -15159,6 +14578,10 @@
           </a:solidFill>
           <a:ln/>
         </p:spPr>
+        <p:txBody>
+          <a:bodyPr/>
+          <a:p/>
+        </p:txBody>
       </p:sp>
       <p:sp>
         <p:nvSpPr>
@@ -15241,6 +14664,10 @@
           </a:solidFill>
           <a:ln/>
         </p:spPr>
+        <p:txBody>
+          <a:bodyPr/>
+          <a:p/>
+        </p:txBody>
       </p:sp>
       <p:sp>
         <p:nvSpPr>
@@ -15303,6 +14730,10 @@
           </a:solidFill>
           <a:ln/>
         </p:spPr>
+        <p:txBody>
+          <a:bodyPr/>
+          <a:p/>
+        </p:txBody>
       </p:sp>
       <p:sp>
         <p:nvSpPr>
@@ -15368,79 +14799,44 @@
       </p:sp>
       <p:sp>
         <p:nvSpPr>
-          <p:cNvPr id="31" name="Text 29"/>
-          <p:cNvSpPr txBox="1"/>
-          <p:nvPr/>
-        </p:nvSpPr>
-        <p:spPr>
-          <a:xfrm>
-            <a:off x="640080" y="6446520"/>
-            <a:ext cx="8686800" cy="292608"/>
-          </a:xfrm>
-          <a:prstGeom prst="rect">
-            <a:avLst/>
-          </a:prstGeom>
-          <a:noFill/>
-          <a:ln/>
-        </p:spPr>
-        <p:txBody>
-          <a:bodyPr wrap="square" lIns="0" tIns="0" rIns="0" bIns="0" rtlCol="0" anchor="ctr"/>
-          <a:lstStyle/>
-          <a:p>
-            <a:pPr algn="l" indent="0" marL="0">
-              <a:buNone/>
-            </a:pPr>
-            <a:r>
-              <a:rPr lang="en-US" sz="900" dirty="0">
-                <a:solidFill>
-                  <a:srgbClr val="5D5D72"/>
-                </a:solidFill>
-                <a:latin typeface="Calibri" pitchFamily="34" charset="0"/>
-                <a:ea typeface="Calibri" pitchFamily="34" charset="-122"/>
-                <a:cs typeface="Calibri" pitchFamily="34" charset="-120"/>
-              </a:rPr>
-              <a:t>Usman Akram  •  COMSATS University Islamabad</a:t>
-            </a:r>
-            <a:endParaRPr lang="en-US" sz="900" dirty="0"/>
-          </a:p>
-        </p:txBody>
-      </p:sp>
-      <p:sp>
-        <p:nvSpPr>
-          <p:cNvPr id="32" name="Text 30"/>
-          <p:cNvSpPr txBox="1"/>
-          <p:nvPr/>
-        </p:nvSpPr>
-        <p:spPr>
-          <a:xfrm>
-            <a:off x="11155680" y="6446520"/>
-            <a:ext cx="457200" cy="292608"/>
-          </a:xfrm>
-          <a:prstGeom prst="rect">
-            <a:avLst/>
-          </a:prstGeom>
-          <a:noFill/>
-          <a:ln/>
-        </p:spPr>
-        <p:txBody>
-          <a:bodyPr wrap="square" lIns="0" tIns="0" rIns="0" bIns="0" rtlCol="0" anchor="ctr"/>
-          <a:lstStyle/>
-          <a:p>
-            <a:pPr algn="r" indent="0" marL="0">
-              <a:buNone/>
-            </a:pPr>
-            <a:r>
-              <a:rPr lang="en-US" sz="900" dirty="0">
-                <a:solidFill>
-                  <a:srgbClr val="5D5D72"/>
-                </a:solidFill>
-                <a:latin typeface="Calibri" pitchFamily="34" charset="0"/>
-                <a:ea typeface="Calibri" pitchFamily="34" charset="-122"/>
-                <a:cs typeface="Calibri" pitchFamily="34" charset="-120"/>
-              </a:rPr>
-              <a:t>30</a:t>
-            </a:r>
-            <a:endParaRPr lang="en-US" sz="900" dirty="0"/>
+          <p:cNvPr id="33" name="cuinotes-footer-mark"/>
+          <p:cNvSpPr txBox="1"/>
+          <p:nvPr/>
+        </p:nvSpPr>
+        <p:spPr>
+          <a:xfrm>
+            <a:off x="9951720" y="6455664"/>
+            <a:ext cx="2011680" cy="292608"/>
+          </a:xfrm>
+          <a:prstGeom prst="rect">
+            <a:avLst/>
+          </a:prstGeom>
+          <a:noFill/>
+        </p:spPr>
+        <p:txBody>
+          <a:bodyPr wrap="none" lIns="0" rIns="0" tIns="0" bIns="0">
+            <a:spAutoFit/>
+          </a:bodyPr>
+          <a:lstStyle/>
+          <a:p>
+            <a:pPr algn="r"/>
+            <a:r>
+              <a:rPr sz="1000">
+                <a:solidFill>
+                  <a:srgbClr val="8A939B"/>
+                </a:solidFill>
+                <a:hlinkClick r:id="rId3"/>
+              </a:rPr>
+              <a:t>cuinotes.com</a:t>
+            </a:r>
+            <a:r>
+              <a:rPr sz="1000">
+                <a:solidFill>
+                  <a:srgbClr val="8A939B"/>
+                </a:solidFill>
+              </a:rPr>
+              <a:t>  ·  30</a:t>
+            </a:r>
           </a:p>
         </p:txBody>
       </p:sp>
@@ -15580,6 +14976,10 @@
             <a:prstDash val="solid"/>
           </a:ln>
         </p:spPr>
+        <p:txBody>
+          <a:bodyPr/>
+          <a:p/>
+        </p:txBody>
       </p:sp>
       <p:sp>
         <p:nvSpPr>
@@ -15661,79 +15061,44 @@
       </p:sp>
       <p:sp>
         <p:nvSpPr>
-          <p:cNvPr id="7" name="Text 5"/>
-          <p:cNvSpPr txBox="1"/>
-          <p:nvPr/>
-        </p:nvSpPr>
-        <p:spPr>
-          <a:xfrm>
-            <a:off x="640080" y="6446520"/>
-            <a:ext cx="8686800" cy="292608"/>
-          </a:xfrm>
-          <a:prstGeom prst="rect">
-            <a:avLst/>
-          </a:prstGeom>
-          <a:noFill/>
-          <a:ln/>
-        </p:spPr>
-        <p:txBody>
-          <a:bodyPr wrap="square" lIns="0" tIns="0" rIns="0" bIns="0" rtlCol="0" anchor="ctr"/>
-          <a:lstStyle/>
-          <a:p>
-            <a:pPr algn="l" indent="0" marL="0">
-              <a:buNone/>
-            </a:pPr>
-            <a:r>
-              <a:rPr lang="en-US" sz="900" dirty="0">
-                <a:solidFill>
-                  <a:srgbClr val="5D5D72"/>
-                </a:solidFill>
-                <a:latin typeface="Calibri" pitchFamily="34" charset="0"/>
-                <a:ea typeface="Calibri" pitchFamily="34" charset="-122"/>
-                <a:cs typeface="Calibri" pitchFamily="34" charset="-120"/>
-              </a:rPr>
-              <a:t>Usman Akram  •  COMSATS University Islamabad</a:t>
-            </a:r>
-            <a:endParaRPr lang="en-US" sz="900" dirty="0"/>
-          </a:p>
-        </p:txBody>
-      </p:sp>
-      <p:sp>
-        <p:nvSpPr>
-          <p:cNvPr id="8" name="Text 6"/>
-          <p:cNvSpPr txBox="1"/>
-          <p:nvPr/>
-        </p:nvSpPr>
-        <p:spPr>
-          <a:xfrm>
-            <a:off x="11155680" y="6446520"/>
-            <a:ext cx="457200" cy="292608"/>
-          </a:xfrm>
-          <a:prstGeom prst="rect">
-            <a:avLst/>
-          </a:prstGeom>
-          <a:noFill/>
-          <a:ln/>
-        </p:spPr>
-        <p:txBody>
-          <a:bodyPr wrap="square" lIns="0" tIns="0" rIns="0" bIns="0" rtlCol="0" anchor="ctr"/>
-          <a:lstStyle/>
-          <a:p>
-            <a:pPr algn="r" indent="0" marL="0">
-              <a:buNone/>
-            </a:pPr>
-            <a:r>
-              <a:rPr lang="en-US" sz="900" dirty="0">
-                <a:solidFill>
-                  <a:srgbClr val="5D5D72"/>
-                </a:solidFill>
-                <a:latin typeface="Calibri" pitchFamily="34" charset="0"/>
-                <a:ea typeface="Calibri" pitchFamily="34" charset="-122"/>
-                <a:cs typeface="Calibri" pitchFamily="34" charset="-120"/>
-              </a:rPr>
-              <a:t>31</a:t>
-            </a:r>
-            <a:endParaRPr lang="en-US" sz="900" dirty="0"/>
+          <p:cNvPr id="9" name="cuinotes-footer-mark"/>
+          <p:cNvSpPr txBox="1"/>
+          <p:nvPr/>
+        </p:nvSpPr>
+        <p:spPr>
+          <a:xfrm>
+            <a:off x="9951720" y="6455664"/>
+            <a:ext cx="2011680" cy="292608"/>
+          </a:xfrm>
+          <a:prstGeom prst="rect">
+            <a:avLst/>
+          </a:prstGeom>
+          <a:noFill/>
+        </p:spPr>
+        <p:txBody>
+          <a:bodyPr wrap="none" lIns="0" rIns="0" tIns="0" bIns="0">
+            <a:spAutoFit/>
+          </a:bodyPr>
+          <a:lstStyle/>
+          <a:p>
+            <a:pPr algn="r"/>
+            <a:r>
+              <a:rPr sz="1000">
+                <a:solidFill>
+                  <a:srgbClr val="8A939B"/>
+                </a:solidFill>
+                <a:hlinkClick r:id="rId3"/>
+              </a:rPr>
+              <a:t>cuinotes.com</a:t>
+            </a:r>
+            <a:r>
+              <a:rPr sz="1000">
+                <a:solidFill>
+                  <a:srgbClr val="8A939B"/>
+                </a:solidFill>
+              </a:rPr>
+              <a:t>  ·  31</a:t>
+            </a:r>
           </a:p>
         </p:txBody>
       </p:sp>
@@ -15866,6 +15231,10 @@
           </a:solidFill>
           <a:ln/>
         </p:spPr>
+        <p:txBody>
+          <a:bodyPr/>
+          <a:p/>
+        </p:txBody>
       </p:sp>
       <p:sp>
         <p:nvSpPr>
@@ -15964,6 +15333,10 @@
           </a:solidFill>
           <a:ln/>
         </p:spPr>
+        <p:txBody>
+          <a:bodyPr/>
+          <a:p/>
+        </p:txBody>
       </p:sp>
       <p:sp>
         <p:nvSpPr>
@@ -16062,6 +15435,10 @@
           </a:solidFill>
           <a:ln/>
         </p:spPr>
+        <p:txBody>
+          <a:bodyPr/>
+          <a:p/>
+        </p:txBody>
       </p:sp>
       <p:sp>
         <p:nvSpPr>
@@ -16160,6 +15537,10 @@
           </a:solidFill>
           <a:ln/>
         </p:spPr>
+        <p:txBody>
+          <a:bodyPr/>
+          <a:p/>
+        </p:txBody>
       </p:sp>
       <p:sp>
         <p:nvSpPr>
@@ -16258,6 +15639,10 @@
           </a:solidFill>
           <a:ln/>
         </p:spPr>
+        <p:txBody>
+          <a:bodyPr/>
+          <a:p/>
+        </p:txBody>
       </p:sp>
       <p:sp>
         <p:nvSpPr>
@@ -16356,6 +15741,10 @@
           </a:solidFill>
           <a:ln/>
         </p:spPr>
+        <p:txBody>
+          <a:bodyPr/>
+          <a:p/>
+        </p:txBody>
       </p:sp>
       <p:sp>
         <p:nvSpPr>
@@ -16437,79 +15826,44 @@
       </p:sp>
       <p:sp>
         <p:nvSpPr>
-          <p:cNvPr id="22" name="Text 20"/>
-          <p:cNvSpPr txBox="1"/>
-          <p:nvPr/>
-        </p:nvSpPr>
-        <p:spPr>
-          <a:xfrm>
-            <a:off x="640080" y="6446520"/>
-            <a:ext cx="8686800" cy="292608"/>
-          </a:xfrm>
-          <a:prstGeom prst="rect">
-            <a:avLst/>
-          </a:prstGeom>
-          <a:noFill/>
-          <a:ln/>
-        </p:spPr>
-        <p:txBody>
-          <a:bodyPr wrap="square" lIns="0" tIns="0" rIns="0" bIns="0" rtlCol="0" anchor="ctr"/>
-          <a:lstStyle/>
-          <a:p>
-            <a:pPr algn="l" indent="0" marL="0">
-              <a:buNone/>
-            </a:pPr>
-            <a:r>
-              <a:rPr lang="en-US" sz="900" dirty="0">
-                <a:solidFill>
-                  <a:srgbClr val="9AA3D8"/>
-                </a:solidFill>
-                <a:latin typeface="Calibri" pitchFamily="34" charset="0"/>
-                <a:ea typeface="Calibri" pitchFamily="34" charset="-122"/>
-                <a:cs typeface="Calibri" pitchFamily="34" charset="-120"/>
-              </a:rPr>
-              <a:t>Usman Akram  •  COMSATS University Islamabad</a:t>
-            </a:r>
-            <a:endParaRPr lang="en-US" sz="900" dirty="0"/>
-          </a:p>
-        </p:txBody>
-      </p:sp>
-      <p:sp>
-        <p:nvSpPr>
-          <p:cNvPr id="23" name="Text 21"/>
-          <p:cNvSpPr txBox="1"/>
-          <p:nvPr/>
-        </p:nvSpPr>
-        <p:spPr>
-          <a:xfrm>
-            <a:off x="11155680" y="6446520"/>
-            <a:ext cx="457200" cy="292608"/>
-          </a:xfrm>
-          <a:prstGeom prst="rect">
-            <a:avLst/>
-          </a:prstGeom>
-          <a:noFill/>
-          <a:ln/>
-        </p:spPr>
-        <p:txBody>
-          <a:bodyPr wrap="square" lIns="0" tIns="0" rIns="0" bIns="0" rtlCol="0" anchor="ctr"/>
-          <a:lstStyle/>
-          <a:p>
-            <a:pPr algn="r" indent="0" marL="0">
-              <a:buNone/>
-            </a:pPr>
-            <a:r>
-              <a:rPr lang="en-US" sz="900" dirty="0">
-                <a:solidFill>
-                  <a:srgbClr val="9AA3D8"/>
-                </a:solidFill>
-                <a:latin typeface="Calibri" pitchFamily="34" charset="0"/>
-                <a:ea typeface="Calibri" pitchFamily="34" charset="-122"/>
-                <a:cs typeface="Calibri" pitchFamily="34" charset="-120"/>
-              </a:rPr>
-              <a:t>32</a:t>
-            </a:r>
-            <a:endParaRPr lang="en-US" sz="900" dirty="0"/>
+          <p:cNvPr id="24" name="cuinotes-footer-mark"/>
+          <p:cNvSpPr txBox="1"/>
+          <p:nvPr/>
+        </p:nvSpPr>
+        <p:spPr>
+          <a:xfrm>
+            <a:off x="9951720" y="6455664"/>
+            <a:ext cx="2011680" cy="292608"/>
+          </a:xfrm>
+          <a:prstGeom prst="rect">
+            <a:avLst/>
+          </a:prstGeom>
+          <a:noFill/>
+        </p:spPr>
+        <p:txBody>
+          <a:bodyPr wrap="none" lIns="0" rIns="0" tIns="0" bIns="0">
+            <a:spAutoFit/>
+          </a:bodyPr>
+          <a:lstStyle/>
+          <a:p>
+            <a:pPr algn="r"/>
+            <a:r>
+              <a:rPr sz="1000">
+                <a:solidFill>
+                  <a:srgbClr val="8A939B"/>
+                </a:solidFill>
+                <a:hlinkClick r:id="rId3"/>
+              </a:rPr>
+              <a:t>cuinotes.com</a:t>
+            </a:r>
+            <a:r>
+              <a:rPr sz="1000">
+                <a:solidFill>
+                  <a:srgbClr val="8A939B"/>
+                </a:solidFill>
+              </a:rPr>
+              <a:t>  ·  32</a:t>
+            </a:r>
           </a:p>
         </p:txBody>
       </p:sp>
@@ -17621,79 +16975,44 @@
       </p:graphicFrame>
       <p:sp>
         <p:nvSpPr>
-          <p:cNvPr id="5" name="Text 2"/>
-          <p:cNvSpPr txBox="1"/>
-          <p:nvPr/>
-        </p:nvSpPr>
-        <p:spPr>
-          <a:xfrm>
-            <a:off x="640080" y="6446520"/>
-            <a:ext cx="8686800" cy="292608"/>
-          </a:xfrm>
-          <a:prstGeom prst="rect">
-            <a:avLst/>
-          </a:prstGeom>
-          <a:noFill/>
-          <a:ln/>
-        </p:spPr>
-        <p:txBody>
-          <a:bodyPr wrap="square" lIns="0" tIns="0" rIns="0" bIns="0" rtlCol="0" anchor="ctr"/>
-          <a:lstStyle/>
-          <a:p>
-            <a:pPr algn="l" indent="0" marL="0">
-              <a:buNone/>
-            </a:pPr>
-            <a:r>
-              <a:rPr lang="en-US" sz="900" dirty="0">
-                <a:solidFill>
-                  <a:srgbClr val="5D5D72"/>
-                </a:solidFill>
-                <a:latin typeface="Calibri" pitchFamily="34" charset="0"/>
-                <a:ea typeface="Calibri" pitchFamily="34" charset="-122"/>
-                <a:cs typeface="Calibri" pitchFamily="34" charset="-120"/>
-              </a:rPr>
-              <a:t>Usman Akram  •  COMSATS University Islamabad</a:t>
-            </a:r>
-            <a:endParaRPr lang="en-US" sz="900" dirty="0"/>
-          </a:p>
-        </p:txBody>
-      </p:sp>
-      <p:sp>
-        <p:nvSpPr>
-          <p:cNvPr id="6" name="Text 3"/>
-          <p:cNvSpPr txBox="1"/>
-          <p:nvPr/>
-        </p:nvSpPr>
-        <p:spPr>
-          <a:xfrm>
-            <a:off x="11155680" y="6446520"/>
-            <a:ext cx="457200" cy="292608"/>
-          </a:xfrm>
-          <a:prstGeom prst="rect">
-            <a:avLst/>
-          </a:prstGeom>
-          <a:noFill/>
-          <a:ln/>
-        </p:spPr>
-        <p:txBody>
-          <a:bodyPr wrap="square" lIns="0" tIns="0" rIns="0" bIns="0" rtlCol="0" anchor="ctr"/>
-          <a:lstStyle/>
-          <a:p>
-            <a:pPr algn="r" indent="0" marL="0">
-              <a:buNone/>
-            </a:pPr>
-            <a:r>
-              <a:rPr lang="en-US" sz="900" dirty="0">
-                <a:solidFill>
-                  <a:srgbClr val="5D5D72"/>
-                </a:solidFill>
-                <a:latin typeface="Calibri" pitchFamily="34" charset="0"/>
-                <a:ea typeface="Calibri" pitchFamily="34" charset="-122"/>
-                <a:cs typeface="Calibri" pitchFamily="34" charset="-120"/>
-              </a:rPr>
-              <a:t>4</a:t>
-            </a:r>
-            <a:endParaRPr lang="en-US" sz="900" dirty="0"/>
+          <p:cNvPr id="7" name="cuinotes-footer-mark"/>
+          <p:cNvSpPr txBox="1"/>
+          <p:nvPr/>
+        </p:nvSpPr>
+        <p:spPr>
+          <a:xfrm>
+            <a:off x="9951720" y="6455664"/>
+            <a:ext cx="2011680" cy="292608"/>
+          </a:xfrm>
+          <a:prstGeom prst="rect">
+            <a:avLst/>
+          </a:prstGeom>
+          <a:noFill/>
+        </p:spPr>
+        <p:txBody>
+          <a:bodyPr wrap="none" lIns="0" rIns="0" tIns="0" bIns="0">
+            <a:spAutoFit/>
+          </a:bodyPr>
+          <a:lstStyle/>
+          <a:p>
+            <a:pPr algn="r"/>
+            <a:r>
+              <a:rPr sz="1000">
+                <a:solidFill>
+                  <a:srgbClr val="8A939B"/>
+                </a:solidFill>
+                <a:hlinkClick r:id="rId3"/>
+              </a:rPr>
+              <a:t>cuinotes.com</a:t>
+            </a:r>
+            <a:r>
+              <a:rPr sz="1000">
+                <a:solidFill>
+                  <a:srgbClr val="8A939B"/>
+                </a:solidFill>
+              </a:rPr>
+              <a:t>  ·  4</a:t>
+            </a:r>
           </a:p>
         </p:txBody>
       </p:sp>
@@ -17826,6 +17145,10 @@
           </a:solidFill>
           <a:ln/>
         </p:spPr>
+        <p:txBody>
+          <a:bodyPr/>
+          <a:p/>
+        </p:txBody>
       </p:sp>
       <p:sp>
         <p:nvSpPr>
@@ -17924,6 +17247,10 @@
           </a:solidFill>
           <a:ln/>
         </p:spPr>
+        <p:txBody>
+          <a:bodyPr/>
+          <a:p/>
+        </p:txBody>
       </p:sp>
       <p:sp>
         <p:nvSpPr>
@@ -18005,79 +17332,44 @@
       </p:sp>
       <p:sp>
         <p:nvSpPr>
-          <p:cNvPr id="10" name="Text 8"/>
-          <p:cNvSpPr txBox="1"/>
-          <p:nvPr/>
-        </p:nvSpPr>
-        <p:spPr>
-          <a:xfrm>
-            <a:off x="640080" y="6446520"/>
-            <a:ext cx="8686800" cy="292608"/>
-          </a:xfrm>
-          <a:prstGeom prst="rect">
-            <a:avLst/>
-          </a:prstGeom>
-          <a:noFill/>
-          <a:ln/>
-        </p:spPr>
-        <p:txBody>
-          <a:bodyPr wrap="square" lIns="0" tIns="0" rIns="0" bIns="0" rtlCol="0" anchor="ctr"/>
-          <a:lstStyle/>
-          <a:p>
-            <a:pPr algn="l" indent="0" marL="0">
-              <a:buNone/>
-            </a:pPr>
-            <a:r>
-              <a:rPr lang="en-US" sz="900" dirty="0">
-                <a:solidFill>
-                  <a:srgbClr val="5D5D72"/>
-                </a:solidFill>
-                <a:latin typeface="Calibri" pitchFamily="34" charset="0"/>
-                <a:ea typeface="Calibri" pitchFamily="34" charset="-122"/>
-                <a:cs typeface="Calibri" pitchFamily="34" charset="-120"/>
-              </a:rPr>
-              <a:t>Usman Akram  •  COMSATS University Islamabad</a:t>
-            </a:r>
-            <a:endParaRPr lang="en-US" sz="900" dirty="0"/>
-          </a:p>
-        </p:txBody>
-      </p:sp>
-      <p:sp>
-        <p:nvSpPr>
-          <p:cNvPr id="11" name="Text 9"/>
-          <p:cNvSpPr txBox="1"/>
-          <p:nvPr/>
-        </p:nvSpPr>
-        <p:spPr>
-          <a:xfrm>
-            <a:off x="11155680" y="6446520"/>
-            <a:ext cx="457200" cy="292608"/>
-          </a:xfrm>
-          <a:prstGeom prst="rect">
-            <a:avLst/>
-          </a:prstGeom>
-          <a:noFill/>
-          <a:ln/>
-        </p:spPr>
-        <p:txBody>
-          <a:bodyPr wrap="square" lIns="0" tIns="0" rIns="0" bIns="0" rtlCol="0" anchor="ctr"/>
-          <a:lstStyle/>
-          <a:p>
-            <a:pPr algn="r" indent="0" marL="0">
-              <a:buNone/>
-            </a:pPr>
-            <a:r>
-              <a:rPr lang="en-US" sz="900" dirty="0">
-                <a:solidFill>
-                  <a:srgbClr val="5D5D72"/>
-                </a:solidFill>
-                <a:latin typeface="Calibri" pitchFamily="34" charset="0"/>
-                <a:ea typeface="Calibri" pitchFamily="34" charset="-122"/>
-                <a:cs typeface="Calibri" pitchFamily="34" charset="-120"/>
-              </a:rPr>
-              <a:t>5</a:t>
-            </a:r>
-            <a:endParaRPr lang="en-US" sz="900" dirty="0"/>
+          <p:cNvPr id="12" name="cuinotes-footer-mark"/>
+          <p:cNvSpPr txBox="1"/>
+          <p:nvPr/>
+        </p:nvSpPr>
+        <p:spPr>
+          <a:xfrm>
+            <a:off x="9951720" y="6455664"/>
+            <a:ext cx="2011680" cy="292608"/>
+          </a:xfrm>
+          <a:prstGeom prst="rect">
+            <a:avLst/>
+          </a:prstGeom>
+          <a:noFill/>
+        </p:spPr>
+        <p:txBody>
+          <a:bodyPr wrap="none" lIns="0" rIns="0" tIns="0" bIns="0">
+            <a:spAutoFit/>
+          </a:bodyPr>
+          <a:lstStyle/>
+          <a:p>
+            <a:pPr algn="r"/>
+            <a:r>
+              <a:rPr sz="1000">
+                <a:solidFill>
+                  <a:srgbClr val="8A939B"/>
+                </a:solidFill>
+                <a:hlinkClick r:id="rId3"/>
+              </a:rPr>
+              <a:t>cuinotes.com</a:t>
+            </a:r>
+            <a:r>
+              <a:rPr sz="1000">
+                <a:solidFill>
+                  <a:srgbClr val="8A939B"/>
+                </a:solidFill>
+              </a:rPr>
+              <a:t>  ·  5</a:t>
+            </a:r>
           </a:p>
         </p:txBody>
       </p:sp>
@@ -19460,79 +18752,44 @@
       </p:graphicFrame>
       <p:sp>
         <p:nvSpPr>
-          <p:cNvPr id="5" name="Text 2"/>
-          <p:cNvSpPr txBox="1"/>
-          <p:nvPr/>
-        </p:nvSpPr>
-        <p:spPr>
-          <a:xfrm>
-            <a:off x="640080" y="6446520"/>
-            <a:ext cx="8686800" cy="292608"/>
-          </a:xfrm>
-          <a:prstGeom prst="rect">
-            <a:avLst/>
-          </a:prstGeom>
-          <a:noFill/>
-          <a:ln/>
-        </p:spPr>
-        <p:txBody>
-          <a:bodyPr wrap="square" lIns="0" tIns="0" rIns="0" bIns="0" rtlCol="0" anchor="ctr"/>
-          <a:lstStyle/>
-          <a:p>
-            <a:pPr algn="l" indent="0" marL="0">
-              <a:buNone/>
-            </a:pPr>
-            <a:r>
-              <a:rPr lang="en-US" sz="900" dirty="0">
-                <a:solidFill>
-                  <a:srgbClr val="5D5D72"/>
-                </a:solidFill>
-                <a:latin typeface="Calibri" pitchFamily="34" charset="0"/>
-                <a:ea typeface="Calibri" pitchFamily="34" charset="-122"/>
-                <a:cs typeface="Calibri" pitchFamily="34" charset="-120"/>
-              </a:rPr>
-              <a:t>Usman Akram  •  COMSATS University Islamabad</a:t>
-            </a:r>
-            <a:endParaRPr lang="en-US" sz="900" dirty="0"/>
-          </a:p>
-        </p:txBody>
-      </p:sp>
-      <p:sp>
-        <p:nvSpPr>
-          <p:cNvPr id="6" name="Text 3"/>
-          <p:cNvSpPr txBox="1"/>
-          <p:nvPr/>
-        </p:nvSpPr>
-        <p:spPr>
-          <a:xfrm>
-            <a:off x="11155680" y="6446520"/>
-            <a:ext cx="457200" cy="292608"/>
-          </a:xfrm>
-          <a:prstGeom prst="rect">
-            <a:avLst/>
-          </a:prstGeom>
-          <a:noFill/>
-          <a:ln/>
-        </p:spPr>
-        <p:txBody>
-          <a:bodyPr wrap="square" lIns="0" tIns="0" rIns="0" bIns="0" rtlCol="0" anchor="ctr"/>
-          <a:lstStyle/>
-          <a:p>
-            <a:pPr algn="r" indent="0" marL="0">
-              <a:buNone/>
-            </a:pPr>
-            <a:r>
-              <a:rPr lang="en-US" sz="900" dirty="0">
-                <a:solidFill>
-                  <a:srgbClr val="5D5D72"/>
-                </a:solidFill>
-                <a:latin typeface="Calibri" pitchFamily="34" charset="0"/>
-                <a:ea typeface="Calibri" pitchFamily="34" charset="-122"/>
-                <a:cs typeface="Calibri" pitchFamily="34" charset="-120"/>
-              </a:rPr>
-              <a:t>6</a:t>
-            </a:r>
-            <a:endParaRPr lang="en-US" sz="900" dirty="0"/>
+          <p:cNvPr id="8" name="cuinotes-footer-mark"/>
+          <p:cNvSpPr txBox="1"/>
+          <p:nvPr/>
+        </p:nvSpPr>
+        <p:spPr>
+          <a:xfrm>
+            <a:off x="9951720" y="6455664"/>
+            <a:ext cx="2011680" cy="292608"/>
+          </a:xfrm>
+          <a:prstGeom prst="rect">
+            <a:avLst/>
+          </a:prstGeom>
+          <a:noFill/>
+        </p:spPr>
+        <p:txBody>
+          <a:bodyPr wrap="none" lIns="0" rIns="0" tIns="0" bIns="0">
+            <a:spAutoFit/>
+          </a:bodyPr>
+          <a:lstStyle/>
+          <a:p>
+            <a:pPr algn="r"/>
+            <a:r>
+              <a:rPr sz="1000">
+                <a:solidFill>
+                  <a:srgbClr val="8A939B"/>
+                </a:solidFill>
+                <a:hlinkClick r:id="rId3"/>
+              </a:rPr>
+              <a:t>cuinotes.com</a:t>
+            </a:r>
+            <a:r>
+              <a:rPr sz="1000">
+                <a:solidFill>
+                  <a:srgbClr val="8A939B"/>
+                </a:solidFill>
+              </a:rPr>
+              <a:t>  ·  6</a:t>
+            </a:r>
           </a:p>
         </p:txBody>
       </p:sp>
@@ -19667,6 +18924,10 @@
           </a:solidFill>
           <a:ln/>
         </p:spPr>
+        <p:txBody>
+          <a:bodyPr/>
+          <a:p/>
+        </p:txBody>
       </p:sp>
       <p:sp>
         <p:nvSpPr>
@@ -19861,79 +19122,44 @@
       </p:sp>
       <p:sp>
         <p:nvSpPr>
-          <p:cNvPr id="6" name="Text 4"/>
-          <p:cNvSpPr txBox="1"/>
-          <p:nvPr/>
-        </p:nvSpPr>
-        <p:spPr>
-          <a:xfrm>
-            <a:off x="640080" y="6446520"/>
-            <a:ext cx="8686800" cy="292608"/>
-          </a:xfrm>
-          <a:prstGeom prst="rect">
-            <a:avLst/>
-          </a:prstGeom>
-          <a:noFill/>
-          <a:ln/>
-        </p:spPr>
-        <p:txBody>
-          <a:bodyPr wrap="square" lIns="0" tIns="0" rIns="0" bIns="0" rtlCol="0" anchor="ctr"/>
-          <a:lstStyle/>
-          <a:p>
-            <a:pPr algn="l" indent="0" marL="0">
-              <a:buNone/>
-            </a:pPr>
-            <a:r>
-              <a:rPr lang="en-US" sz="900" dirty="0">
-                <a:solidFill>
-                  <a:srgbClr val="5D5D72"/>
-                </a:solidFill>
-                <a:latin typeface="Calibri" pitchFamily="34" charset="0"/>
-                <a:ea typeface="Calibri" pitchFamily="34" charset="-122"/>
-                <a:cs typeface="Calibri" pitchFamily="34" charset="-120"/>
-              </a:rPr>
-              <a:t>Usman Akram  •  COMSATS University Islamabad</a:t>
-            </a:r>
-            <a:endParaRPr lang="en-US" sz="900" dirty="0"/>
-          </a:p>
-        </p:txBody>
-      </p:sp>
-      <p:sp>
-        <p:nvSpPr>
-          <p:cNvPr id="7" name="Text 5"/>
-          <p:cNvSpPr txBox="1"/>
-          <p:nvPr/>
-        </p:nvSpPr>
-        <p:spPr>
-          <a:xfrm>
-            <a:off x="11155680" y="6446520"/>
-            <a:ext cx="457200" cy="292608"/>
-          </a:xfrm>
-          <a:prstGeom prst="rect">
-            <a:avLst/>
-          </a:prstGeom>
-          <a:noFill/>
-          <a:ln/>
-        </p:spPr>
-        <p:txBody>
-          <a:bodyPr wrap="square" lIns="0" tIns="0" rIns="0" bIns="0" rtlCol="0" anchor="ctr"/>
-          <a:lstStyle/>
-          <a:p>
-            <a:pPr algn="r" indent="0" marL="0">
-              <a:buNone/>
-            </a:pPr>
-            <a:r>
-              <a:rPr lang="en-US" sz="900" dirty="0">
-                <a:solidFill>
-                  <a:srgbClr val="5D5D72"/>
-                </a:solidFill>
-                <a:latin typeface="Calibri" pitchFamily="34" charset="0"/>
-                <a:ea typeface="Calibri" pitchFamily="34" charset="-122"/>
-                <a:cs typeface="Calibri" pitchFamily="34" charset="-120"/>
-              </a:rPr>
-              <a:t>7</a:t>
-            </a:r>
-            <a:endParaRPr lang="en-US" sz="900" dirty="0"/>
+          <p:cNvPr id="8" name="cuinotes-footer-mark"/>
+          <p:cNvSpPr txBox="1"/>
+          <p:nvPr/>
+        </p:nvSpPr>
+        <p:spPr>
+          <a:xfrm>
+            <a:off x="9951720" y="6455664"/>
+            <a:ext cx="2011680" cy="292608"/>
+          </a:xfrm>
+          <a:prstGeom prst="rect">
+            <a:avLst/>
+          </a:prstGeom>
+          <a:noFill/>
+        </p:spPr>
+        <p:txBody>
+          <a:bodyPr wrap="none" lIns="0" rIns="0" tIns="0" bIns="0">
+            <a:spAutoFit/>
+          </a:bodyPr>
+          <a:lstStyle/>
+          <a:p>
+            <a:pPr algn="r"/>
+            <a:r>
+              <a:rPr sz="1000">
+                <a:solidFill>
+                  <a:srgbClr val="8A939B"/>
+                </a:solidFill>
+                <a:hlinkClick r:id="rId3"/>
+              </a:rPr>
+              <a:t>cuinotes.com</a:t>
+            </a:r>
+            <a:r>
+              <a:rPr sz="1000">
+                <a:solidFill>
+                  <a:srgbClr val="8A939B"/>
+                </a:solidFill>
+              </a:rPr>
+              <a:t>  ·  7</a:t>
+            </a:r>
           </a:p>
         </p:txBody>
       </p:sp>
@@ -20073,6 +19299,10 @@
             <a:prstDash val="solid"/>
           </a:ln>
         </p:spPr>
+        <p:txBody>
+          <a:bodyPr/>
+          <a:p/>
+        </p:txBody>
       </p:sp>
       <p:sp>
         <p:nvSpPr>
@@ -20154,79 +19384,44 @@
       </p:sp>
       <p:sp>
         <p:nvSpPr>
-          <p:cNvPr id="7" name="Text 5"/>
-          <p:cNvSpPr txBox="1"/>
-          <p:nvPr/>
-        </p:nvSpPr>
-        <p:spPr>
-          <a:xfrm>
-            <a:off x="640080" y="6446520"/>
-            <a:ext cx="8686800" cy="292608"/>
-          </a:xfrm>
-          <a:prstGeom prst="rect">
-            <a:avLst/>
-          </a:prstGeom>
-          <a:noFill/>
-          <a:ln/>
-        </p:spPr>
-        <p:txBody>
-          <a:bodyPr wrap="square" lIns="0" tIns="0" rIns="0" bIns="0" rtlCol="0" anchor="ctr"/>
-          <a:lstStyle/>
-          <a:p>
-            <a:pPr algn="l" indent="0" marL="0">
-              <a:buNone/>
-            </a:pPr>
-            <a:r>
-              <a:rPr lang="en-US" sz="900" dirty="0">
-                <a:solidFill>
-                  <a:srgbClr val="5D5D72"/>
-                </a:solidFill>
-                <a:latin typeface="Calibri" pitchFamily="34" charset="0"/>
-                <a:ea typeface="Calibri" pitchFamily="34" charset="-122"/>
-                <a:cs typeface="Calibri" pitchFamily="34" charset="-120"/>
-              </a:rPr>
-              <a:t>Usman Akram  •  COMSATS University Islamabad</a:t>
-            </a:r>
-            <a:endParaRPr lang="en-US" sz="900" dirty="0"/>
-          </a:p>
-        </p:txBody>
-      </p:sp>
-      <p:sp>
-        <p:nvSpPr>
-          <p:cNvPr id="8" name="Text 6"/>
-          <p:cNvSpPr txBox="1"/>
-          <p:nvPr/>
-        </p:nvSpPr>
-        <p:spPr>
-          <a:xfrm>
-            <a:off x="11155680" y="6446520"/>
-            <a:ext cx="457200" cy="292608"/>
-          </a:xfrm>
-          <a:prstGeom prst="rect">
-            <a:avLst/>
-          </a:prstGeom>
-          <a:noFill/>
-          <a:ln/>
-        </p:spPr>
-        <p:txBody>
-          <a:bodyPr wrap="square" lIns="0" tIns="0" rIns="0" bIns="0" rtlCol="0" anchor="ctr"/>
-          <a:lstStyle/>
-          <a:p>
-            <a:pPr algn="r" indent="0" marL="0">
-              <a:buNone/>
-            </a:pPr>
-            <a:r>
-              <a:rPr lang="en-US" sz="900" dirty="0">
-                <a:solidFill>
-                  <a:srgbClr val="5D5D72"/>
-                </a:solidFill>
-                <a:latin typeface="Calibri" pitchFamily="34" charset="0"/>
-                <a:ea typeface="Calibri" pitchFamily="34" charset="-122"/>
-                <a:cs typeface="Calibri" pitchFamily="34" charset="-120"/>
-              </a:rPr>
-              <a:t>8</a:t>
-            </a:r>
-            <a:endParaRPr lang="en-US" sz="900" dirty="0"/>
+          <p:cNvPr id="9" name="cuinotes-footer-mark"/>
+          <p:cNvSpPr txBox="1"/>
+          <p:nvPr/>
+        </p:nvSpPr>
+        <p:spPr>
+          <a:xfrm>
+            <a:off x="9951720" y="6455664"/>
+            <a:ext cx="2011680" cy="292608"/>
+          </a:xfrm>
+          <a:prstGeom prst="rect">
+            <a:avLst/>
+          </a:prstGeom>
+          <a:noFill/>
+        </p:spPr>
+        <p:txBody>
+          <a:bodyPr wrap="none" lIns="0" rIns="0" tIns="0" bIns="0">
+            <a:spAutoFit/>
+          </a:bodyPr>
+          <a:lstStyle/>
+          <a:p>
+            <a:pPr algn="r"/>
+            <a:r>
+              <a:rPr sz="1000">
+                <a:solidFill>
+                  <a:srgbClr val="8A939B"/>
+                </a:solidFill>
+                <a:hlinkClick r:id="rId3"/>
+              </a:rPr>
+              <a:t>cuinotes.com</a:t>
+            </a:r>
+            <a:r>
+              <a:rPr sz="1000">
+                <a:solidFill>
+                  <a:srgbClr val="8A939B"/>
+                </a:solidFill>
+              </a:rPr>
+              <a:t>  ·  8</a:t>
+            </a:r>
           </a:p>
         </p:txBody>
       </p:sp>
@@ -20366,6 +19561,10 @@
             <a:prstDash val="solid"/>
           </a:ln>
         </p:spPr>
+        <p:txBody>
+          <a:bodyPr/>
+          <a:p/>
+        </p:txBody>
       </p:sp>
       <p:sp>
         <p:nvSpPr>
@@ -20447,79 +19646,44 @@
       </p:sp>
       <p:sp>
         <p:nvSpPr>
-          <p:cNvPr id="7" name="Text 5"/>
-          <p:cNvSpPr txBox="1"/>
-          <p:nvPr/>
-        </p:nvSpPr>
-        <p:spPr>
-          <a:xfrm>
-            <a:off x="640080" y="6446520"/>
-            <a:ext cx="8686800" cy="292608"/>
-          </a:xfrm>
-          <a:prstGeom prst="rect">
-            <a:avLst/>
-          </a:prstGeom>
-          <a:noFill/>
-          <a:ln/>
-        </p:spPr>
-        <p:txBody>
-          <a:bodyPr wrap="square" lIns="0" tIns="0" rIns="0" bIns="0" rtlCol="0" anchor="ctr"/>
-          <a:lstStyle/>
-          <a:p>
-            <a:pPr algn="l" indent="0" marL="0">
-              <a:buNone/>
-            </a:pPr>
-            <a:r>
-              <a:rPr lang="en-US" sz="900" dirty="0">
-                <a:solidFill>
-                  <a:srgbClr val="5D5D72"/>
-                </a:solidFill>
-                <a:latin typeface="Calibri" pitchFamily="34" charset="0"/>
-                <a:ea typeface="Calibri" pitchFamily="34" charset="-122"/>
-                <a:cs typeface="Calibri" pitchFamily="34" charset="-120"/>
-              </a:rPr>
-              <a:t>Usman Akram  •  COMSATS University Islamabad</a:t>
-            </a:r>
-            <a:endParaRPr lang="en-US" sz="900" dirty="0"/>
-          </a:p>
-        </p:txBody>
-      </p:sp>
-      <p:sp>
-        <p:nvSpPr>
-          <p:cNvPr id="8" name="Text 6"/>
-          <p:cNvSpPr txBox="1"/>
-          <p:nvPr/>
-        </p:nvSpPr>
-        <p:spPr>
-          <a:xfrm>
-            <a:off x="11155680" y="6446520"/>
-            <a:ext cx="457200" cy="292608"/>
-          </a:xfrm>
-          <a:prstGeom prst="rect">
-            <a:avLst/>
-          </a:prstGeom>
-          <a:noFill/>
-          <a:ln/>
-        </p:spPr>
-        <p:txBody>
-          <a:bodyPr wrap="square" lIns="0" tIns="0" rIns="0" bIns="0" rtlCol="0" anchor="ctr"/>
-          <a:lstStyle/>
-          <a:p>
-            <a:pPr algn="r" indent="0" marL="0">
-              <a:buNone/>
-            </a:pPr>
-            <a:r>
-              <a:rPr lang="en-US" sz="900" dirty="0">
-                <a:solidFill>
-                  <a:srgbClr val="5D5D72"/>
-                </a:solidFill>
-                <a:latin typeface="Calibri" pitchFamily="34" charset="0"/>
-                <a:ea typeface="Calibri" pitchFamily="34" charset="-122"/>
-                <a:cs typeface="Calibri" pitchFamily="34" charset="-120"/>
-              </a:rPr>
-              <a:t>9</a:t>
-            </a:r>
-            <a:endParaRPr lang="en-US" sz="900" dirty="0"/>
+          <p:cNvPr id="9" name="cuinotes-footer-mark"/>
+          <p:cNvSpPr txBox="1"/>
+          <p:nvPr/>
+        </p:nvSpPr>
+        <p:spPr>
+          <a:xfrm>
+            <a:off x="9951720" y="6455664"/>
+            <a:ext cx="2011680" cy="292608"/>
+          </a:xfrm>
+          <a:prstGeom prst="rect">
+            <a:avLst/>
+          </a:prstGeom>
+          <a:noFill/>
+        </p:spPr>
+        <p:txBody>
+          <a:bodyPr wrap="none" lIns="0" rIns="0" tIns="0" bIns="0">
+            <a:spAutoFit/>
+          </a:bodyPr>
+          <a:lstStyle/>
+          <a:p>
+            <a:pPr algn="r"/>
+            <a:r>
+              <a:rPr sz="1000">
+                <a:solidFill>
+                  <a:srgbClr val="8A939B"/>
+                </a:solidFill>
+                <a:hlinkClick r:id="rId3"/>
+              </a:rPr>
+              <a:t>cuinotes.com</a:t>
+            </a:r>
+            <a:r>
+              <a:rPr sz="1000">
+                <a:solidFill>
+                  <a:srgbClr val="8A939B"/>
+                </a:solidFill>
+              </a:rPr>
+              <a:t>  ·  9</a:t>
+            </a:r>
           </a:p>
         </p:txBody>
       </p:sp>

--- a/slides/CSC336-Lecture-18-Request-Handling-and-Routing.pptx
+++ b/slides/CSC336-Lecture-18-Request-Handling-and-Routing.pptx
@@ -4442,9 +4442,13 @@
             </a:avLst>
           </a:prstGeom>
           <a:solidFill>
-            <a:srgbClr val="1E1E4C"/>
+            <a:srgbClr val="F7F8F9"/>
           </a:solidFill>
-          <a:ln/>
+          <a:ln w="9525">
+            <a:solidFill>
+              <a:srgbClr val="D0D5DD"/>
+            </a:solidFill>
+          </a:ln>
         </p:spPr>
         <p:txBody>
           <a:bodyPr/>
@@ -4481,7 +4485,7 @@
             <a:r>
               <a:rPr lang="en-US" sz="1300" dirty="0">
                 <a:solidFill>
-                  <a:srgbClr val="C9D3F5"/>
+                  <a:srgbClr val="1F2429"/>
                 </a:solidFill>
                 <a:latin typeface="Courier New" pitchFamily="34" charset="0"/>
                 <a:ea typeface="Courier New" pitchFamily="34" charset="-122"/>
@@ -4501,7 +4505,7 @@
             <a:r>
               <a:rPr lang="en-US" sz="1300" dirty="0">
                 <a:solidFill>
-                  <a:srgbClr val="C9D3F5"/>
+                  <a:srgbClr val="1F2429"/>
                 </a:solidFill>
                 <a:latin typeface="Courier New" pitchFamily="34" charset="0"/>
                 <a:ea typeface="Courier New" pitchFamily="34" charset="-122"/>
@@ -4521,7 +4525,7 @@
             <a:r>
               <a:rPr lang="en-US" sz="1300" dirty="0">
                 <a:solidFill>
-                  <a:srgbClr val="C9D3F5"/>
+                  <a:srgbClr val="1F2429"/>
                 </a:solidFill>
                 <a:latin typeface="Courier New" pitchFamily="34" charset="0"/>
                 <a:ea typeface="Courier New" pitchFamily="34" charset="-122"/>
@@ -4541,7 +4545,7 @@
             <a:r>
               <a:rPr lang="en-US" sz="1300" dirty="0">
                 <a:solidFill>
-                  <a:srgbClr val="C9D3F5"/>
+                  <a:srgbClr val="1F2429"/>
                 </a:solidFill>
                 <a:latin typeface="Courier New" pitchFamily="34" charset="0"/>
                 <a:ea typeface="Courier New" pitchFamily="34" charset="-122"/>
@@ -4561,7 +4565,7 @@
             <a:r>
               <a:rPr lang="en-US" sz="1300" dirty="0">
                 <a:solidFill>
-                  <a:srgbClr val="C9D3F5"/>
+                  <a:srgbClr val="1F2429"/>
                 </a:solidFill>
                 <a:latin typeface="Courier New" pitchFamily="34" charset="0"/>
                 <a:ea typeface="Courier New" pitchFamily="34" charset="-122"/>
@@ -4581,7 +4585,7 @@
             <a:r>
               <a:rPr lang="en-US" sz="1300" dirty="0">
                 <a:solidFill>
-                  <a:srgbClr val="C9D3F5"/>
+                  <a:srgbClr val="1F2429"/>
                 </a:solidFill>
                 <a:latin typeface="Courier New" pitchFamily="34" charset="0"/>
                 <a:ea typeface="Courier New" pitchFamily="34" charset="-122"/>
@@ -4601,7 +4605,7 @@
             <a:r>
               <a:rPr lang="en-US" sz="1300" dirty="0">
                 <a:solidFill>
-                  <a:srgbClr val="C9D3F5"/>
+                  <a:srgbClr val="1F2429"/>
                 </a:solidFill>
                 <a:latin typeface="Courier New" pitchFamily="34" charset="0"/>
                 <a:ea typeface="Courier New" pitchFamily="34" charset="-122"/>
@@ -4621,7 +4625,7 @@
             <a:r>
               <a:rPr lang="en-US" sz="1300" dirty="0">
                 <a:solidFill>
-                  <a:srgbClr val="C9D3F5"/>
+                  <a:srgbClr val="1F2429"/>
                 </a:solidFill>
                 <a:latin typeface="Courier New" pitchFamily="34" charset="0"/>
                 <a:ea typeface="Courier New" pitchFamily="34" charset="-122"/>
@@ -4641,7 +4645,7 @@
             <a:r>
               <a:rPr lang="en-US" sz="1300" dirty="0">
                 <a:solidFill>
-                  <a:srgbClr val="C9D3F5"/>
+                  <a:srgbClr val="1F2429"/>
                 </a:solidFill>
                 <a:latin typeface="Courier New" pitchFamily="34" charset="0"/>
                 <a:ea typeface="Courier New" pitchFamily="34" charset="-122"/>
@@ -4661,7 +4665,7 @@
             <a:r>
               <a:rPr lang="en-US" sz="1300" dirty="0">
                 <a:solidFill>
-                  <a:srgbClr val="C9D3F5"/>
+                  <a:srgbClr val="1F2429"/>
                 </a:solidFill>
                 <a:latin typeface="Courier New" pitchFamily="34" charset="0"/>
                 <a:ea typeface="Courier New" pitchFamily="34" charset="-122"/>
@@ -4905,9 +4909,13 @@
             </a:avLst>
           </a:prstGeom>
           <a:solidFill>
-            <a:srgbClr val="1E1E4C"/>
+            <a:srgbClr val="F7F8F9"/>
           </a:solidFill>
-          <a:ln/>
+          <a:ln w="9525">
+            <a:solidFill>
+              <a:srgbClr val="D0D5DD"/>
+            </a:solidFill>
+          </a:ln>
         </p:spPr>
         <p:txBody>
           <a:bodyPr/>
@@ -4944,7 +4952,7 @@
             <a:r>
               <a:rPr lang="en-US" sz="1400" dirty="0">
                 <a:solidFill>
-                  <a:srgbClr val="C9D3F5"/>
+                  <a:srgbClr val="1F2429"/>
                 </a:solidFill>
                 <a:latin typeface="Courier New" pitchFamily="34" charset="0"/>
                 <a:ea typeface="Courier New" pitchFamily="34" charset="-122"/>
@@ -4964,7 +4972,7 @@
             <a:r>
               <a:rPr lang="en-US" sz="1400" dirty="0">
                 <a:solidFill>
-                  <a:srgbClr val="C9D3F5"/>
+                  <a:srgbClr val="1F2429"/>
                 </a:solidFill>
                 <a:latin typeface="Courier New" pitchFamily="34" charset="0"/>
                 <a:ea typeface="Courier New" pitchFamily="34" charset="-122"/>
@@ -4984,7 +4992,7 @@
             <a:r>
               <a:rPr lang="en-US" sz="1400" dirty="0">
                 <a:solidFill>
-                  <a:srgbClr val="C9D3F5"/>
+                  <a:srgbClr val="1F2429"/>
                 </a:solidFill>
                 <a:latin typeface="Courier New" pitchFamily="34" charset="0"/>
                 <a:ea typeface="Courier New" pitchFamily="34" charset="-122"/>
@@ -5004,7 +5012,7 @@
             <a:r>
               <a:rPr lang="en-US" sz="1400" dirty="0">
                 <a:solidFill>
-                  <a:srgbClr val="C9D3F5"/>
+                  <a:srgbClr val="1F2429"/>
                 </a:solidFill>
                 <a:latin typeface="Courier New" pitchFamily="34" charset="0"/>
                 <a:ea typeface="Courier New" pitchFamily="34" charset="-122"/>
@@ -5024,7 +5032,7 @@
             <a:r>
               <a:rPr lang="en-US" sz="1400" dirty="0">
                 <a:solidFill>
-                  <a:srgbClr val="C9D3F5"/>
+                  <a:srgbClr val="1F2429"/>
                 </a:solidFill>
                 <a:latin typeface="Courier New" pitchFamily="34" charset="0"/>
                 <a:ea typeface="Courier New" pitchFamily="34" charset="-122"/>
@@ -5206,9 +5214,13 @@
             </a:avLst>
           </a:prstGeom>
           <a:solidFill>
-            <a:srgbClr val="1E1E4C"/>
+            <a:srgbClr val="F7F8F9"/>
           </a:solidFill>
-          <a:ln/>
+          <a:ln w="9525">
+            <a:solidFill>
+              <a:srgbClr val="D0D5DD"/>
+            </a:solidFill>
+          </a:ln>
         </p:spPr>
         <p:txBody>
           <a:bodyPr/>
@@ -5245,7 +5257,7 @@
             <a:r>
               <a:rPr lang="en-US" sz="1400" dirty="0">
                 <a:solidFill>
-                  <a:srgbClr val="C9D3F5"/>
+                  <a:srgbClr val="1F2429"/>
                 </a:solidFill>
                 <a:latin typeface="Courier New" pitchFamily="34" charset="0"/>
                 <a:ea typeface="Courier New" pitchFamily="34" charset="-122"/>
@@ -5265,7 +5277,7 @@
             <a:r>
               <a:rPr lang="en-US" sz="1400" dirty="0">
                 <a:solidFill>
-                  <a:srgbClr val="C9D3F5"/>
+                  <a:srgbClr val="1F2429"/>
                 </a:solidFill>
                 <a:latin typeface="Courier New" pitchFamily="34" charset="0"/>
                 <a:ea typeface="Courier New" pitchFamily="34" charset="-122"/>
@@ -5285,7 +5297,7 @@
             <a:r>
               <a:rPr lang="en-US" sz="1400" dirty="0">
                 <a:solidFill>
-                  <a:srgbClr val="C9D3F5"/>
+                  <a:srgbClr val="1F2429"/>
                 </a:solidFill>
                 <a:latin typeface="Courier New" pitchFamily="34" charset="0"/>
                 <a:ea typeface="Courier New" pitchFamily="34" charset="-122"/>
@@ -5305,7 +5317,7 @@
             <a:r>
               <a:rPr lang="en-US" sz="1400" dirty="0">
                 <a:solidFill>
-                  <a:srgbClr val="C9D3F5"/>
+                  <a:srgbClr val="1F2429"/>
                 </a:solidFill>
                 <a:latin typeface="Courier New" pitchFamily="34" charset="0"/>
                 <a:ea typeface="Courier New" pitchFamily="34" charset="-122"/>
@@ -5325,7 +5337,7 @@
             <a:r>
               <a:rPr lang="en-US" sz="1400" dirty="0">
                 <a:solidFill>
-                  <a:srgbClr val="C9D3F5"/>
+                  <a:srgbClr val="1F2429"/>
                 </a:solidFill>
                 <a:latin typeface="Courier New" pitchFamily="34" charset="0"/>
                 <a:ea typeface="Courier New" pitchFamily="34" charset="-122"/>
@@ -5345,7 +5357,7 @@
             <a:r>
               <a:rPr lang="en-US" sz="1400" dirty="0">
                 <a:solidFill>
-                  <a:srgbClr val="C9D3F5"/>
+                  <a:srgbClr val="1F2429"/>
                 </a:solidFill>
                 <a:latin typeface="Courier New" pitchFamily="34" charset="0"/>
                 <a:ea typeface="Courier New" pitchFamily="34" charset="-122"/>
@@ -5365,7 +5377,7 @@
             <a:r>
               <a:rPr lang="en-US" sz="1400" dirty="0">
                 <a:solidFill>
-                  <a:srgbClr val="C9D3F5"/>
+                  <a:srgbClr val="1F2429"/>
                 </a:solidFill>
                 <a:latin typeface="Courier New" pitchFamily="34" charset="0"/>
                 <a:ea typeface="Courier New" pitchFamily="34" charset="-122"/>
@@ -5539,7 +5551,7 @@
         <p:spPr>
           <a:xfrm>
             <a:off x="640080" y="1965960"/>
-            <a:ext cx="10911535" cy="1737360"/>
+            <a:ext cx="10911535" cy="3657600"/>
           </a:xfrm>
           <a:prstGeom prst="roundRect">
             <a:avLst>
@@ -5570,7 +5582,7 @@
         <p:spPr>
           <a:xfrm>
             <a:off x="868680" y="2103120"/>
-            <a:ext cx="10454335" cy="274320"/>
+            <a:ext cx="10454335" cy="400000"/>
           </a:xfrm>
           <a:prstGeom prst="rect">
             <a:avLst/>
@@ -5586,7 +5598,7 @@
               <a:buNone/>
             </a:pPr>
             <a:r>
-              <a:rPr lang="en-US" sz="1000" b="1" spc="200" kern="0" dirty="0">
+              <a:rPr lang="en-US" sz="1800" b="1" spc="200" kern="0" dirty="0">
                 <a:solidFill>
                   <a:srgbClr val="8A3A12"/>
                 </a:solidFill>
@@ -5596,7 +5608,7 @@
               </a:rPr>
               <a:t>WARNING</a:t>
             </a:r>
-            <a:endParaRPr lang="en-US" sz="1000" dirty="0"/>
+            <a:endParaRPr lang="en-US" sz="1800" dirty="0"/>
           </a:p>
         </p:txBody>
       </p:sp>
@@ -5608,24 +5620,24 @@
         </p:nvSpPr>
         <p:spPr>
           <a:xfrm>
-            <a:off x="868680" y="2404872"/>
-            <a:ext cx="10454335" cy="1143000"/>
-          </a:xfrm>
-          <a:prstGeom prst="rect">
-            <a:avLst/>
-          </a:prstGeom>
-          <a:noFill/>
-          <a:ln/>
-        </p:spPr>
-        <p:txBody>
-          <a:bodyPr wrap="square" lIns="0" tIns="0" rIns="0" bIns="0" rtlCol="0" anchor="t"/>
+            <a:off x="868680" y="2795960"/>
+            <a:ext cx="10454335" cy="2500000"/>
+          </a:xfrm>
+          <a:prstGeom prst="rect">
+            <a:avLst/>
+          </a:prstGeom>
+          <a:noFill/>
+          <a:ln/>
+        </p:spPr>
+        <p:txBody>
+          <a:bodyPr wrap="square" lIns="0" tIns="0" rIns="0" bIns="0" rtlCol="0" anchor="ctr"/>
           <a:lstStyle/>
           <a:p>
             <a:pPr indent="0" marL="0">
               <a:buNone/>
             </a:pPr>
             <a:r>
-              <a:rPr lang="en-US" sz="1250" dirty="0">
+              <a:rPr lang="en-US" sz="2800" dirty="0">
                 <a:solidFill>
                   <a:srgbClr val="26262F"/>
                 </a:solidFill>
@@ -5635,7 +5647,7 @@
               </a:rPr>
               <a:t>req.params and req.query always arrive as strings, even if they look like a number. req.query.page is "2", not 2. If you need a number, convert it explicitly: Number(req.query.page) or parseInt(req.query.page, 10).</a:t>
             </a:r>
-            <a:endParaRPr lang="en-US" sz="1250" dirty="0"/>
+            <a:endParaRPr lang="en-US" sz="2800" dirty="0"/>
           </a:p>
         </p:txBody>
       </p:sp>
@@ -7471,9 +7483,13 @@
             </a:avLst>
           </a:prstGeom>
           <a:solidFill>
-            <a:srgbClr val="1E1E4C"/>
+            <a:srgbClr val="F7F8F9"/>
           </a:solidFill>
-          <a:ln/>
+          <a:ln w="9525">
+            <a:solidFill>
+              <a:srgbClr val="D0D5DD"/>
+            </a:solidFill>
+          </a:ln>
         </p:spPr>
         <p:txBody>
           <a:bodyPr/>
@@ -7510,7 +7526,7 @@
             <a:r>
               <a:rPr lang="en-US" sz="1400" dirty="0">
                 <a:solidFill>
-                  <a:srgbClr val="C9D3F5"/>
+                  <a:srgbClr val="1F2429"/>
                 </a:solidFill>
                 <a:latin typeface="Courier New" pitchFamily="34" charset="0"/>
                 <a:ea typeface="Courier New" pitchFamily="34" charset="-122"/>
@@ -7530,7 +7546,7 @@
             <a:r>
               <a:rPr lang="en-US" sz="1400" dirty="0">
                 <a:solidFill>
-                  <a:srgbClr val="C9D3F5"/>
+                  <a:srgbClr val="1F2429"/>
                 </a:solidFill>
                 <a:latin typeface="Courier New" pitchFamily="34" charset="0"/>
                 <a:ea typeface="Courier New" pitchFamily="34" charset="-122"/>
@@ -7559,7 +7575,7 @@
             <a:r>
               <a:rPr lang="en-US" sz="1400" dirty="0">
                 <a:solidFill>
-                  <a:srgbClr val="C9D3F5"/>
+                  <a:srgbClr val="1F2429"/>
                 </a:solidFill>
                 <a:latin typeface="Courier New" pitchFamily="34" charset="0"/>
                 <a:ea typeface="Courier New" pitchFamily="34" charset="-122"/>
@@ -7588,7 +7604,7 @@
             <a:r>
               <a:rPr lang="en-US" sz="1400" dirty="0">
                 <a:solidFill>
-                  <a:srgbClr val="C9D3F5"/>
+                  <a:srgbClr val="1F2429"/>
                 </a:solidFill>
                 <a:latin typeface="Courier New" pitchFamily="34" charset="0"/>
                 <a:ea typeface="Courier New" pitchFamily="34" charset="-122"/>
@@ -7608,7 +7624,7 @@
             <a:r>
               <a:rPr lang="en-US" sz="1400" dirty="0">
                 <a:solidFill>
-                  <a:srgbClr val="C9D3F5"/>
+                  <a:srgbClr val="1F2429"/>
                 </a:solidFill>
                 <a:latin typeface="Courier New" pitchFamily="34" charset="0"/>
                 <a:ea typeface="Courier New" pitchFamily="34" charset="-122"/>
@@ -7628,7 +7644,7 @@
             <a:r>
               <a:rPr lang="en-US" sz="1400" dirty="0">
                 <a:solidFill>
-                  <a:srgbClr val="C9D3F5"/>
+                  <a:srgbClr val="1F2429"/>
                 </a:solidFill>
                 <a:latin typeface="Courier New" pitchFamily="34" charset="0"/>
                 <a:ea typeface="Courier New" pitchFamily="34" charset="-122"/>
@@ -7648,7 +7664,7 @@
             <a:r>
               <a:rPr lang="en-US" sz="1400" dirty="0">
                 <a:solidFill>
-                  <a:srgbClr val="C9D3F5"/>
+                  <a:srgbClr val="1F2429"/>
                 </a:solidFill>
                 <a:latin typeface="Courier New" pitchFamily="34" charset="0"/>
                 <a:ea typeface="Courier New" pitchFamily="34" charset="-122"/>
@@ -8482,7 +8498,7 @@
         <p:spPr>
           <a:xfrm>
             <a:off x="640080" y="1965960"/>
-            <a:ext cx="10911535" cy="1828800"/>
+            <a:ext cx="10911535" cy="3657600"/>
           </a:xfrm>
           <a:prstGeom prst="roundRect">
             <a:avLst>
@@ -8513,7 +8529,7 @@
         <p:spPr>
           <a:xfrm>
             <a:off x="868680" y="2103120"/>
-            <a:ext cx="10454335" cy="274320"/>
+            <a:ext cx="10454335" cy="400000"/>
           </a:xfrm>
           <a:prstGeom prst="rect">
             <a:avLst/>
@@ -8529,7 +8545,7 @@
               <a:buNone/>
             </a:pPr>
             <a:r>
-              <a:rPr lang="en-US" sz="1000" b="1" spc="200" kern="0" dirty="0">
+              <a:rPr lang="en-US" sz="1800" b="1" spc="200" kern="0" dirty="0">
                 <a:solidFill>
                   <a:srgbClr val="8A3A12"/>
                 </a:solidFill>
@@ -8539,7 +8555,7 @@
               </a:rPr>
               <a:t>WARNING</a:t>
             </a:r>
-            <a:endParaRPr lang="en-US" sz="1000" dirty="0"/>
+            <a:endParaRPr lang="en-US" sz="1800" dirty="0"/>
           </a:p>
         </p:txBody>
       </p:sp>
@@ -8551,24 +8567,24 @@
         </p:nvSpPr>
         <p:spPr>
           <a:xfrm>
-            <a:off x="868680" y="2404872"/>
-            <a:ext cx="10454335" cy="1234440"/>
-          </a:xfrm>
-          <a:prstGeom prst="rect">
-            <a:avLst/>
-          </a:prstGeom>
-          <a:noFill/>
-          <a:ln/>
-        </p:spPr>
-        <p:txBody>
-          <a:bodyPr wrap="square" lIns="0" tIns="0" rIns="0" bIns="0" rtlCol="0" anchor="t"/>
+            <a:off x="868680" y="2795960"/>
+            <a:ext cx="10454335" cy="2500000"/>
+          </a:xfrm>
+          <a:prstGeom prst="rect">
+            <a:avLst/>
+          </a:prstGeom>
+          <a:noFill/>
+          <a:ln/>
+        </p:spPr>
+        <p:txBody>
+          <a:bodyPr wrap="square" lIns="0" tIns="0" rIns="0" bIns="0" rtlCol="0" anchor="ctr"/>
           <a:lstStyle/>
           <a:p>
             <a:pPr indent="0" marL="0">
               <a:buNone/>
             </a:pPr>
             <a:r>
-              <a:rPr lang="en-US" sz="1250" dirty="0">
+              <a:rPr lang="en-US" sz="2800" dirty="0">
                 <a:solidFill>
                   <a:srgbClr val="26262F"/>
                 </a:solidFill>
@@ -8578,7 +8594,7 @@
               </a:rPr>
               <a:t>If you forget app.use(express.json()) and the client sends a JSON body, req.body will be undefined, and destructuring it (const { title } = req.body) will throw an error. If req.body seems empty, check this first.</a:t>
             </a:r>
-            <a:endParaRPr lang="en-US" sz="1250" dirty="0"/>
+            <a:endParaRPr lang="en-US" sz="2800" dirty="0"/>
           </a:p>
         </p:txBody>
       </p:sp>
@@ -9976,9 +9992,13 @@
             </a:avLst>
           </a:prstGeom>
           <a:solidFill>
-            <a:srgbClr val="1E1E4C"/>
+            <a:srgbClr val="F7F8F9"/>
           </a:solidFill>
-          <a:ln/>
+          <a:ln w="9525">
+            <a:solidFill>
+              <a:srgbClr val="D0D5DD"/>
+            </a:solidFill>
+          </a:ln>
         </p:spPr>
         <p:txBody>
           <a:bodyPr/>
@@ -10015,7 +10035,7 @@
             <a:r>
               <a:rPr lang="en-US" sz="1400" dirty="0">
                 <a:solidFill>
-                  <a:srgbClr val="C9D3F5"/>
+                  <a:srgbClr val="1F2429"/>
                 </a:solidFill>
                 <a:latin typeface="Courier New" pitchFamily="34" charset="0"/>
                 <a:ea typeface="Courier New" pitchFamily="34" charset="-122"/>
@@ -10044,7 +10064,7 @@
             <a:r>
               <a:rPr lang="en-US" sz="1400" dirty="0">
                 <a:solidFill>
-                  <a:srgbClr val="C9D3F5"/>
+                  <a:srgbClr val="1F2429"/>
                 </a:solidFill>
                 <a:latin typeface="Courier New" pitchFamily="34" charset="0"/>
                 <a:ea typeface="Courier New" pitchFamily="34" charset="-122"/>
@@ -10064,7 +10084,7 @@
             <a:r>
               <a:rPr lang="en-US" sz="1400" dirty="0">
                 <a:solidFill>
-                  <a:srgbClr val="C9D3F5"/>
+                  <a:srgbClr val="1F2429"/>
                 </a:solidFill>
                 <a:latin typeface="Courier New" pitchFamily="34" charset="0"/>
                 <a:ea typeface="Courier New" pitchFamily="34" charset="-122"/>
@@ -10084,7 +10104,7 @@
             <a:r>
               <a:rPr lang="en-US" sz="1400" dirty="0">
                 <a:solidFill>
-                  <a:srgbClr val="C9D3F5"/>
+                  <a:srgbClr val="1F2429"/>
                 </a:solidFill>
                 <a:latin typeface="Courier New" pitchFamily="34" charset="0"/>
                 <a:ea typeface="Courier New" pitchFamily="34" charset="-122"/>
@@ -10104,7 +10124,7 @@
             <a:r>
               <a:rPr lang="en-US" sz="1400" dirty="0">
                 <a:solidFill>
-                  <a:srgbClr val="C9D3F5"/>
+                  <a:srgbClr val="1F2429"/>
                 </a:solidFill>
                 <a:latin typeface="Courier New" pitchFamily="34" charset="0"/>
                 <a:ea typeface="Courier New" pitchFamily="34" charset="-122"/>
@@ -10124,7 +10144,7 @@
             <a:r>
               <a:rPr lang="en-US" sz="1400" dirty="0">
                 <a:solidFill>
-                  <a:srgbClr val="C9D3F5"/>
+                  <a:srgbClr val="1F2429"/>
                 </a:solidFill>
                 <a:latin typeface="Courier New" pitchFamily="34" charset="0"/>
                 <a:ea typeface="Courier New" pitchFamily="34" charset="-122"/>
@@ -10144,7 +10164,7 @@
             <a:r>
               <a:rPr lang="en-US" sz="1400" dirty="0">
                 <a:solidFill>
-                  <a:srgbClr val="C9D3F5"/>
+                  <a:srgbClr val="1F2429"/>
                 </a:solidFill>
                 <a:latin typeface="Courier New" pitchFamily="34" charset="0"/>
                 <a:ea typeface="Courier New" pitchFamily="34" charset="-122"/>
@@ -10164,7 +10184,7 @@
             <a:r>
               <a:rPr lang="en-US" sz="1400" dirty="0">
                 <a:solidFill>
-                  <a:srgbClr val="C9D3F5"/>
+                  <a:srgbClr val="1F2429"/>
                 </a:solidFill>
                 <a:latin typeface="Courier New" pitchFamily="34" charset="0"/>
                 <a:ea typeface="Courier New" pitchFamily="34" charset="-122"/>
@@ -10805,9 +10825,13 @@
             </a:avLst>
           </a:prstGeom>
           <a:solidFill>
-            <a:srgbClr val="1E1E4C"/>
+            <a:srgbClr val="F7F8F9"/>
           </a:solidFill>
-          <a:ln/>
+          <a:ln w="9525">
+            <a:solidFill>
+              <a:srgbClr val="D0D5DD"/>
+            </a:solidFill>
+          </a:ln>
         </p:spPr>
         <p:txBody>
           <a:bodyPr/>
@@ -10844,7 +10868,7 @@
             <a:r>
               <a:rPr lang="en-US" sz="1400" dirty="0">
                 <a:solidFill>
-                  <a:srgbClr val="C9D3F5"/>
+                  <a:srgbClr val="1F2429"/>
                 </a:solidFill>
                 <a:latin typeface="Courier New" pitchFamily="34" charset="0"/>
                 <a:ea typeface="Courier New" pitchFamily="34" charset="-122"/>
@@ -10864,7 +10888,7 @@
             <a:r>
               <a:rPr lang="en-US" sz="1400" dirty="0">
                 <a:solidFill>
-                  <a:srgbClr val="C9D3F5"/>
+                  <a:srgbClr val="1F2429"/>
                 </a:solidFill>
                 <a:latin typeface="Courier New" pitchFamily="34" charset="0"/>
                 <a:ea typeface="Courier New" pitchFamily="34" charset="-122"/>
@@ -10884,7 +10908,7 @@
             <a:r>
               <a:rPr lang="en-US" sz="1400" dirty="0">
                 <a:solidFill>
-                  <a:srgbClr val="C9D3F5"/>
+                  <a:srgbClr val="1F2429"/>
                 </a:solidFill>
                 <a:latin typeface="Courier New" pitchFamily="34" charset="0"/>
                 <a:ea typeface="Courier New" pitchFamily="34" charset="-122"/>
@@ -10913,7 +10937,7 @@
             <a:r>
               <a:rPr lang="en-US" sz="1400" dirty="0">
                 <a:solidFill>
-                  <a:srgbClr val="C9D3F5"/>
+                  <a:srgbClr val="1F2429"/>
                 </a:solidFill>
                 <a:latin typeface="Courier New" pitchFamily="34" charset="0"/>
                 <a:ea typeface="Courier New" pitchFamily="34" charset="-122"/>
@@ -10933,7 +10957,7 @@
             <a:r>
               <a:rPr lang="en-US" sz="1400" dirty="0">
                 <a:solidFill>
-                  <a:srgbClr val="C9D3F5"/>
+                  <a:srgbClr val="1F2429"/>
                 </a:solidFill>
                 <a:latin typeface="Courier New" pitchFamily="34" charset="0"/>
                 <a:ea typeface="Courier New" pitchFamily="34" charset="-122"/>
@@ -10953,7 +10977,7 @@
             <a:r>
               <a:rPr lang="en-US" sz="1400" dirty="0">
                 <a:solidFill>
-                  <a:srgbClr val="C9D3F5"/>
+                  <a:srgbClr val="1F2429"/>
                 </a:solidFill>
                 <a:latin typeface="Courier New" pitchFamily="34" charset="0"/>
                 <a:ea typeface="Courier New" pitchFamily="34" charset="-122"/>
@@ -10982,7 +11006,7 @@
             <a:r>
               <a:rPr lang="en-US" sz="1400" dirty="0">
                 <a:solidFill>
-                  <a:srgbClr val="C9D3F5"/>
+                  <a:srgbClr val="1F2429"/>
                 </a:solidFill>
                 <a:latin typeface="Courier New" pitchFamily="34" charset="0"/>
                 <a:ea typeface="Courier New" pitchFamily="34" charset="-122"/>
@@ -11164,9 +11188,13 @@
             </a:avLst>
           </a:prstGeom>
           <a:solidFill>
-            <a:srgbClr val="1E1E4C"/>
+            <a:srgbClr val="F7F8F9"/>
           </a:solidFill>
-          <a:ln/>
+          <a:ln w="9525">
+            <a:solidFill>
+              <a:srgbClr val="D0D5DD"/>
+            </a:solidFill>
+          </a:ln>
         </p:spPr>
         <p:txBody>
           <a:bodyPr/>
@@ -11203,7 +11231,7 @@
             <a:r>
               <a:rPr lang="en-US" sz="1400" dirty="0">
                 <a:solidFill>
-                  <a:srgbClr val="C9D3F5"/>
+                  <a:srgbClr val="1F2429"/>
                 </a:solidFill>
                 <a:latin typeface="Courier New" pitchFamily="34" charset="0"/>
                 <a:ea typeface="Courier New" pitchFamily="34" charset="-122"/>
@@ -11223,7 +11251,7 @@
             <a:r>
               <a:rPr lang="en-US" sz="1400" dirty="0">
                 <a:solidFill>
-                  <a:srgbClr val="C9D3F5"/>
+                  <a:srgbClr val="1F2429"/>
                 </a:solidFill>
                 <a:latin typeface="Courier New" pitchFamily="34" charset="0"/>
                 <a:ea typeface="Courier New" pitchFamily="34" charset="-122"/>
@@ -11243,7 +11271,7 @@
             <a:r>
               <a:rPr lang="en-US" sz="1400" dirty="0">
                 <a:solidFill>
-                  <a:srgbClr val="C9D3F5"/>
+                  <a:srgbClr val="1F2429"/>
                 </a:solidFill>
                 <a:latin typeface="Courier New" pitchFamily="34" charset="0"/>
                 <a:ea typeface="Courier New" pitchFamily="34" charset="-122"/>
@@ -11272,7 +11300,7 @@
             <a:r>
               <a:rPr lang="en-US" sz="1400" dirty="0">
                 <a:solidFill>
-                  <a:srgbClr val="C9D3F5"/>
+                  <a:srgbClr val="1F2429"/>
                 </a:solidFill>
                 <a:latin typeface="Courier New" pitchFamily="34" charset="0"/>
                 <a:ea typeface="Courier New" pitchFamily="34" charset="-122"/>
@@ -11292,7 +11320,7 @@
             <a:r>
               <a:rPr lang="en-US" sz="1400" dirty="0">
                 <a:solidFill>
-                  <a:srgbClr val="C9D3F5"/>
+                  <a:srgbClr val="1F2429"/>
                 </a:solidFill>
                 <a:latin typeface="Courier New" pitchFamily="34" charset="0"/>
                 <a:ea typeface="Courier New" pitchFamily="34" charset="-122"/>
@@ -11312,7 +11340,7 @@
             <a:r>
               <a:rPr lang="en-US" sz="1400" dirty="0">
                 <a:solidFill>
-                  <a:srgbClr val="C9D3F5"/>
+                  <a:srgbClr val="1F2429"/>
                 </a:solidFill>
                 <a:latin typeface="Courier New" pitchFamily="34" charset="0"/>
                 <a:ea typeface="Courier New" pitchFamily="34" charset="-122"/>
@@ -11341,7 +11369,7 @@
             <a:r>
               <a:rPr lang="en-US" sz="1400" dirty="0">
                 <a:solidFill>
-                  <a:srgbClr val="C9D3F5"/>
+                  <a:srgbClr val="1F2429"/>
                 </a:solidFill>
                 <a:latin typeface="Courier New" pitchFamily="34" charset="0"/>
                 <a:ea typeface="Courier New" pitchFamily="34" charset="-122"/>
@@ -11361,7 +11389,7 @@
             <a:r>
               <a:rPr lang="en-US" sz="1400" dirty="0">
                 <a:solidFill>
-                  <a:srgbClr val="C9D3F5"/>
+                  <a:srgbClr val="1F2429"/>
                 </a:solidFill>
                 <a:latin typeface="Courier New" pitchFamily="34" charset="0"/>
                 <a:ea typeface="Courier New" pitchFamily="34" charset="-122"/>
@@ -11381,7 +11409,7 @@
             <a:r>
               <a:rPr lang="en-US" sz="1400" dirty="0">
                 <a:solidFill>
-                  <a:srgbClr val="C9D3F5"/>
+                  <a:srgbClr val="1F2429"/>
                 </a:solidFill>
                 <a:latin typeface="Courier New" pitchFamily="34" charset="0"/>
                 <a:ea typeface="Courier New" pitchFamily="34" charset="-122"/>
@@ -11563,9 +11591,13 @@
             </a:avLst>
           </a:prstGeom>
           <a:solidFill>
-            <a:srgbClr val="1E1E4C"/>
+            <a:srgbClr val="F7F8F9"/>
           </a:solidFill>
-          <a:ln/>
+          <a:ln w="9525">
+            <a:solidFill>
+              <a:srgbClr val="D0D5DD"/>
+            </a:solidFill>
+          </a:ln>
         </p:spPr>
         <p:txBody>
           <a:bodyPr/>
@@ -11602,7 +11634,7 @@
             <a:r>
               <a:rPr lang="en-US" sz="1400" dirty="0">
                 <a:solidFill>
-                  <a:srgbClr val="C9D3F5"/>
+                  <a:srgbClr val="1F2429"/>
                 </a:solidFill>
                 <a:latin typeface="Courier New" pitchFamily="34" charset="0"/>
                 <a:ea typeface="Courier New" pitchFamily="34" charset="-122"/>
@@ -11622,7 +11654,7 @@
             <a:r>
               <a:rPr lang="en-US" sz="1400" dirty="0">
                 <a:solidFill>
-                  <a:srgbClr val="C9D3F5"/>
+                  <a:srgbClr val="1F2429"/>
                 </a:solidFill>
                 <a:latin typeface="Courier New" pitchFamily="34" charset="0"/>
                 <a:ea typeface="Courier New" pitchFamily="34" charset="-122"/>
@@ -11642,7 +11674,7 @@
             <a:r>
               <a:rPr lang="en-US" sz="1400" dirty="0">
                 <a:solidFill>
-                  <a:srgbClr val="C9D3F5"/>
+                  <a:srgbClr val="1F2429"/>
                 </a:solidFill>
                 <a:latin typeface="Courier New" pitchFamily="34" charset="0"/>
                 <a:ea typeface="Courier New" pitchFamily="34" charset="-122"/>
@@ -11671,7 +11703,7 @@
             <a:r>
               <a:rPr lang="en-US" sz="1400" dirty="0">
                 <a:solidFill>
-                  <a:srgbClr val="C9D3F5"/>
+                  <a:srgbClr val="1F2429"/>
                 </a:solidFill>
                 <a:latin typeface="Courier New" pitchFamily="34" charset="0"/>
                 <a:ea typeface="Courier New" pitchFamily="34" charset="-122"/>
@@ -11691,7 +11723,7 @@
             <a:r>
               <a:rPr lang="en-US" sz="1400" dirty="0">
                 <a:solidFill>
-                  <a:srgbClr val="C9D3F5"/>
+                  <a:srgbClr val="1F2429"/>
                 </a:solidFill>
                 <a:latin typeface="Courier New" pitchFamily="34" charset="0"/>
                 <a:ea typeface="Courier New" pitchFamily="34" charset="-122"/>
@@ -11720,7 +11752,7 @@
             <a:r>
               <a:rPr lang="en-US" sz="1400" dirty="0">
                 <a:solidFill>
-                  <a:srgbClr val="C9D3F5"/>
+                  <a:srgbClr val="1F2429"/>
                 </a:solidFill>
                 <a:latin typeface="Courier New" pitchFamily="34" charset="0"/>
                 <a:ea typeface="Courier New" pitchFamily="34" charset="-122"/>
@@ -12298,9 +12330,13 @@
             </a:avLst>
           </a:prstGeom>
           <a:solidFill>
-            <a:srgbClr val="1E1E4C"/>
+            <a:srgbClr val="F7F8F9"/>
           </a:solidFill>
-          <a:ln/>
+          <a:ln w="9525">
+            <a:solidFill>
+              <a:srgbClr val="D0D5DD"/>
+            </a:solidFill>
+          </a:ln>
         </p:spPr>
         <p:txBody>
           <a:bodyPr/>
@@ -12337,7 +12373,7 @@
             <a:r>
               <a:rPr lang="en-US" sz="1400" dirty="0">
                 <a:solidFill>
-                  <a:srgbClr val="C9D3F5"/>
+                  <a:srgbClr val="1F2429"/>
                 </a:solidFill>
                 <a:latin typeface="Courier New" pitchFamily="34" charset="0"/>
                 <a:ea typeface="Courier New" pitchFamily="34" charset="-122"/>
@@ -12366,7 +12402,7 @@
             <a:r>
               <a:rPr lang="en-US" sz="1400" dirty="0">
                 <a:solidFill>
-                  <a:srgbClr val="C9D3F5"/>
+                  <a:srgbClr val="1F2429"/>
                 </a:solidFill>
                 <a:latin typeface="Courier New" pitchFamily="34" charset="0"/>
                 <a:ea typeface="Courier New" pitchFamily="34" charset="-122"/>
@@ -12386,7 +12422,7 @@
             <a:r>
               <a:rPr lang="en-US" sz="1400" dirty="0">
                 <a:solidFill>
-                  <a:srgbClr val="C9D3F5"/>
+                  <a:srgbClr val="1F2429"/>
                 </a:solidFill>
                 <a:latin typeface="Courier New" pitchFamily="34" charset="0"/>
                 <a:ea typeface="Courier New" pitchFamily="34" charset="-122"/>
@@ -12406,7 +12442,7 @@
             <a:r>
               <a:rPr lang="en-US" sz="1400" dirty="0">
                 <a:solidFill>
-                  <a:srgbClr val="C9D3F5"/>
+                  <a:srgbClr val="1F2429"/>
                 </a:solidFill>
                 <a:latin typeface="Courier New" pitchFamily="34" charset="0"/>
                 <a:ea typeface="Courier New" pitchFamily="34" charset="-122"/>
@@ -13047,9 +13083,13 @@
             </a:avLst>
           </a:prstGeom>
           <a:solidFill>
-            <a:srgbClr val="1E1E4C"/>
+            <a:srgbClr val="F7F8F9"/>
           </a:solidFill>
-          <a:ln/>
+          <a:ln w="9525">
+            <a:solidFill>
+              <a:srgbClr val="D0D5DD"/>
+            </a:solidFill>
+          </a:ln>
         </p:spPr>
         <p:txBody>
           <a:bodyPr/>
@@ -13086,7 +13126,7 @@
             <a:r>
               <a:rPr lang="en-US" sz="1366" dirty="0">
                 <a:solidFill>
-                  <a:srgbClr val="C9D3F5"/>
+                  <a:srgbClr val="1F2429"/>
                 </a:solidFill>
                 <a:latin typeface="Courier New" pitchFamily="34" charset="0"/>
                 <a:ea typeface="Courier New" pitchFamily="34" charset="-122"/>
@@ -13106,7 +13146,7 @@
             <a:r>
               <a:rPr lang="en-US" sz="1366" dirty="0">
                 <a:solidFill>
-                  <a:srgbClr val="C9D3F5"/>
+                  <a:srgbClr val="1F2429"/>
                 </a:solidFill>
                 <a:latin typeface="Courier New" pitchFamily="34" charset="0"/>
                 <a:ea typeface="Courier New" pitchFamily="34" charset="-122"/>
@@ -13126,7 +13166,7 @@
             <a:r>
               <a:rPr lang="en-US" sz="1366" dirty="0">
                 <a:solidFill>
-                  <a:srgbClr val="C9D3F5"/>
+                  <a:srgbClr val="1F2429"/>
                 </a:solidFill>
                 <a:latin typeface="Courier New" pitchFamily="34" charset="0"/>
                 <a:ea typeface="Courier New" pitchFamily="34" charset="-122"/>
@@ -13146,7 +13186,7 @@
             <a:r>
               <a:rPr lang="en-US" sz="1366" dirty="0">
                 <a:solidFill>
-                  <a:srgbClr val="C9D3F5"/>
+                  <a:srgbClr val="1F2429"/>
                 </a:solidFill>
                 <a:latin typeface="Courier New" pitchFamily="34" charset="0"/>
                 <a:ea typeface="Courier New" pitchFamily="34" charset="-122"/>
@@ -13166,7 +13206,7 @@
             <a:r>
               <a:rPr lang="en-US" sz="1366" dirty="0">
                 <a:solidFill>
-                  <a:srgbClr val="C9D3F5"/>
+                  <a:srgbClr val="1F2429"/>
                 </a:solidFill>
                 <a:latin typeface="Courier New" pitchFamily="34" charset="0"/>
                 <a:ea typeface="Courier New" pitchFamily="34" charset="-122"/>
@@ -13186,7 +13226,7 @@
             <a:r>
               <a:rPr lang="en-US" sz="1366" dirty="0">
                 <a:solidFill>
-                  <a:srgbClr val="C9D3F5"/>
+                  <a:srgbClr val="1F2429"/>
                 </a:solidFill>
                 <a:latin typeface="Courier New" pitchFamily="34" charset="0"/>
                 <a:ea typeface="Courier New" pitchFamily="34" charset="-122"/>
@@ -13206,7 +13246,7 @@
             <a:r>
               <a:rPr lang="en-US" sz="1366" dirty="0">
                 <a:solidFill>
-                  <a:srgbClr val="C9D3F5"/>
+                  <a:srgbClr val="1F2429"/>
                 </a:solidFill>
                 <a:latin typeface="Courier New" pitchFamily="34" charset="0"/>
                 <a:ea typeface="Courier New" pitchFamily="34" charset="-122"/>
@@ -13226,7 +13266,7 @@
             <a:r>
               <a:rPr lang="en-US" sz="1366" dirty="0">
                 <a:solidFill>
-                  <a:srgbClr val="C9D3F5"/>
+                  <a:srgbClr val="1F2429"/>
                 </a:solidFill>
                 <a:latin typeface="Courier New" pitchFamily="34" charset="0"/>
                 <a:ea typeface="Courier New" pitchFamily="34" charset="-122"/>
@@ -13255,7 +13295,7 @@
             <a:r>
               <a:rPr lang="en-US" sz="1366" dirty="0">
                 <a:solidFill>
-                  <a:srgbClr val="C9D3F5"/>
+                  <a:srgbClr val="1F2429"/>
                 </a:solidFill>
                 <a:latin typeface="Courier New" pitchFamily="34" charset="0"/>
                 <a:ea typeface="Courier New" pitchFamily="34" charset="-122"/>
@@ -13275,7 +13315,7 @@
             <a:r>
               <a:rPr lang="en-US" sz="1366" dirty="0">
                 <a:solidFill>
-                  <a:srgbClr val="C9D3F5"/>
+                  <a:srgbClr val="1F2429"/>
                 </a:solidFill>
                 <a:latin typeface="Courier New" pitchFamily="34" charset="0"/>
                 <a:ea typeface="Courier New" pitchFamily="34" charset="-122"/>
@@ -13295,7 +13335,7 @@
             <a:r>
               <a:rPr lang="en-US" sz="1366" dirty="0">
                 <a:solidFill>
-                  <a:srgbClr val="C9D3F5"/>
+                  <a:srgbClr val="1F2429"/>
                 </a:solidFill>
                 <a:latin typeface="Courier New" pitchFamily="34" charset="0"/>
                 <a:ea typeface="Courier New" pitchFamily="34" charset="-122"/>
@@ -13315,7 +13355,7 @@
             <a:r>
               <a:rPr lang="en-US" sz="1366" dirty="0">
                 <a:solidFill>
-                  <a:srgbClr val="C9D3F5"/>
+                  <a:srgbClr val="1F2429"/>
                 </a:solidFill>
                 <a:latin typeface="Courier New" pitchFamily="34" charset="0"/>
                 <a:ea typeface="Courier New" pitchFamily="34" charset="-122"/>
@@ -13497,9 +13537,13 @@
             </a:avLst>
           </a:prstGeom>
           <a:solidFill>
-            <a:srgbClr val="1E1E4C"/>
+            <a:srgbClr val="F7F8F9"/>
           </a:solidFill>
-          <a:ln/>
+          <a:ln w="9525">
+            <a:solidFill>
+              <a:srgbClr val="D0D5DD"/>
+            </a:solidFill>
+          </a:ln>
         </p:spPr>
         <p:txBody>
           <a:bodyPr/>
@@ -13536,7 +13580,7 @@
             <a:r>
               <a:rPr lang="en-US" sz="1400" dirty="0">
                 <a:solidFill>
-                  <a:srgbClr val="C9D3F5"/>
+                  <a:srgbClr val="1F2429"/>
                 </a:solidFill>
                 <a:latin typeface="Courier New" pitchFamily="34" charset="0"/>
                 <a:ea typeface="Courier New" pitchFamily="34" charset="-122"/>
@@ -13556,7 +13600,7 @@
             <a:r>
               <a:rPr lang="en-US" sz="1400" dirty="0">
                 <a:solidFill>
-                  <a:srgbClr val="C9D3F5"/>
+                  <a:srgbClr val="1F2429"/>
                 </a:solidFill>
                 <a:latin typeface="Courier New" pitchFamily="34" charset="0"/>
                 <a:ea typeface="Courier New" pitchFamily="34" charset="-122"/>
@@ -13576,7 +13620,7 @@
             <a:r>
               <a:rPr lang="en-US" sz="1400" dirty="0">
                 <a:solidFill>
-                  <a:srgbClr val="C9D3F5"/>
+                  <a:srgbClr val="1F2429"/>
                 </a:solidFill>
                 <a:latin typeface="Courier New" pitchFamily="34" charset="0"/>
                 <a:ea typeface="Courier New" pitchFamily="34" charset="-122"/>
@@ -13596,7 +13640,7 @@
             <a:r>
               <a:rPr lang="en-US" sz="1400" dirty="0">
                 <a:solidFill>
-                  <a:srgbClr val="C9D3F5"/>
+                  <a:srgbClr val="1F2429"/>
                 </a:solidFill>
                 <a:latin typeface="Courier New" pitchFamily="34" charset="0"/>
                 <a:ea typeface="Courier New" pitchFamily="34" charset="-122"/>
@@ -13625,7 +13669,7 @@
             <a:r>
               <a:rPr lang="en-US" sz="1400" dirty="0">
                 <a:solidFill>
-                  <a:srgbClr val="C9D3F5"/>
+                  <a:srgbClr val="1F2429"/>
                 </a:solidFill>
                 <a:latin typeface="Courier New" pitchFamily="34" charset="0"/>
                 <a:ea typeface="Courier New" pitchFamily="34" charset="-122"/>
@@ -14959,7 +15003,7 @@
         <p:spPr>
           <a:xfrm>
             <a:off x="640080" y="1965960"/>
-            <a:ext cx="10911535" cy="1554480"/>
+            <a:ext cx="10911535" cy="3657600"/>
           </a:xfrm>
           <a:prstGeom prst="roundRect">
             <a:avLst>
@@ -14990,7 +15034,7 @@
         <p:spPr>
           <a:xfrm>
             <a:off x="868680" y="2103120"/>
-            <a:ext cx="10454335" cy="274320"/>
+            <a:ext cx="10454335" cy="400000"/>
           </a:xfrm>
           <a:prstGeom prst="rect">
             <a:avLst/>
@@ -15006,7 +15050,7 @@
               <a:buNone/>
             </a:pPr>
             <a:r>
-              <a:rPr lang="en-US" sz="1000" b="1" spc="200" kern="0" dirty="0">
+              <a:rPr lang="en-US" sz="1800" b="1" spc="200" kern="0" dirty="0">
                 <a:solidFill>
                   <a:srgbClr val="1F7A46"/>
                 </a:solidFill>
@@ -15016,7 +15060,7 @@
               </a:rPr>
               <a:t>TIP</a:t>
             </a:r>
-            <a:endParaRPr lang="en-US" sz="1000" dirty="0"/>
+            <a:endParaRPr lang="en-US" sz="1800" dirty="0"/>
           </a:p>
         </p:txBody>
       </p:sp>
@@ -15028,24 +15072,24 @@
         </p:nvSpPr>
         <p:spPr>
           <a:xfrm>
-            <a:off x="868680" y="2404872"/>
-            <a:ext cx="10454335" cy="960120"/>
-          </a:xfrm>
-          <a:prstGeom prst="rect">
-            <a:avLst/>
-          </a:prstGeom>
-          <a:noFill/>
-          <a:ln/>
-        </p:spPr>
-        <p:txBody>
-          <a:bodyPr wrap="square" lIns="0" tIns="0" rIns="0" bIns="0" rtlCol="0" anchor="t"/>
+            <a:off x="868680" y="2795960"/>
+            <a:ext cx="10454335" cy="2500000"/>
+          </a:xfrm>
+          <a:prstGeom prst="rect">
+            <a:avLst/>
+          </a:prstGeom>
+          <a:noFill/>
+          <a:ln/>
+        </p:spPr>
+        <p:txBody>
+          <a:bodyPr wrap="square" lIns="0" tIns="0" rIns="0" bIns="0" rtlCol="0" anchor="ctr"/>
           <a:lstStyle/>
           <a:p>
             <a:pPr indent="0" marL="0">
               <a:buNone/>
             </a:pPr>
             <a:r>
-              <a:rPr lang="en-US" sz="1250" dirty="0">
+              <a:rPr lang="en-US" sz="2800" dirty="0">
                 <a:solidFill>
                   <a:srgbClr val="26262F"/>
                 </a:solidFill>
@@ -15055,7 +15099,7 @@
               </a:rPr>
               <a:t>Middleware and routes are checked top-to-bottom in the order you register them with app.use()/app.get()/etc. Your 404 handler and error-handling middleware must always come LAST, or they'll swallow requests meant for routes defined below them.</a:t>
             </a:r>
-            <a:endParaRPr lang="en-US" sz="1250" dirty="0"/>
+            <a:endParaRPr lang="en-US" sz="2800" dirty="0"/>
           </a:p>
         </p:txBody>
       </p:sp>
@@ -18920,9 +18964,13 @@
             </a:avLst>
           </a:prstGeom>
           <a:solidFill>
-            <a:srgbClr val="1E1E4C"/>
+            <a:srgbClr val="F7F8F9"/>
           </a:solidFill>
-          <a:ln/>
+          <a:ln w="9525">
+            <a:solidFill>
+              <a:srgbClr val="D0D5DD"/>
+            </a:solidFill>
+          </a:ln>
         </p:spPr>
         <p:txBody>
           <a:bodyPr/>
@@ -18959,7 +19007,7 @@
             <a:r>
               <a:rPr lang="en-US" sz="1400" dirty="0">
                 <a:solidFill>
-                  <a:srgbClr val="C9D3F5"/>
+                  <a:srgbClr val="1F2429"/>
                 </a:solidFill>
                 <a:latin typeface="Courier New" pitchFamily="34" charset="0"/>
                 <a:ea typeface="Courier New" pitchFamily="34" charset="-122"/>
@@ -18979,7 +19027,7 @@
             <a:r>
               <a:rPr lang="en-US" sz="1400" dirty="0">
                 <a:solidFill>
-                  <a:srgbClr val="C9D3F5"/>
+                  <a:srgbClr val="1F2429"/>
                 </a:solidFill>
                 <a:latin typeface="Courier New" pitchFamily="34" charset="0"/>
                 <a:ea typeface="Courier New" pitchFamily="34" charset="-122"/>
@@ -19008,7 +19056,7 @@
             <a:r>
               <a:rPr lang="en-US" sz="1400" dirty="0">
                 <a:solidFill>
-                  <a:srgbClr val="C9D3F5"/>
+                  <a:srgbClr val="1F2429"/>
                 </a:solidFill>
                 <a:latin typeface="Courier New" pitchFamily="34" charset="0"/>
                 <a:ea typeface="Courier New" pitchFamily="34" charset="-122"/>
@@ -19028,7 +19076,7 @@
             <a:r>
               <a:rPr lang="en-US" sz="1400" dirty="0">
                 <a:solidFill>
-                  <a:srgbClr val="C9D3F5"/>
+                  <a:srgbClr val="1F2429"/>
                 </a:solidFill>
                 <a:latin typeface="Courier New" pitchFamily="34" charset="0"/>
                 <a:ea typeface="Courier New" pitchFamily="34" charset="-122"/>
@@ -19048,7 +19096,7 @@
             <a:r>
               <a:rPr lang="en-US" sz="1400" dirty="0">
                 <a:solidFill>
-                  <a:srgbClr val="C9D3F5"/>
+                  <a:srgbClr val="1F2429"/>
                 </a:solidFill>
                 <a:latin typeface="Courier New" pitchFamily="34" charset="0"/>
                 <a:ea typeface="Courier New" pitchFamily="34" charset="-122"/>
@@ -19068,7 +19116,7 @@
             <a:r>
               <a:rPr lang="en-US" sz="1400" dirty="0">
                 <a:solidFill>
-                  <a:srgbClr val="C9D3F5"/>
+                  <a:srgbClr val="1F2429"/>
                 </a:solidFill>
                 <a:latin typeface="Courier New" pitchFamily="34" charset="0"/>
                 <a:ea typeface="Courier New" pitchFamily="34" charset="-122"/>
@@ -19088,7 +19136,7 @@
             <a:r>
               <a:rPr lang="en-US" sz="1400" dirty="0">
                 <a:solidFill>
-                  <a:srgbClr val="C9D3F5"/>
+                  <a:srgbClr val="1F2429"/>
                 </a:solidFill>
                 <a:latin typeface="Courier New" pitchFamily="34" charset="0"/>
                 <a:ea typeface="Courier New" pitchFamily="34" charset="-122"/>
@@ -19108,7 +19156,7 @@
             <a:r>
               <a:rPr lang="en-US" sz="1400" dirty="0">
                 <a:solidFill>
-                  <a:srgbClr val="C9D3F5"/>
+                  <a:srgbClr val="1F2429"/>
                 </a:solidFill>
                 <a:latin typeface="Courier New" pitchFamily="34" charset="0"/>
                 <a:ea typeface="Courier New" pitchFamily="34" charset="-122"/>
@@ -19282,7 +19330,7 @@
         <p:spPr>
           <a:xfrm>
             <a:off x="640080" y="1965960"/>
-            <a:ext cx="10911535" cy="1554480"/>
+            <a:ext cx="10911535" cy="3657600"/>
           </a:xfrm>
           <a:prstGeom prst="roundRect">
             <a:avLst>
@@ -19313,7 +19361,7 @@
         <p:spPr>
           <a:xfrm>
             <a:off x="868680" y="2103120"/>
-            <a:ext cx="10454335" cy="274320"/>
+            <a:ext cx="10454335" cy="400000"/>
           </a:xfrm>
           <a:prstGeom prst="rect">
             <a:avLst/>
@@ -19329,7 +19377,7 @@
               <a:buNone/>
             </a:pPr>
             <a:r>
-              <a:rPr lang="en-US" sz="1000" b="1" spc="200" kern="0" dirty="0">
+              <a:rPr lang="en-US" sz="1800" b="1" spc="200" kern="0" dirty="0">
                 <a:solidFill>
                   <a:srgbClr val="33459E"/>
                 </a:solidFill>
@@ -19339,7 +19387,7 @@
               </a:rPr>
               <a:t>NOTE</a:t>
             </a:r>
-            <a:endParaRPr lang="en-US" sz="1000" dirty="0"/>
+            <a:endParaRPr lang="en-US" sz="1800" dirty="0"/>
           </a:p>
         </p:txBody>
       </p:sp>
@@ -19351,24 +19399,24 @@
         </p:nvSpPr>
         <p:spPr>
           <a:xfrm>
-            <a:off x="868680" y="2404872"/>
-            <a:ext cx="10454335" cy="960120"/>
-          </a:xfrm>
-          <a:prstGeom prst="rect">
-            <a:avLst/>
-          </a:prstGeom>
-          <a:noFill/>
-          <a:ln/>
-        </p:spPr>
-        <p:txBody>
-          <a:bodyPr wrap="square" lIns="0" tIns="0" rIns="0" bIns="0" rtlCol="0" anchor="t"/>
+            <a:off x="868680" y="2795960"/>
+            <a:ext cx="10454335" cy="2500000"/>
+          </a:xfrm>
+          <a:prstGeom prst="rect">
+            <a:avLst/>
+          </a:prstGeom>
+          <a:noFill/>
+          <a:ln/>
+        </p:spPr>
+        <p:txBody>
+          <a:bodyPr wrap="square" lIns="0" tIns="0" rIns="0" bIns="0" rtlCol="0" anchor="ctr"/>
           <a:lstStyle/>
           <a:p>
             <a:pPr indent="0" marL="0">
               <a:buNone/>
             </a:pPr>
             <a:r>
-              <a:rPr lang="en-US" sz="1250" dirty="0">
+              <a:rPr lang="en-US" sz="2800" dirty="0">
                 <a:solidFill>
                   <a:srgbClr val="26262F"/>
                 </a:solidFill>
@@ -19378,7 +19426,7 @@
               </a:rPr>
               <a:t>The same path (/api/books/:id) can have completely different handlers depending on the method. Express matches on the combination of method AND path together, not the path alone -- this pairing is often called an endpoint.</a:t>
             </a:r>
-            <a:endParaRPr lang="en-US" sz="1250" dirty="0"/>
+            <a:endParaRPr lang="en-US" sz="2800" dirty="0"/>
           </a:p>
         </p:txBody>
       </p:sp>
@@ -19544,7 +19592,7 @@
         <p:spPr>
           <a:xfrm>
             <a:off x="640080" y="1965960"/>
-            <a:ext cx="10911535" cy="1737360"/>
+            <a:ext cx="10911535" cy="3657600"/>
           </a:xfrm>
           <a:prstGeom prst="roundRect">
             <a:avLst>
@@ -19575,7 +19623,7 @@
         <p:spPr>
           <a:xfrm>
             <a:off x="868680" y="2103120"/>
-            <a:ext cx="10454335" cy="274320"/>
+            <a:ext cx="10454335" cy="400000"/>
           </a:xfrm>
           <a:prstGeom prst="rect">
             <a:avLst/>
@@ -19591,7 +19639,7 @@
               <a:buNone/>
             </a:pPr>
             <a:r>
-              <a:rPr lang="en-US" sz="1000" b="1" spc="200" kern="0" dirty="0">
+              <a:rPr lang="en-US" sz="1800" b="1" spc="200" kern="0" dirty="0">
                 <a:solidFill>
                   <a:srgbClr val="1F7A46"/>
                 </a:solidFill>
@@ -19601,7 +19649,7 @@
               </a:rPr>
               <a:t>TIP</a:t>
             </a:r>
-            <a:endParaRPr lang="en-US" sz="1000" dirty="0"/>
+            <a:endParaRPr lang="en-US" sz="1800" dirty="0"/>
           </a:p>
         </p:txBody>
       </p:sp>
@@ -19613,24 +19661,24 @@
         </p:nvSpPr>
         <p:spPr>
           <a:xfrm>
-            <a:off x="868680" y="2404872"/>
-            <a:ext cx="10454335" cy="1143000"/>
-          </a:xfrm>
-          <a:prstGeom prst="rect">
-            <a:avLst/>
-          </a:prstGeom>
-          <a:noFill/>
-          <a:ln/>
-        </p:spPr>
-        <p:txBody>
-          <a:bodyPr wrap="square" lIns="0" tIns="0" rIns="0" bIns="0" rtlCol="0" anchor="t"/>
+            <a:off x="868680" y="2795960"/>
+            <a:ext cx="10454335" cy="2500000"/>
+          </a:xfrm>
+          <a:prstGeom prst="rect">
+            <a:avLst/>
+          </a:prstGeom>
+          <a:noFill/>
+          <a:ln/>
+        </p:spPr>
+        <p:txBody>
+          <a:bodyPr wrap="square" lIns="0" tIns="0" rIns="0" bIns="0" rtlCol="0" anchor="ctr"/>
           <a:lstStyle/>
           <a:p>
             <a:pPr indent="0" marL="0">
               <a:buNone/>
             </a:pPr>
             <a:r>
-              <a:rPr lang="en-US" sz="1250" dirty="0">
+              <a:rPr lang="en-US" sz="2800" dirty="0">
                 <a:solidFill>
                   <a:srgbClr val="26262F"/>
                 </a:solidFill>
@@ -19640,7 +19688,7 @@
               </a:rPr>
               <a:t>Calling a GET request should never change data on the server. This isn't enforced by the language -- it's a convention other developers, browsers, and tools all rely on. Breaking it can cause surprising bugs, since browsers may pre-fetch or cache GET requests.</a:t>
             </a:r>
-            <a:endParaRPr lang="en-US" sz="1250" dirty="0"/>
+            <a:endParaRPr lang="en-US" sz="2800" dirty="0"/>
           </a:p>
         </p:txBody>
       </p:sp>
